--- a/REI-Combinatoria/Materiales en inglés/06b - Fase1_InformeGrupal_Presentacio1.pptx
+++ b/REI-Combinatoria/Materiales en inglés/06b - Fase1_InformeGrupal_Presentacio1.pptx
@@ -1,33 +1,33 @@
 
 <file path=ppt/presentation.xml><?xml version="1.0" encoding="utf-8"?>
-<p:presentation xmlns:a="http://schemas.openxmlformats.org/drawingml/2006/main" xmlns:r="http://schemas.openxmlformats.org/officeDocument/2006/relationships" xmlns:mc="http://schemas.openxmlformats.org/markup-compatibility/2006" xmlns:mv="urn:schemas-microsoft-com:mac:vml" xmlns:p="http://schemas.openxmlformats.org/presentationml/2006/main" xmlns:c="http://schemas.openxmlformats.org/drawingml/2006/chart" xmlns:dgm="http://schemas.openxmlformats.org/drawingml/2006/diagram" xmlns:o="urn:schemas-microsoft-com:office:office" xmlns:v="urn:schemas-microsoft-com:vml" xmlns:pvml="urn:schemas-microsoft-com:office:powerpoint" xmlns:com="http://schemas.openxmlformats.org/drawingml/2006/compatibility" xmlns:p14="http://schemas.microsoft.com/office/powerpoint/2010/main" xmlns:p15="http://schemas.microsoft.com/office/powerpoint/2012/main" xmlns:ahyp="http://schemas.microsoft.com/office/drawing/2018/hyperlinkcolor" autoCompressPictures="0" embedTrueTypeFonts="1" strictFirstAndLastChars="0" saveSubsetFonts="1">
+<p:presentation xmlns:a="http://schemas.openxmlformats.org/drawingml/2006/main" xmlns:r="http://schemas.openxmlformats.org/officeDocument/2006/relationships" xmlns:p="http://schemas.openxmlformats.org/presentationml/2006/main" strictFirstAndLastChars="0" embedTrueTypeFonts="1" saveSubsetFonts="1" autoCompressPictures="0">
   <p:sldMasterIdLst>
-    <p:sldMasterId id="2147483654" r:id="rId4"/>
+    <p:sldMasterId id="2147483654" r:id="rId1"/>
   </p:sldMasterIdLst>
   <p:notesMasterIdLst>
-    <p:notesMasterId r:id="rId5"/>
+    <p:notesMasterId r:id="rId8"/>
   </p:notesMasterIdLst>
   <p:sldIdLst>
-    <p:sldId id="256" r:id="rId6"/>
-    <p:sldId id="257" r:id="rId7"/>
-    <p:sldId id="258" r:id="rId8"/>
-    <p:sldId id="259" r:id="rId9"/>
-    <p:sldId id="260" r:id="rId10"/>
-    <p:sldId id="261" r:id="rId11"/>
+    <p:sldId id="256" r:id="rId2"/>
+    <p:sldId id="257" r:id="rId3"/>
+    <p:sldId id="258" r:id="rId4"/>
+    <p:sldId id="259" r:id="rId5"/>
+    <p:sldId id="260" r:id="rId6"/>
+    <p:sldId id="261" r:id="rId7"/>
   </p:sldIdLst>
-  <p:sldSz cy="6858000" cx="9144000"/>
-  <p:notesSz cx="7099300" cy="10234600"/>
+  <p:sldSz cx="9144000" cy="6858000" type="screen4x3"/>
+  <p:notesSz cx="7099300" cy="10234613"/>
   <p:embeddedFontLst>
     <p:embeddedFont>
-      <p:font typeface="Century Gothic"/>
-      <p:regular r:id="rId12"/>
-      <p:bold r:id="rId13"/>
-      <p:italic r:id="rId14"/>
-      <p:boldItalic r:id="rId15"/>
+      <p:font typeface="Century Gothic" panose="020B0502020202020204" pitchFamily="34" charset="0"/>
+      <p:regular r:id="rId9"/>
+      <p:bold r:id="rId10"/>
+      <p:italic r:id="rId11"/>
+      <p:boldItalic r:id="rId12"/>
     </p:embeddedFont>
   </p:embeddedFontLst>
   <p:defaultTextStyle>
-    <a:defPPr lvl="0" marR="0" rtl="0" algn="l">
+    <a:defPPr marR="0" lvl="0" algn="l" rtl="0">
       <a:lnSpc>
         <a:spcPct val="100000"/>
       </a:lnSpc>
@@ -38,7 +38,7 @@
         <a:spcPts val="0"/>
       </a:spcAft>
     </a:defPPr>
-    <a:lvl1pPr lvl="0" marR="0" rtl="0" algn="l">
+    <a:lvl1pPr marR="0" lvl="0" algn="l" rtl="0">
       <a:lnSpc>
         <a:spcPct val="100000"/>
       </a:lnSpc>
@@ -52,7 +52,7 @@
         <a:srgbClr val="000000"/>
       </a:buClr>
       <a:buFont typeface="Arial"/>
-      <a:defRPr b="0" i="0" sz="1400" u="none" cap="none" strike="noStrike">
+      <a:defRPr sz="1400" b="0" i="0" u="none" strike="noStrike" cap="none">
         <a:solidFill>
           <a:srgbClr val="000000"/>
         </a:solidFill>
@@ -62,7 +62,7 @@
         <a:sym typeface="Arial"/>
       </a:defRPr>
     </a:lvl1pPr>
-    <a:lvl2pPr lvl="1" marR="0" rtl="0" algn="l">
+    <a:lvl2pPr marR="0" lvl="1" algn="l" rtl="0">
       <a:lnSpc>
         <a:spcPct val="100000"/>
       </a:lnSpc>
@@ -76,7 +76,7 @@
         <a:srgbClr val="000000"/>
       </a:buClr>
       <a:buFont typeface="Arial"/>
-      <a:defRPr b="0" i="0" sz="1400" u="none" cap="none" strike="noStrike">
+      <a:defRPr sz="1400" b="0" i="0" u="none" strike="noStrike" cap="none">
         <a:solidFill>
           <a:srgbClr val="000000"/>
         </a:solidFill>
@@ -86,7 +86,7 @@
         <a:sym typeface="Arial"/>
       </a:defRPr>
     </a:lvl2pPr>
-    <a:lvl3pPr lvl="2" marR="0" rtl="0" algn="l">
+    <a:lvl3pPr marR="0" lvl="2" algn="l" rtl="0">
       <a:lnSpc>
         <a:spcPct val="100000"/>
       </a:lnSpc>
@@ -100,7 +100,7 @@
         <a:srgbClr val="000000"/>
       </a:buClr>
       <a:buFont typeface="Arial"/>
-      <a:defRPr b="0" i="0" sz="1400" u="none" cap="none" strike="noStrike">
+      <a:defRPr sz="1400" b="0" i="0" u="none" strike="noStrike" cap="none">
         <a:solidFill>
           <a:srgbClr val="000000"/>
         </a:solidFill>
@@ -110,7 +110,7 @@
         <a:sym typeface="Arial"/>
       </a:defRPr>
     </a:lvl3pPr>
-    <a:lvl4pPr lvl="3" marR="0" rtl="0" algn="l">
+    <a:lvl4pPr marR="0" lvl="3" algn="l" rtl="0">
       <a:lnSpc>
         <a:spcPct val="100000"/>
       </a:lnSpc>
@@ -124,7 +124,7 @@
         <a:srgbClr val="000000"/>
       </a:buClr>
       <a:buFont typeface="Arial"/>
-      <a:defRPr b="0" i="0" sz="1400" u="none" cap="none" strike="noStrike">
+      <a:defRPr sz="1400" b="0" i="0" u="none" strike="noStrike" cap="none">
         <a:solidFill>
           <a:srgbClr val="000000"/>
         </a:solidFill>
@@ -134,7 +134,7 @@
         <a:sym typeface="Arial"/>
       </a:defRPr>
     </a:lvl4pPr>
-    <a:lvl5pPr lvl="4" marR="0" rtl="0" algn="l">
+    <a:lvl5pPr marR="0" lvl="4" algn="l" rtl="0">
       <a:lnSpc>
         <a:spcPct val="100000"/>
       </a:lnSpc>
@@ -148,7 +148,7 @@
         <a:srgbClr val="000000"/>
       </a:buClr>
       <a:buFont typeface="Arial"/>
-      <a:defRPr b="0" i="0" sz="1400" u="none" cap="none" strike="noStrike">
+      <a:defRPr sz="1400" b="0" i="0" u="none" strike="noStrike" cap="none">
         <a:solidFill>
           <a:srgbClr val="000000"/>
         </a:solidFill>
@@ -158,7 +158,7 @@
         <a:sym typeface="Arial"/>
       </a:defRPr>
     </a:lvl5pPr>
-    <a:lvl6pPr lvl="5" marR="0" rtl="0" algn="l">
+    <a:lvl6pPr marR="0" lvl="5" algn="l" rtl="0">
       <a:lnSpc>
         <a:spcPct val="100000"/>
       </a:lnSpc>
@@ -172,7 +172,7 @@
         <a:srgbClr val="000000"/>
       </a:buClr>
       <a:buFont typeface="Arial"/>
-      <a:defRPr b="0" i="0" sz="1400" u="none" cap="none" strike="noStrike">
+      <a:defRPr sz="1400" b="0" i="0" u="none" strike="noStrike" cap="none">
         <a:solidFill>
           <a:srgbClr val="000000"/>
         </a:solidFill>
@@ -182,7 +182,7 @@
         <a:sym typeface="Arial"/>
       </a:defRPr>
     </a:lvl6pPr>
-    <a:lvl7pPr lvl="6" marR="0" rtl="0" algn="l">
+    <a:lvl7pPr marR="0" lvl="6" algn="l" rtl="0">
       <a:lnSpc>
         <a:spcPct val="100000"/>
       </a:lnSpc>
@@ -196,7 +196,7 @@
         <a:srgbClr val="000000"/>
       </a:buClr>
       <a:buFont typeface="Arial"/>
-      <a:defRPr b="0" i="0" sz="1400" u="none" cap="none" strike="noStrike">
+      <a:defRPr sz="1400" b="0" i="0" u="none" strike="noStrike" cap="none">
         <a:solidFill>
           <a:srgbClr val="000000"/>
         </a:solidFill>
@@ -206,7 +206,7 @@
         <a:sym typeface="Arial"/>
       </a:defRPr>
     </a:lvl7pPr>
-    <a:lvl8pPr lvl="7" marR="0" rtl="0" algn="l">
+    <a:lvl8pPr marR="0" lvl="7" algn="l" rtl="0">
       <a:lnSpc>
         <a:spcPct val="100000"/>
       </a:lnSpc>
@@ -220,7 +220,7 @@
         <a:srgbClr val="000000"/>
       </a:buClr>
       <a:buFont typeface="Arial"/>
-      <a:defRPr b="0" i="0" sz="1400" u="none" cap="none" strike="noStrike">
+      <a:defRPr sz="1400" b="0" i="0" u="none" strike="noStrike" cap="none">
         <a:solidFill>
           <a:srgbClr val="000000"/>
         </a:solidFill>
@@ -230,7 +230,7 @@
         <a:sym typeface="Arial"/>
       </a:defRPr>
     </a:lvl8pPr>
-    <a:lvl9pPr lvl="8" marR="0" rtl="0" algn="l">
+    <a:lvl9pPr marR="0" lvl="8" algn="l" rtl="0">
       <a:lnSpc>
         <a:spcPct val="100000"/>
       </a:lnSpc>
@@ -244,7 +244,7 @@
         <a:srgbClr val="000000"/>
       </a:buClr>
       <a:buFont typeface="Arial"/>
-      <a:defRPr b="0" i="0" sz="1400" u="none" cap="none" strike="noStrike">
+      <a:defRPr sz="1400" b="0" i="0" u="none" strike="noStrike" cap="none">
         <a:solidFill>
           <a:srgbClr val="000000"/>
         </a:solidFill>
@@ -257,7 +257,7 @@
   </p:defaultTextStyle>
   <p:extLst>
     <p:ext uri="{EFAFB233-063F-42B5-8137-9DF3F51BA10A}">
-      <p15:sldGuideLst>
+      <p15:sldGuideLst xmlns:p15="http://schemas.microsoft.com/office/powerpoint/2012/main">
         <p15:guide id="1" orient="horz" pos="2160">
           <p15:clr>
             <a:srgbClr val="A4A3A4"/>
@@ -271,7 +271,7 @@
       </p15:sldGuideLst>
     </p:ext>
     <p:ext uri="{2D200454-40CA-4A62-9FC3-DE9A4176ACB9}">
-      <p15:notesGuideLst>
+      <p15:notesGuideLst xmlns:p15="http://schemas.microsoft.com/office/powerpoint/2012/main">
         <p15:guide id="1" orient="horz" pos="3224">
           <p15:clr>
             <a:srgbClr val="A4A3A4"/>
@@ -288,19 +288,65 @@
 </p:presentation>
 </file>
 
+<file path=ppt/revisionInfo.xml><?xml version="1.0" encoding="utf-8"?>
+<p1510:revInfo xmlns:a="http://schemas.openxmlformats.org/drawingml/2006/main" xmlns:r="http://schemas.openxmlformats.org/officeDocument/2006/relationships" xmlns:p1510="http://schemas.microsoft.com/office/powerpoint/2015/10/main">
+  <p1510:revLst>
+    <p1510:client id="{42D12D69-C50B-4B18-AED8-B3A53B1C50FE}" v="1" dt="2025-10-16T17:39:15.921"/>
+  </p1510:revLst>
+</p1510:revInfo>
+</file>
+
+<file path=ppt/changesInfos/changesInfo1.xml><?xml version="1.0" encoding="utf-8"?>
+<pc:chgInfo xmlns:a="http://schemas.openxmlformats.org/drawingml/2006/main" xmlns:r="http://schemas.openxmlformats.org/officeDocument/2006/relationships" xmlns:ac="http://schemas.microsoft.com/office/drawing/2013/main/command" xmlns:pc="http://schemas.microsoft.com/office/powerpoint/2013/main/command">
+  <pc:docChgLst>
+    <pc:chgData name="Susana Vasquez Elias" userId="e776416f-e583-4d77-b224-146689d50a03" providerId="ADAL" clId="{3C100498-C411-419B-B5E6-C2EF21CD595F}"/>
+    <pc:docChg chg="custSel modSld">
+      <pc:chgData name="Susana Vasquez Elias" userId="e776416f-e583-4d77-b224-146689d50a03" providerId="ADAL" clId="{3C100498-C411-419B-B5E6-C2EF21CD595F}" dt="2025-10-16T17:39:19.344" v="2" actId="478"/>
+      <pc:docMkLst>
+        <pc:docMk/>
+      </pc:docMkLst>
+      <pc:sldChg chg="addSp delSp modSp mod">
+        <pc:chgData name="Susana Vasquez Elias" userId="e776416f-e583-4d77-b224-146689d50a03" providerId="ADAL" clId="{3C100498-C411-419B-B5E6-C2EF21CD595F}" dt="2025-10-16T17:39:19.344" v="2" actId="478"/>
+        <pc:sldMkLst>
+          <pc:docMk/>
+          <pc:sldMk cId="0" sldId="256"/>
+        </pc:sldMkLst>
+        <pc:picChg chg="add mod">
+          <ac:chgData name="Susana Vasquez Elias" userId="e776416f-e583-4d77-b224-146689d50a03" providerId="ADAL" clId="{3C100498-C411-419B-B5E6-C2EF21CD595F}" dt="2025-10-16T17:39:18.415" v="1" actId="1076"/>
+          <ac:picMkLst>
+            <pc:docMk/>
+            <pc:sldMk cId="0" sldId="256"/>
+            <ac:picMk id="2" creationId="{2ADF4236-C311-988C-1EAF-F33444BF8989}"/>
+          </ac:picMkLst>
+        </pc:picChg>
+        <pc:picChg chg="add del mod">
+          <ac:chgData name="Susana Vasquez Elias" userId="e776416f-e583-4d77-b224-146689d50a03" providerId="ADAL" clId="{3C100498-C411-419B-B5E6-C2EF21CD595F}" dt="2025-10-16T17:39:19.344" v="2" actId="478"/>
+          <ac:picMkLst>
+            <pc:docMk/>
+            <pc:sldMk cId="0" sldId="256"/>
+            <ac:picMk id="3" creationId="{06E5C52F-59CC-9EFE-2A2B-2EE62EBCDAD6}"/>
+          </ac:picMkLst>
+        </pc:picChg>
+      </pc:sldChg>
+    </pc:docChg>
+  </pc:docChgLst>
+</pc:chgInfo>
+</file>
+
 <file path=ppt/notesMasters/notesMaster1.xml><?xml version="1.0" encoding="utf-8"?>
-<p:notesMaster xmlns:a="http://schemas.openxmlformats.org/drawingml/2006/main" xmlns:r="http://schemas.openxmlformats.org/officeDocument/2006/relationships" xmlns:mc="http://schemas.openxmlformats.org/markup-compatibility/2006" xmlns:mv="urn:schemas-microsoft-com:mac:vml" xmlns:p="http://schemas.openxmlformats.org/presentationml/2006/main" xmlns:c="http://schemas.openxmlformats.org/drawingml/2006/chart" xmlns:dgm="http://schemas.openxmlformats.org/drawingml/2006/diagram" xmlns:o="urn:schemas-microsoft-com:office:office" xmlns:v="urn:schemas-microsoft-com:vml" xmlns:pvml="urn:schemas-microsoft-com:office:powerpoint" xmlns:com="http://schemas.openxmlformats.org/drawingml/2006/compatibility" xmlns:p14="http://schemas.microsoft.com/office/powerpoint/2010/main" xmlns:p15="http://schemas.microsoft.com/office/powerpoint/2012/main" xmlns:ahyp="http://schemas.microsoft.com/office/drawing/2018/hyperlinkcolor">
+<p:notesMaster xmlns:a="http://schemas.openxmlformats.org/drawingml/2006/main" xmlns:r="http://schemas.openxmlformats.org/officeDocument/2006/relationships" xmlns:p="http://schemas.openxmlformats.org/presentationml/2006/main">
   <p:cSld>
     <p:bg>
       <p:bgPr>
         <a:solidFill>
           <a:schemeClr val="lt1"/>
         </a:solidFill>
+        <a:effectLst/>
       </p:bgPr>
     </p:bg>
     <p:spTree>
       <p:nvGrpSpPr>
-        <p:cNvPr id="2" name="Shape 2"/>
+        <p:cNvPr id="1" name="Shape 2"/>
         <p:cNvGrpSpPr/>
         <p:nvPr/>
       </p:nvGrpSpPr>
@@ -315,9 +361,11 @@
       <p:sp>
         <p:nvSpPr>
           <p:cNvPr id="3" name="Google Shape;3;n"/>
-          <p:cNvSpPr txBox="1"/>
+          <p:cNvSpPr txBox="1">
+            <a:spLocks noGrp="1"/>
+          </p:cNvSpPr>
           <p:nvPr>
-            <p:ph idx="2" type="hdr"/>
+            <p:ph type="hdr" idx="2"/>
           </p:nvPr>
         </p:nvSpPr>
         <p:spPr>
@@ -334,20 +382,20 @@
           </a:ln>
         </p:spPr>
         <p:txBody>
-          <a:bodyPr anchorCtr="0" anchor="t" bIns="47375" lIns="94750" spcFirstLastPara="1" rIns="94750" wrap="square" tIns="47375">
+          <a:bodyPr spcFirstLastPara="1" wrap="square" lIns="94750" tIns="47375" rIns="94750" bIns="47375" anchor="t" anchorCtr="0">
             <a:noAutofit/>
           </a:bodyPr>
           <a:lstStyle>
-            <a:lvl1pPr lvl="0" marR="0" rtl="0" algn="l">
-              <a:spcBef>
-                <a:spcPts val="0"/>
-              </a:spcBef>
-              <a:spcAft>
-                <a:spcPts val="0"/>
-              </a:spcAft>
-              <a:buSzPts val="1400"/>
-              <a:buNone/>
-              <a:defRPr b="0" i="0" sz="1200" u="none" cap="none" strike="noStrike">
+            <a:lvl1pPr marR="0" lvl="0" algn="l" rtl="0">
+              <a:spcBef>
+                <a:spcPts val="0"/>
+              </a:spcBef>
+              <a:spcAft>
+                <a:spcPts val="0"/>
+              </a:spcAft>
+              <a:buSzPts val="1400"/>
+              <a:buNone/>
+              <a:defRPr sz="1200" b="0" i="0" u="none" strike="noStrike" cap="none">
                 <a:solidFill>
                   <a:schemeClr val="dk1"/>
                 </a:solidFill>
@@ -357,16 +405,16 @@
                 <a:sym typeface="Calibri"/>
               </a:defRPr>
             </a:lvl1pPr>
-            <a:lvl2pPr lvl="1" marR="0" rtl="0" algn="l">
-              <a:spcBef>
-                <a:spcPts val="0"/>
-              </a:spcBef>
-              <a:spcAft>
-                <a:spcPts val="0"/>
-              </a:spcAft>
-              <a:buSzPts val="1400"/>
-              <a:buNone/>
-              <a:defRPr b="0" i="0" sz="1800" u="none" cap="none" strike="noStrike">
+            <a:lvl2pPr marR="0" lvl="1" algn="l" rtl="0">
+              <a:spcBef>
+                <a:spcPts val="0"/>
+              </a:spcBef>
+              <a:spcAft>
+                <a:spcPts val="0"/>
+              </a:spcAft>
+              <a:buSzPts val="1400"/>
+              <a:buNone/>
+              <a:defRPr sz="1800" b="0" i="0" u="none" strike="noStrike" cap="none">
                 <a:solidFill>
                   <a:schemeClr val="dk1"/>
                 </a:solidFill>
@@ -376,16 +424,16 @@
                 <a:sym typeface="Calibri"/>
               </a:defRPr>
             </a:lvl2pPr>
-            <a:lvl3pPr lvl="2" marR="0" rtl="0" algn="l">
-              <a:spcBef>
-                <a:spcPts val="0"/>
-              </a:spcBef>
-              <a:spcAft>
-                <a:spcPts val="0"/>
-              </a:spcAft>
-              <a:buSzPts val="1400"/>
-              <a:buNone/>
-              <a:defRPr b="0" i="0" sz="1800" u="none" cap="none" strike="noStrike">
+            <a:lvl3pPr marR="0" lvl="2" algn="l" rtl="0">
+              <a:spcBef>
+                <a:spcPts val="0"/>
+              </a:spcBef>
+              <a:spcAft>
+                <a:spcPts val="0"/>
+              </a:spcAft>
+              <a:buSzPts val="1400"/>
+              <a:buNone/>
+              <a:defRPr sz="1800" b="0" i="0" u="none" strike="noStrike" cap="none">
                 <a:solidFill>
                   <a:schemeClr val="dk1"/>
                 </a:solidFill>
@@ -395,16 +443,16 @@
                 <a:sym typeface="Calibri"/>
               </a:defRPr>
             </a:lvl3pPr>
-            <a:lvl4pPr lvl="3" marR="0" rtl="0" algn="l">
-              <a:spcBef>
-                <a:spcPts val="0"/>
-              </a:spcBef>
-              <a:spcAft>
-                <a:spcPts val="0"/>
-              </a:spcAft>
-              <a:buSzPts val="1400"/>
-              <a:buNone/>
-              <a:defRPr b="0" i="0" sz="1800" u="none" cap="none" strike="noStrike">
+            <a:lvl4pPr marR="0" lvl="3" algn="l" rtl="0">
+              <a:spcBef>
+                <a:spcPts val="0"/>
+              </a:spcBef>
+              <a:spcAft>
+                <a:spcPts val="0"/>
+              </a:spcAft>
+              <a:buSzPts val="1400"/>
+              <a:buNone/>
+              <a:defRPr sz="1800" b="0" i="0" u="none" strike="noStrike" cap="none">
                 <a:solidFill>
                   <a:schemeClr val="dk1"/>
                 </a:solidFill>
@@ -414,16 +462,16 @@
                 <a:sym typeface="Calibri"/>
               </a:defRPr>
             </a:lvl4pPr>
-            <a:lvl5pPr lvl="4" marR="0" rtl="0" algn="l">
-              <a:spcBef>
-                <a:spcPts val="0"/>
-              </a:spcBef>
-              <a:spcAft>
-                <a:spcPts val="0"/>
-              </a:spcAft>
-              <a:buSzPts val="1400"/>
-              <a:buNone/>
-              <a:defRPr b="0" i="0" sz="1800" u="none" cap="none" strike="noStrike">
+            <a:lvl5pPr marR="0" lvl="4" algn="l" rtl="0">
+              <a:spcBef>
+                <a:spcPts val="0"/>
+              </a:spcBef>
+              <a:spcAft>
+                <a:spcPts val="0"/>
+              </a:spcAft>
+              <a:buSzPts val="1400"/>
+              <a:buNone/>
+              <a:defRPr sz="1800" b="0" i="0" u="none" strike="noStrike" cap="none">
                 <a:solidFill>
                   <a:schemeClr val="dk1"/>
                 </a:solidFill>
@@ -433,16 +481,16 @@
                 <a:sym typeface="Calibri"/>
               </a:defRPr>
             </a:lvl5pPr>
-            <a:lvl6pPr lvl="5" marR="0" rtl="0" algn="l">
-              <a:spcBef>
-                <a:spcPts val="0"/>
-              </a:spcBef>
-              <a:spcAft>
-                <a:spcPts val="0"/>
-              </a:spcAft>
-              <a:buSzPts val="1400"/>
-              <a:buNone/>
-              <a:defRPr b="0" i="0" sz="1800" u="none" cap="none" strike="noStrike">
+            <a:lvl6pPr marR="0" lvl="5" algn="l" rtl="0">
+              <a:spcBef>
+                <a:spcPts val="0"/>
+              </a:spcBef>
+              <a:spcAft>
+                <a:spcPts val="0"/>
+              </a:spcAft>
+              <a:buSzPts val="1400"/>
+              <a:buNone/>
+              <a:defRPr sz="1800" b="0" i="0" u="none" strike="noStrike" cap="none">
                 <a:solidFill>
                   <a:schemeClr val="dk1"/>
                 </a:solidFill>
@@ -452,16 +500,16 @@
                 <a:sym typeface="Calibri"/>
               </a:defRPr>
             </a:lvl6pPr>
-            <a:lvl7pPr lvl="6" marR="0" rtl="0" algn="l">
-              <a:spcBef>
-                <a:spcPts val="0"/>
-              </a:spcBef>
-              <a:spcAft>
-                <a:spcPts val="0"/>
-              </a:spcAft>
-              <a:buSzPts val="1400"/>
-              <a:buNone/>
-              <a:defRPr b="0" i="0" sz="1800" u="none" cap="none" strike="noStrike">
+            <a:lvl7pPr marR="0" lvl="6" algn="l" rtl="0">
+              <a:spcBef>
+                <a:spcPts val="0"/>
+              </a:spcBef>
+              <a:spcAft>
+                <a:spcPts val="0"/>
+              </a:spcAft>
+              <a:buSzPts val="1400"/>
+              <a:buNone/>
+              <a:defRPr sz="1800" b="0" i="0" u="none" strike="noStrike" cap="none">
                 <a:solidFill>
                   <a:schemeClr val="dk1"/>
                 </a:solidFill>
@@ -471,16 +519,16 @@
                 <a:sym typeface="Calibri"/>
               </a:defRPr>
             </a:lvl7pPr>
-            <a:lvl8pPr lvl="7" marR="0" rtl="0" algn="l">
-              <a:spcBef>
-                <a:spcPts val="0"/>
-              </a:spcBef>
-              <a:spcAft>
-                <a:spcPts val="0"/>
-              </a:spcAft>
-              <a:buSzPts val="1400"/>
-              <a:buNone/>
-              <a:defRPr b="0" i="0" sz="1800" u="none" cap="none" strike="noStrike">
+            <a:lvl8pPr marR="0" lvl="7" algn="l" rtl="0">
+              <a:spcBef>
+                <a:spcPts val="0"/>
+              </a:spcBef>
+              <a:spcAft>
+                <a:spcPts val="0"/>
+              </a:spcAft>
+              <a:buSzPts val="1400"/>
+              <a:buNone/>
+              <a:defRPr sz="1800" b="0" i="0" u="none" strike="noStrike" cap="none">
                 <a:solidFill>
                   <a:schemeClr val="dk1"/>
                 </a:solidFill>
@@ -490,16 +538,16 @@
                 <a:sym typeface="Calibri"/>
               </a:defRPr>
             </a:lvl8pPr>
-            <a:lvl9pPr lvl="8" marR="0" rtl="0" algn="l">
-              <a:spcBef>
-                <a:spcPts val="0"/>
-              </a:spcBef>
-              <a:spcAft>
-                <a:spcPts val="0"/>
-              </a:spcAft>
-              <a:buSzPts val="1400"/>
-              <a:buNone/>
-              <a:defRPr b="0" i="0" sz="1800" u="none" cap="none" strike="noStrike">
+            <a:lvl9pPr marR="0" lvl="8" algn="l" rtl="0">
+              <a:spcBef>
+                <a:spcPts val="0"/>
+              </a:spcBef>
+              <a:spcAft>
+                <a:spcPts val="0"/>
+              </a:spcAft>
+              <a:buSzPts val="1400"/>
+              <a:buNone/>
+              <a:defRPr sz="1800" b="0" i="0" u="none" strike="noStrike" cap="none">
                 <a:solidFill>
                   <a:schemeClr val="dk1"/>
                 </a:solidFill>
@@ -510,15 +558,19 @@
               </a:defRPr>
             </a:lvl9pPr>
           </a:lstStyle>
-          <a:p/>
+          <a:p>
+            <a:endParaRPr/>
+          </a:p>
         </p:txBody>
       </p:sp>
       <p:sp>
         <p:nvSpPr>
           <p:cNvPr id="4" name="Google Shape;4;n"/>
-          <p:cNvSpPr txBox="1"/>
+          <p:cNvSpPr txBox="1">
+            <a:spLocks noGrp="1"/>
+          </p:cNvSpPr>
           <p:nvPr>
-            <p:ph idx="10" type="dt"/>
+            <p:ph type="dt" idx="10"/>
           </p:nvPr>
         </p:nvSpPr>
         <p:spPr>
@@ -535,20 +587,20 @@
           </a:ln>
         </p:spPr>
         <p:txBody>
-          <a:bodyPr anchorCtr="0" anchor="t" bIns="47375" lIns="94750" spcFirstLastPara="1" rIns="94750" wrap="square" tIns="47375">
+          <a:bodyPr spcFirstLastPara="1" wrap="square" lIns="94750" tIns="47375" rIns="94750" bIns="47375" anchor="t" anchorCtr="0">
             <a:noAutofit/>
           </a:bodyPr>
           <a:lstStyle>
-            <a:lvl1pPr lvl="0" marR="0" rtl="0" algn="r">
-              <a:spcBef>
-                <a:spcPts val="0"/>
-              </a:spcBef>
-              <a:spcAft>
-                <a:spcPts val="0"/>
-              </a:spcAft>
-              <a:buSzPts val="1400"/>
-              <a:buNone/>
-              <a:defRPr b="0" i="0" sz="1200" u="none" cap="none" strike="noStrike">
+            <a:lvl1pPr marR="0" lvl="0" algn="r" rtl="0">
+              <a:spcBef>
+                <a:spcPts val="0"/>
+              </a:spcBef>
+              <a:spcAft>
+                <a:spcPts val="0"/>
+              </a:spcAft>
+              <a:buSzPts val="1400"/>
+              <a:buNone/>
+              <a:defRPr sz="1200" b="0" i="0" u="none" strike="noStrike" cap="none">
                 <a:solidFill>
                   <a:schemeClr val="dk1"/>
                 </a:solidFill>
@@ -558,16 +610,16 @@
                 <a:sym typeface="Calibri"/>
               </a:defRPr>
             </a:lvl1pPr>
-            <a:lvl2pPr lvl="1" marR="0" rtl="0" algn="l">
-              <a:spcBef>
-                <a:spcPts val="0"/>
-              </a:spcBef>
-              <a:spcAft>
-                <a:spcPts val="0"/>
-              </a:spcAft>
-              <a:buSzPts val="1400"/>
-              <a:buNone/>
-              <a:defRPr b="0" i="0" sz="1800" u="none" cap="none" strike="noStrike">
+            <a:lvl2pPr marR="0" lvl="1" algn="l" rtl="0">
+              <a:spcBef>
+                <a:spcPts val="0"/>
+              </a:spcBef>
+              <a:spcAft>
+                <a:spcPts val="0"/>
+              </a:spcAft>
+              <a:buSzPts val="1400"/>
+              <a:buNone/>
+              <a:defRPr sz="1800" b="0" i="0" u="none" strike="noStrike" cap="none">
                 <a:solidFill>
                   <a:schemeClr val="dk1"/>
                 </a:solidFill>
@@ -577,16 +629,16 @@
                 <a:sym typeface="Calibri"/>
               </a:defRPr>
             </a:lvl2pPr>
-            <a:lvl3pPr lvl="2" marR="0" rtl="0" algn="l">
-              <a:spcBef>
-                <a:spcPts val="0"/>
-              </a:spcBef>
-              <a:spcAft>
-                <a:spcPts val="0"/>
-              </a:spcAft>
-              <a:buSzPts val="1400"/>
-              <a:buNone/>
-              <a:defRPr b="0" i="0" sz="1800" u="none" cap="none" strike="noStrike">
+            <a:lvl3pPr marR="0" lvl="2" algn="l" rtl="0">
+              <a:spcBef>
+                <a:spcPts val="0"/>
+              </a:spcBef>
+              <a:spcAft>
+                <a:spcPts val="0"/>
+              </a:spcAft>
+              <a:buSzPts val="1400"/>
+              <a:buNone/>
+              <a:defRPr sz="1800" b="0" i="0" u="none" strike="noStrike" cap="none">
                 <a:solidFill>
                   <a:schemeClr val="dk1"/>
                 </a:solidFill>
@@ -596,16 +648,16 @@
                 <a:sym typeface="Calibri"/>
               </a:defRPr>
             </a:lvl3pPr>
-            <a:lvl4pPr lvl="3" marR="0" rtl="0" algn="l">
-              <a:spcBef>
-                <a:spcPts val="0"/>
-              </a:spcBef>
-              <a:spcAft>
-                <a:spcPts val="0"/>
-              </a:spcAft>
-              <a:buSzPts val="1400"/>
-              <a:buNone/>
-              <a:defRPr b="0" i="0" sz="1800" u="none" cap="none" strike="noStrike">
+            <a:lvl4pPr marR="0" lvl="3" algn="l" rtl="0">
+              <a:spcBef>
+                <a:spcPts val="0"/>
+              </a:spcBef>
+              <a:spcAft>
+                <a:spcPts val="0"/>
+              </a:spcAft>
+              <a:buSzPts val="1400"/>
+              <a:buNone/>
+              <a:defRPr sz="1800" b="0" i="0" u="none" strike="noStrike" cap="none">
                 <a:solidFill>
                   <a:schemeClr val="dk1"/>
                 </a:solidFill>
@@ -615,16 +667,16 @@
                 <a:sym typeface="Calibri"/>
               </a:defRPr>
             </a:lvl4pPr>
-            <a:lvl5pPr lvl="4" marR="0" rtl="0" algn="l">
-              <a:spcBef>
-                <a:spcPts val="0"/>
-              </a:spcBef>
-              <a:spcAft>
-                <a:spcPts val="0"/>
-              </a:spcAft>
-              <a:buSzPts val="1400"/>
-              <a:buNone/>
-              <a:defRPr b="0" i="0" sz="1800" u="none" cap="none" strike="noStrike">
+            <a:lvl5pPr marR="0" lvl="4" algn="l" rtl="0">
+              <a:spcBef>
+                <a:spcPts val="0"/>
+              </a:spcBef>
+              <a:spcAft>
+                <a:spcPts val="0"/>
+              </a:spcAft>
+              <a:buSzPts val="1400"/>
+              <a:buNone/>
+              <a:defRPr sz="1800" b="0" i="0" u="none" strike="noStrike" cap="none">
                 <a:solidFill>
                   <a:schemeClr val="dk1"/>
                 </a:solidFill>
@@ -634,16 +686,16 @@
                 <a:sym typeface="Calibri"/>
               </a:defRPr>
             </a:lvl5pPr>
-            <a:lvl6pPr lvl="5" marR="0" rtl="0" algn="l">
-              <a:spcBef>
-                <a:spcPts val="0"/>
-              </a:spcBef>
-              <a:spcAft>
-                <a:spcPts val="0"/>
-              </a:spcAft>
-              <a:buSzPts val="1400"/>
-              <a:buNone/>
-              <a:defRPr b="0" i="0" sz="1800" u="none" cap="none" strike="noStrike">
+            <a:lvl6pPr marR="0" lvl="5" algn="l" rtl="0">
+              <a:spcBef>
+                <a:spcPts val="0"/>
+              </a:spcBef>
+              <a:spcAft>
+                <a:spcPts val="0"/>
+              </a:spcAft>
+              <a:buSzPts val="1400"/>
+              <a:buNone/>
+              <a:defRPr sz="1800" b="0" i="0" u="none" strike="noStrike" cap="none">
                 <a:solidFill>
                   <a:schemeClr val="dk1"/>
                 </a:solidFill>
@@ -653,16 +705,16 @@
                 <a:sym typeface="Calibri"/>
               </a:defRPr>
             </a:lvl6pPr>
-            <a:lvl7pPr lvl="6" marR="0" rtl="0" algn="l">
-              <a:spcBef>
-                <a:spcPts val="0"/>
-              </a:spcBef>
-              <a:spcAft>
-                <a:spcPts val="0"/>
-              </a:spcAft>
-              <a:buSzPts val="1400"/>
-              <a:buNone/>
-              <a:defRPr b="0" i="0" sz="1800" u="none" cap="none" strike="noStrike">
+            <a:lvl7pPr marR="0" lvl="6" algn="l" rtl="0">
+              <a:spcBef>
+                <a:spcPts val="0"/>
+              </a:spcBef>
+              <a:spcAft>
+                <a:spcPts val="0"/>
+              </a:spcAft>
+              <a:buSzPts val="1400"/>
+              <a:buNone/>
+              <a:defRPr sz="1800" b="0" i="0" u="none" strike="noStrike" cap="none">
                 <a:solidFill>
                   <a:schemeClr val="dk1"/>
                 </a:solidFill>
@@ -672,16 +724,16 @@
                 <a:sym typeface="Calibri"/>
               </a:defRPr>
             </a:lvl7pPr>
-            <a:lvl8pPr lvl="7" marR="0" rtl="0" algn="l">
-              <a:spcBef>
-                <a:spcPts val="0"/>
-              </a:spcBef>
-              <a:spcAft>
-                <a:spcPts val="0"/>
-              </a:spcAft>
-              <a:buSzPts val="1400"/>
-              <a:buNone/>
-              <a:defRPr b="0" i="0" sz="1800" u="none" cap="none" strike="noStrike">
+            <a:lvl8pPr marR="0" lvl="7" algn="l" rtl="0">
+              <a:spcBef>
+                <a:spcPts val="0"/>
+              </a:spcBef>
+              <a:spcAft>
+                <a:spcPts val="0"/>
+              </a:spcAft>
+              <a:buSzPts val="1400"/>
+              <a:buNone/>
+              <a:defRPr sz="1800" b="0" i="0" u="none" strike="noStrike" cap="none">
                 <a:solidFill>
                   <a:schemeClr val="dk1"/>
                 </a:solidFill>
@@ -691,16 +743,16 @@
                 <a:sym typeface="Calibri"/>
               </a:defRPr>
             </a:lvl8pPr>
-            <a:lvl9pPr lvl="8" marR="0" rtl="0" algn="l">
-              <a:spcBef>
-                <a:spcPts val="0"/>
-              </a:spcBef>
-              <a:spcAft>
-                <a:spcPts val="0"/>
-              </a:spcAft>
-              <a:buSzPts val="1400"/>
-              <a:buNone/>
-              <a:defRPr b="0" i="0" sz="1800" u="none" cap="none" strike="noStrike">
+            <a:lvl9pPr marR="0" lvl="8" algn="l" rtl="0">
+              <a:spcBef>
+                <a:spcPts val="0"/>
+              </a:spcBef>
+              <a:spcAft>
+                <a:spcPts val="0"/>
+              </a:spcAft>
+              <a:buSzPts val="1400"/>
+              <a:buNone/>
+              <a:defRPr sz="1800" b="0" i="0" u="none" strike="noStrike" cap="none">
                 <a:solidFill>
                   <a:schemeClr val="dk1"/>
                 </a:solidFill>
@@ -711,15 +763,19 @@
               </a:defRPr>
             </a:lvl9pPr>
           </a:lstStyle>
-          <a:p/>
+          <a:p>
+            <a:endParaRPr/>
+          </a:p>
         </p:txBody>
       </p:sp>
       <p:sp>
         <p:nvSpPr>
           <p:cNvPr id="5" name="Google Shape;5;n"/>
-          <p:cNvSpPr/>
+          <p:cNvSpPr>
+            <a:spLocks noGrp="1" noRot="1" noChangeAspect="1"/>
+          </p:cNvSpPr>
           <p:nvPr>
-            <p:ph idx="3" type="sldImg"/>
+            <p:ph type="sldImg" idx="3"/>
           </p:nvPr>
         </p:nvSpPr>
         <p:spPr>
@@ -728,9 +784,13 @@
             <a:ext cx="5114925" cy="3836988"/>
           </a:xfrm>
           <a:custGeom>
-            <a:rect b="b" l="l" r="r" t="t"/>
+            <a:avLst/>
+            <a:gdLst/>
+            <a:ahLst/>
+            <a:cxnLst/>
+            <a:rect l="l" t="t" r="r" b="b"/>
             <a:pathLst>
-              <a:path extrusionOk="0" h="120000" w="120000">
+              <a:path w="120000" h="120000" extrusionOk="0">
                 <a:moveTo>
                   <a:pt x="0" y="0"/>
                 </a:moveTo>
@@ -748,23 +808,25 @@
             </a:pathLst>
           </a:custGeom>
           <a:noFill/>
-          <a:ln cap="flat" cmpd="sng" w="12700">
+          <a:ln w="12700" cap="flat" cmpd="sng">
             <a:solidFill>
               <a:srgbClr val="000000"/>
             </a:solidFill>
             <a:prstDash val="solid"/>
             <a:round/>
-            <a:headEnd len="sm" w="sm" type="none"/>
-            <a:tailEnd len="sm" w="sm" type="none"/>
+            <a:headEnd type="none" w="sm" len="sm"/>
+            <a:tailEnd type="none" w="sm" len="sm"/>
           </a:ln>
         </p:spPr>
       </p:sp>
       <p:sp>
         <p:nvSpPr>
           <p:cNvPr id="6" name="Google Shape;6;n"/>
-          <p:cNvSpPr txBox="1"/>
+          <p:cNvSpPr txBox="1">
+            <a:spLocks noGrp="1"/>
+          </p:cNvSpPr>
           <p:nvPr>
-            <p:ph idx="1" type="body"/>
+            <p:ph type="body" idx="1"/>
           </p:nvPr>
         </p:nvSpPr>
         <p:spPr>
@@ -781,20 +843,20 @@
           </a:ln>
         </p:spPr>
         <p:txBody>
-          <a:bodyPr anchorCtr="0" anchor="t" bIns="47375" lIns="94750" spcFirstLastPara="1" rIns="94750" wrap="square" tIns="47375">
+          <a:bodyPr spcFirstLastPara="1" wrap="square" lIns="94750" tIns="47375" rIns="94750" bIns="47375" anchor="t" anchorCtr="0">
             <a:noAutofit/>
           </a:bodyPr>
           <a:lstStyle>
-            <a:lvl1pPr indent="-228600" lvl="0" marL="457200" marR="0" rtl="0" algn="l">
-              <a:spcBef>
-                <a:spcPts val="0"/>
-              </a:spcBef>
-              <a:spcAft>
-                <a:spcPts val="0"/>
-              </a:spcAft>
-              <a:buSzPts val="1400"/>
-              <a:buNone/>
-              <a:defRPr b="0" i="0" sz="1200" u="none" cap="none" strike="noStrike">
+            <a:lvl1pPr marL="457200" marR="0" lvl="0" indent="-228600" algn="l" rtl="0">
+              <a:spcBef>
+                <a:spcPts val="0"/>
+              </a:spcBef>
+              <a:spcAft>
+                <a:spcPts val="0"/>
+              </a:spcAft>
+              <a:buSzPts val="1400"/>
+              <a:buNone/>
+              <a:defRPr sz="1200" b="0" i="0" u="none" strike="noStrike" cap="none">
                 <a:solidFill>
                   <a:schemeClr val="dk1"/>
                 </a:solidFill>
@@ -804,16 +866,16 @@
                 <a:sym typeface="Calibri"/>
               </a:defRPr>
             </a:lvl1pPr>
-            <a:lvl2pPr indent="-228600" lvl="1" marL="914400" marR="0" rtl="0" algn="l">
-              <a:spcBef>
-                <a:spcPts val="0"/>
-              </a:spcBef>
-              <a:spcAft>
-                <a:spcPts val="0"/>
-              </a:spcAft>
-              <a:buSzPts val="1400"/>
-              <a:buNone/>
-              <a:defRPr b="0" i="0" sz="1200" u="none" cap="none" strike="noStrike">
+            <a:lvl2pPr marL="914400" marR="0" lvl="1" indent="-228600" algn="l" rtl="0">
+              <a:spcBef>
+                <a:spcPts val="0"/>
+              </a:spcBef>
+              <a:spcAft>
+                <a:spcPts val="0"/>
+              </a:spcAft>
+              <a:buSzPts val="1400"/>
+              <a:buNone/>
+              <a:defRPr sz="1200" b="0" i="0" u="none" strike="noStrike" cap="none">
                 <a:solidFill>
                   <a:schemeClr val="dk1"/>
                 </a:solidFill>
@@ -823,16 +885,16 @@
                 <a:sym typeface="Calibri"/>
               </a:defRPr>
             </a:lvl2pPr>
-            <a:lvl3pPr indent="-228600" lvl="2" marL="1371600" marR="0" rtl="0" algn="l">
-              <a:spcBef>
-                <a:spcPts val="0"/>
-              </a:spcBef>
-              <a:spcAft>
-                <a:spcPts val="0"/>
-              </a:spcAft>
-              <a:buSzPts val="1400"/>
-              <a:buNone/>
-              <a:defRPr b="0" i="0" sz="1200" u="none" cap="none" strike="noStrike">
+            <a:lvl3pPr marL="1371600" marR="0" lvl="2" indent="-228600" algn="l" rtl="0">
+              <a:spcBef>
+                <a:spcPts val="0"/>
+              </a:spcBef>
+              <a:spcAft>
+                <a:spcPts val="0"/>
+              </a:spcAft>
+              <a:buSzPts val="1400"/>
+              <a:buNone/>
+              <a:defRPr sz="1200" b="0" i="0" u="none" strike="noStrike" cap="none">
                 <a:solidFill>
                   <a:schemeClr val="dk1"/>
                 </a:solidFill>
@@ -842,16 +904,16 @@
                 <a:sym typeface="Calibri"/>
               </a:defRPr>
             </a:lvl3pPr>
-            <a:lvl4pPr indent="-228600" lvl="3" marL="1828800" marR="0" rtl="0" algn="l">
-              <a:spcBef>
-                <a:spcPts val="0"/>
-              </a:spcBef>
-              <a:spcAft>
-                <a:spcPts val="0"/>
-              </a:spcAft>
-              <a:buSzPts val="1400"/>
-              <a:buNone/>
-              <a:defRPr b="0" i="0" sz="1200" u="none" cap="none" strike="noStrike">
+            <a:lvl4pPr marL="1828800" marR="0" lvl="3" indent="-228600" algn="l" rtl="0">
+              <a:spcBef>
+                <a:spcPts val="0"/>
+              </a:spcBef>
+              <a:spcAft>
+                <a:spcPts val="0"/>
+              </a:spcAft>
+              <a:buSzPts val="1400"/>
+              <a:buNone/>
+              <a:defRPr sz="1200" b="0" i="0" u="none" strike="noStrike" cap="none">
                 <a:solidFill>
                   <a:schemeClr val="dk1"/>
                 </a:solidFill>
@@ -861,16 +923,16 @@
                 <a:sym typeface="Calibri"/>
               </a:defRPr>
             </a:lvl4pPr>
-            <a:lvl5pPr indent="-228600" lvl="4" marL="2286000" marR="0" rtl="0" algn="l">
-              <a:spcBef>
-                <a:spcPts val="0"/>
-              </a:spcBef>
-              <a:spcAft>
-                <a:spcPts val="0"/>
-              </a:spcAft>
-              <a:buSzPts val="1400"/>
-              <a:buNone/>
-              <a:defRPr b="0" i="0" sz="1200" u="none" cap="none" strike="noStrike">
+            <a:lvl5pPr marL="2286000" marR="0" lvl="4" indent="-228600" algn="l" rtl="0">
+              <a:spcBef>
+                <a:spcPts val="0"/>
+              </a:spcBef>
+              <a:spcAft>
+                <a:spcPts val="0"/>
+              </a:spcAft>
+              <a:buSzPts val="1400"/>
+              <a:buNone/>
+              <a:defRPr sz="1200" b="0" i="0" u="none" strike="noStrike" cap="none">
                 <a:solidFill>
                   <a:schemeClr val="dk1"/>
                 </a:solidFill>
@@ -880,16 +942,16 @@
                 <a:sym typeface="Calibri"/>
               </a:defRPr>
             </a:lvl5pPr>
-            <a:lvl6pPr indent="-228600" lvl="5" marL="2743200" marR="0" rtl="0" algn="l">
-              <a:spcBef>
-                <a:spcPts val="0"/>
-              </a:spcBef>
-              <a:spcAft>
-                <a:spcPts val="0"/>
-              </a:spcAft>
-              <a:buSzPts val="1400"/>
-              <a:buNone/>
-              <a:defRPr b="0" i="0" sz="1200" u="none" cap="none" strike="noStrike">
+            <a:lvl6pPr marL="2743200" marR="0" lvl="5" indent="-228600" algn="l" rtl="0">
+              <a:spcBef>
+                <a:spcPts val="0"/>
+              </a:spcBef>
+              <a:spcAft>
+                <a:spcPts val="0"/>
+              </a:spcAft>
+              <a:buSzPts val="1400"/>
+              <a:buNone/>
+              <a:defRPr sz="1200" b="0" i="0" u="none" strike="noStrike" cap="none">
                 <a:solidFill>
                   <a:schemeClr val="dk1"/>
                 </a:solidFill>
@@ -899,16 +961,16 @@
                 <a:sym typeface="Calibri"/>
               </a:defRPr>
             </a:lvl6pPr>
-            <a:lvl7pPr indent="-228600" lvl="6" marL="3200400" marR="0" rtl="0" algn="l">
-              <a:spcBef>
-                <a:spcPts val="0"/>
-              </a:spcBef>
-              <a:spcAft>
-                <a:spcPts val="0"/>
-              </a:spcAft>
-              <a:buSzPts val="1400"/>
-              <a:buNone/>
-              <a:defRPr b="0" i="0" sz="1200" u="none" cap="none" strike="noStrike">
+            <a:lvl7pPr marL="3200400" marR="0" lvl="6" indent="-228600" algn="l" rtl="0">
+              <a:spcBef>
+                <a:spcPts val="0"/>
+              </a:spcBef>
+              <a:spcAft>
+                <a:spcPts val="0"/>
+              </a:spcAft>
+              <a:buSzPts val="1400"/>
+              <a:buNone/>
+              <a:defRPr sz="1200" b="0" i="0" u="none" strike="noStrike" cap="none">
                 <a:solidFill>
                   <a:schemeClr val="dk1"/>
                 </a:solidFill>
@@ -918,16 +980,16 @@
                 <a:sym typeface="Calibri"/>
               </a:defRPr>
             </a:lvl7pPr>
-            <a:lvl8pPr indent="-228600" lvl="7" marL="3657600" marR="0" rtl="0" algn="l">
-              <a:spcBef>
-                <a:spcPts val="0"/>
-              </a:spcBef>
-              <a:spcAft>
-                <a:spcPts val="0"/>
-              </a:spcAft>
-              <a:buSzPts val="1400"/>
-              <a:buNone/>
-              <a:defRPr b="0" i="0" sz="1200" u="none" cap="none" strike="noStrike">
+            <a:lvl8pPr marL="3657600" marR="0" lvl="7" indent="-228600" algn="l" rtl="0">
+              <a:spcBef>
+                <a:spcPts val="0"/>
+              </a:spcBef>
+              <a:spcAft>
+                <a:spcPts val="0"/>
+              </a:spcAft>
+              <a:buSzPts val="1400"/>
+              <a:buNone/>
+              <a:defRPr sz="1200" b="0" i="0" u="none" strike="noStrike" cap="none">
                 <a:solidFill>
                   <a:schemeClr val="dk1"/>
                 </a:solidFill>
@@ -937,16 +999,16 @@
                 <a:sym typeface="Calibri"/>
               </a:defRPr>
             </a:lvl8pPr>
-            <a:lvl9pPr indent="-228600" lvl="8" marL="4114800" marR="0" rtl="0" algn="l">
-              <a:spcBef>
-                <a:spcPts val="0"/>
-              </a:spcBef>
-              <a:spcAft>
-                <a:spcPts val="0"/>
-              </a:spcAft>
-              <a:buSzPts val="1400"/>
-              <a:buNone/>
-              <a:defRPr b="0" i="0" sz="1200" u="none" cap="none" strike="noStrike">
+            <a:lvl9pPr marL="4114800" marR="0" lvl="8" indent="-228600" algn="l" rtl="0">
+              <a:spcBef>
+                <a:spcPts val="0"/>
+              </a:spcBef>
+              <a:spcAft>
+                <a:spcPts val="0"/>
+              </a:spcAft>
+              <a:buSzPts val="1400"/>
+              <a:buNone/>
+              <a:defRPr sz="1200" b="0" i="0" u="none" strike="noStrike" cap="none">
                 <a:solidFill>
                   <a:schemeClr val="dk1"/>
                 </a:solidFill>
@@ -957,15 +1019,19 @@
               </a:defRPr>
             </a:lvl9pPr>
           </a:lstStyle>
-          <a:p/>
+          <a:p>
+            <a:endParaRPr/>
+          </a:p>
         </p:txBody>
       </p:sp>
       <p:sp>
         <p:nvSpPr>
           <p:cNvPr id="7" name="Google Shape;7;n"/>
-          <p:cNvSpPr txBox="1"/>
+          <p:cNvSpPr txBox="1">
+            <a:spLocks noGrp="1"/>
+          </p:cNvSpPr>
           <p:nvPr>
-            <p:ph idx="11" type="ftr"/>
+            <p:ph type="ftr" idx="11"/>
           </p:nvPr>
         </p:nvSpPr>
         <p:spPr>
@@ -982,20 +1048,20 @@
           </a:ln>
         </p:spPr>
         <p:txBody>
-          <a:bodyPr anchorCtr="0" anchor="b" bIns="47375" lIns="94750" spcFirstLastPara="1" rIns="94750" wrap="square" tIns="47375">
+          <a:bodyPr spcFirstLastPara="1" wrap="square" lIns="94750" tIns="47375" rIns="94750" bIns="47375" anchor="b" anchorCtr="0">
             <a:noAutofit/>
           </a:bodyPr>
           <a:lstStyle>
-            <a:lvl1pPr lvl="0" marR="0" rtl="0" algn="l">
-              <a:spcBef>
-                <a:spcPts val="0"/>
-              </a:spcBef>
-              <a:spcAft>
-                <a:spcPts val="0"/>
-              </a:spcAft>
-              <a:buSzPts val="1400"/>
-              <a:buNone/>
-              <a:defRPr b="0" i="0" sz="1200" u="none" cap="none" strike="noStrike">
+            <a:lvl1pPr marR="0" lvl="0" algn="l" rtl="0">
+              <a:spcBef>
+                <a:spcPts val="0"/>
+              </a:spcBef>
+              <a:spcAft>
+                <a:spcPts val="0"/>
+              </a:spcAft>
+              <a:buSzPts val="1400"/>
+              <a:buNone/>
+              <a:defRPr sz="1200" b="0" i="0" u="none" strike="noStrike" cap="none">
                 <a:solidFill>
                   <a:schemeClr val="dk1"/>
                 </a:solidFill>
@@ -1005,16 +1071,16 @@
                 <a:sym typeface="Calibri"/>
               </a:defRPr>
             </a:lvl1pPr>
-            <a:lvl2pPr lvl="1" marR="0" rtl="0" algn="l">
-              <a:spcBef>
-                <a:spcPts val="0"/>
-              </a:spcBef>
-              <a:spcAft>
-                <a:spcPts val="0"/>
-              </a:spcAft>
-              <a:buSzPts val="1400"/>
-              <a:buNone/>
-              <a:defRPr b="0" i="0" sz="1800" u="none" cap="none" strike="noStrike">
+            <a:lvl2pPr marR="0" lvl="1" algn="l" rtl="0">
+              <a:spcBef>
+                <a:spcPts val="0"/>
+              </a:spcBef>
+              <a:spcAft>
+                <a:spcPts val="0"/>
+              </a:spcAft>
+              <a:buSzPts val="1400"/>
+              <a:buNone/>
+              <a:defRPr sz="1800" b="0" i="0" u="none" strike="noStrike" cap="none">
                 <a:solidFill>
                   <a:schemeClr val="dk1"/>
                 </a:solidFill>
@@ -1024,16 +1090,16 @@
                 <a:sym typeface="Calibri"/>
               </a:defRPr>
             </a:lvl2pPr>
-            <a:lvl3pPr lvl="2" marR="0" rtl="0" algn="l">
-              <a:spcBef>
-                <a:spcPts val="0"/>
-              </a:spcBef>
-              <a:spcAft>
-                <a:spcPts val="0"/>
-              </a:spcAft>
-              <a:buSzPts val="1400"/>
-              <a:buNone/>
-              <a:defRPr b="0" i="0" sz="1800" u="none" cap="none" strike="noStrike">
+            <a:lvl3pPr marR="0" lvl="2" algn="l" rtl="0">
+              <a:spcBef>
+                <a:spcPts val="0"/>
+              </a:spcBef>
+              <a:spcAft>
+                <a:spcPts val="0"/>
+              </a:spcAft>
+              <a:buSzPts val="1400"/>
+              <a:buNone/>
+              <a:defRPr sz="1800" b="0" i="0" u="none" strike="noStrike" cap="none">
                 <a:solidFill>
                   <a:schemeClr val="dk1"/>
                 </a:solidFill>
@@ -1043,16 +1109,16 @@
                 <a:sym typeface="Calibri"/>
               </a:defRPr>
             </a:lvl3pPr>
-            <a:lvl4pPr lvl="3" marR="0" rtl="0" algn="l">
-              <a:spcBef>
-                <a:spcPts val="0"/>
-              </a:spcBef>
-              <a:spcAft>
-                <a:spcPts val="0"/>
-              </a:spcAft>
-              <a:buSzPts val="1400"/>
-              <a:buNone/>
-              <a:defRPr b="0" i="0" sz="1800" u="none" cap="none" strike="noStrike">
+            <a:lvl4pPr marR="0" lvl="3" algn="l" rtl="0">
+              <a:spcBef>
+                <a:spcPts val="0"/>
+              </a:spcBef>
+              <a:spcAft>
+                <a:spcPts val="0"/>
+              </a:spcAft>
+              <a:buSzPts val="1400"/>
+              <a:buNone/>
+              <a:defRPr sz="1800" b="0" i="0" u="none" strike="noStrike" cap="none">
                 <a:solidFill>
                   <a:schemeClr val="dk1"/>
                 </a:solidFill>
@@ -1062,16 +1128,16 @@
                 <a:sym typeface="Calibri"/>
               </a:defRPr>
             </a:lvl4pPr>
-            <a:lvl5pPr lvl="4" marR="0" rtl="0" algn="l">
-              <a:spcBef>
-                <a:spcPts val="0"/>
-              </a:spcBef>
-              <a:spcAft>
-                <a:spcPts val="0"/>
-              </a:spcAft>
-              <a:buSzPts val="1400"/>
-              <a:buNone/>
-              <a:defRPr b="0" i="0" sz="1800" u="none" cap="none" strike="noStrike">
+            <a:lvl5pPr marR="0" lvl="4" algn="l" rtl="0">
+              <a:spcBef>
+                <a:spcPts val="0"/>
+              </a:spcBef>
+              <a:spcAft>
+                <a:spcPts val="0"/>
+              </a:spcAft>
+              <a:buSzPts val="1400"/>
+              <a:buNone/>
+              <a:defRPr sz="1800" b="0" i="0" u="none" strike="noStrike" cap="none">
                 <a:solidFill>
                   <a:schemeClr val="dk1"/>
                 </a:solidFill>
@@ -1081,16 +1147,16 @@
                 <a:sym typeface="Calibri"/>
               </a:defRPr>
             </a:lvl5pPr>
-            <a:lvl6pPr lvl="5" marR="0" rtl="0" algn="l">
-              <a:spcBef>
-                <a:spcPts val="0"/>
-              </a:spcBef>
-              <a:spcAft>
-                <a:spcPts val="0"/>
-              </a:spcAft>
-              <a:buSzPts val="1400"/>
-              <a:buNone/>
-              <a:defRPr b="0" i="0" sz="1800" u="none" cap="none" strike="noStrike">
+            <a:lvl6pPr marR="0" lvl="5" algn="l" rtl="0">
+              <a:spcBef>
+                <a:spcPts val="0"/>
+              </a:spcBef>
+              <a:spcAft>
+                <a:spcPts val="0"/>
+              </a:spcAft>
+              <a:buSzPts val="1400"/>
+              <a:buNone/>
+              <a:defRPr sz="1800" b="0" i="0" u="none" strike="noStrike" cap="none">
                 <a:solidFill>
                   <a:schemeClr val="dk1"/>
                 </a:solidFill>
@@ -1100,16 +1166,16 @@
                 <a:sym typeface="Calibri"/>
               </a:defRPr>
             </a:lvl6pPr>
-            <a:lvl7pPr lvl="6" marR="0" rtl="0" algn="l">
-              <a:spcBef>
-                <a:spcPts val="0"/>
-              </a:spcBef>
-              <a:spcAft>
-                <a:spcPts val="0"/>
-              </a:spcAft>
-              <a:buSzPts val="1400"/>
-              <a:buNone/>
-              <a:defRPr b="0" i="0" sz="1800" u="none" cap="none" strike="noStrike">
+            <a:lvl7pPr marR="0" lvl="6" algn="l" rtl="0">
+              <a:spcBef>
+                <a:spcPts val="0"/>
+              </a:spcBef>
+              <a:spcAft>
+                <a:spcPts val="0"/>
+              </a:spcAft>
+              <a:buSzPts val="1400"/>
+              <a:buNone/>
+              <a:defRPr sz="1800" b="0" i="0" u="none" strike="noStrike" cap="none">
                 <a:solidFill>
                   <a:schemeClr val="dk1"/>
                 </a:solidFill>
@@ -1119,16 +1185,16 @@
                 <a:sym typeface="Calibri"/>
               </a:defRPr>
             </a:lvl7pPr>
-            <a:lvl8pPr lvl="7" marR="0" rtl="0" algn="l">
-              <a:spcBef>
-                <a:spcPts val="0"/>
-              </a:spcBef>
-              <a:spcAft>
-                <a:spcPts val="0"/>
-              </a:spcAft>
-              <a:buSzPts val="1400"/>
-              <a:buNone/>
-              <a:defRPr b="0" i="0" sz="1800" u="none" cap="none" strike="noStrike">
+            <a:lvl8pPr marR="0" lvl="7" algn="l" rtl="0">
+              <a:spcBef>
+                <a:spcPts val="0"/>
+              </a:spcBef>
+              <a:spcAft>
+                <a:spcPts val="0"/>
+              </a:spcAft>
+              <a:buSzPts val="1400"/>
+              <a:buNone/>
+              <a:defRPr sz="1800" b="0" i="0" u="none" strike="noStrike" cap="none">
                 <a:solidFill>
                   <a:schemeClr val="dk1"/>
                 </a:solidFill>
@@ -1138,16 +1204,16 @@
                 <a:sym typeface="Calibri"/>
               </a:defRPr>
             </a:lvl8pPr>
-            <a:lvl9pPr lvl="8" marR="0" rtl="0" algn="l">
-              <a:spcBef>
-                <a:spcPts val="0"/>
-              </a:spcBef>
-              <a:spcAft>
-                <a:spcPts val="0"/>
-              </a:spcAft>
-              <a:buSzPts val="1400"/>
-              <a:buNone/>
-              <a:defRPr b="0" i="0" sz="1800" u="none" cap="none" strike="noStrike">
+            <a:lvl9pPr marR="0" lvl="8" algn="l" rtl="0">
+              <a:spcBef>
+                <a:spcPts val="0"/>
+              </a:spcBef>
+              <a:spcAft>
+                <a:spcPts val="0"/>
+              </a:spcAft>
+              <a:buSzPts val="1400"/>
+              <a:buNone/>
+              <a:defRPr sz="1800" b="0" i="0" u="none" strike="noStrike" cap="none">
                 <a:solidFill>
                   <a:schemeClr val="dk1"/>
                 </a:solidFill>
@@ -1158,15 +1224,19 @@
               </a:defRPr>
             </a:lvl9pPr>
           </a:lstStyle>
-          <a:p/>
+          <a:p>
+            <a:endParaRPr/>
+          </a:p>
         </p:txBody>
       </p:sp>
       <p:sp>
         <p:nvSpPr>
           <p:cNvPr id="8" name="Google Shape;8;n"/>
-          <p:cNvSpPr txBox="1"/>
+          <p:cNvSpPr txBox="1">
+            <a:spLocks noGrp="1"/>
+          </p:cNvSpPr>
           <p:nvPr>
-            <p:ph idx="12" type="sldNum"/>
+            <p:ph type="sldNum" idx="12"/>
           </p:nvPr>
         </p:nvSpPr>
         <p:spPr>
@@ -1183,12 +1253,12 @@
           </a:ln>
         </p:spPr>
         <p:txBody>
-          <a:bodyPr anchorCtr="0" anchor="b" bIns="47375" lIns="94750" spcFirstLastPara="1" rIns="94750" wrap="square" tIns="47375">
+          <a:bodyPr spcFirstLastPara="1" wrap="square" lIns="94750" tIns="47375" rIns="94750" bIns="47375" anchor="b" anchorCtr="0">
             <a:noAutofit/>
           </a:bodyPr>
           <a:lstStyle/>
           <a:p>
-            <a:pPr indent="0" lvl="0" marL="0" marR="0" rtl="0" algn="r">
+            <a:pPr marL="0" marR="0" lvl="0" indent="0" algn="r" rtl="0">
               <a:spcBef>
                 <a:spcPts val="0"/>
               </a:spcBef>
@@ -1198,7 +1268,7 @@
               <a:buNone/>
             </a:pPr>
             <a:fld id="{00000000-1234-1234-1234-123412341234}" type="slidenum">
-              <a:rPr b="0" i="0" lang="ca-ES" sz="1200" u="none" cap="none" strike="noStrike">
+              <a:rPr lang="ca-ES" sz="1200" b="0" i="0" u="none" strike="noStrike" cap="none">
                 <a:solidFill>
                   <a:schemeClr val="dk1"/>
                 </a:solidFill>
@@ -1209,7 +1279,7 @@
               </a:rPr>
               <a:t>‹#›</a:t>
             </a:fld>
-            <a:endParaRPr b="0" i="0" sz="1200" u="none" cap="none" strike="noStrike">
+            <a:endParaRPr sz="1200" b="0" i="0" u="none" strike="noStrike" cap="none">
               <a:solidFill>
                 <a:schemeClr val="dk1"/>
               </a:solidFill>
@@ -1223,9 +1293,9 @@
       </p:sp>
     </p:spTree>
   </p:cSld>
-  <p:clrMap accent1="accent1" accent2="accent2" accent3="accent3" accent4="accent4" accent5="accent5" accent6="accent6" bg1="lt1" bg2="dk2" tx1="dk1" tx2="lt2" folHlink="folHlink" hlink="hlink"/>
+  <p:clrMap bg1="lt1" tx1="dk1" bg2="dk2" tx2="lt2" accent1="accent1" accent2="accent2" accent3="accent3" accent4="accent4" accent5="accent5" accent6="accent6" hlink="hlink" folHlink="folHlink"/>
   <p:notesStyle>
-    <a:defPPr lvl="0" marR="0" rtl="0" algn="l">
+    <a:defPPr marR="0" lvl="0" algn="l" rtl="0">
       <a:lnSpc>
         <a:spcPct val="100000"/>
       </a:lnSpc>
@@ -1236,7 +1306,7 @@
         <a:spcPts val="0"/>
       </a:spcAft>
     </a:defPPr>
-    <a:lvl1pPr lvl="0" marR="0" rtl="0" algn="l">
+    <a:lvl1pPr marR="0" lvl="0" algn="l" rtl="0">
       <a:lnSpc>
         <a:spcPct val="100000"/>
       </a:lnSpc>
@@ -1250,7 +1320,7 @@
         <a:srgbClr val="000000"/>
       </a:buClr>
       <a:buFont typeface="Arial"/>
-      <a:defRPr b="0" i="0" sz="1400" u="none" cap="none" strike="noStrike">
+      <a:defRPr sz="1400" b="0" i="0" u="none" strike="noStrike" cap="none">
         <a:solidFill>
           <a:srgbClr val="000000"/>
         </a:solidFill>
@@ -1260,7 +1330,7 @@
         <a:sym typeface="Arial"/>
       </a:defRPr>
     </a:lvl1pPr>
-    <a:lvl2pPr lvl="1" marR="0" rtl="0" algn="l">
+    <a:lvl2pPr marR="0" lvl="1" algn="l" rtl="0">
       <a:lnSpc>
         <a:spcPct val="100000"/>
       </a:lnSpc>
@@ -1274,7 +1344,7 @@
         <a:srgbClr val="000000"/>
       </a:buClr>
       <a:buFont typeface="Arial"/>
-      <a:defRPr b="0" i="0" sz="1400" u="none" cap="none" strike="noStrike">
+      <a:defRPr sz="1400" b="0" i="0" u="none" strike="noStrike" cap="none">
         <a:solidFill>
           <a:srgbClr val="000000"/>
         </a:solidFill>
@@ -1284,7 +1354,7 @@
         <a:sym typeface="Arial"/>
       </a:defRPr>
     </a:lvl2pPr>
-    <a:lvl3pPr lvl="2" marR="0" rtl="0" algn="l">
+    <a:lvl3pPr marR="0" lvl="2" algn="l" rtl="0">
       <a:lnSpc>
         <a:spcPct val="100000"/>
       </a:lnSpc>
@@ -1298,7 +1368,7 @@
         <a:srgbClr val="000000"/>
       </a:buClr>
       <a:buFont typeface="Arial"/>
-      <a:defRPr b="0" i="0" sz="1400" u="none" cap="none" strike="noStrike">
+      <a:defRPr sz="1400" b="0" i="0" u="none" strike="noStrike" cap="none">
         <a:solidFill>
           <a:srgbClr val="000000"/>
         </a:solidFill>
@@ -1308,7 +1378,7 @@
         <a:sym typeface="Arial"/>
       </a:defRPr>
     </a:lvl3pPr>
-    <a:lvl4pPr lvl="3" marR="0" rtl="0" algn="l">
+    <a:lvl4pPr marR="0" lvl="3" algn="l" rtl="0">
       <a:lnSpc>
         <a:spcPct val="100000"/>
       </a:lnSpc>
@@ -1322,7 +1392,7 @@
         <a:srgbClr val="000000"/>
       </a:buClr>
       <a:buFont typeface="Arial"/>
-      <a:defRPr b="0" i="0" sz="1400" u="none" cap="none" strike="noStrike">
+      <a:defRPr sz="1400" b="0" i="0" u="none" strike="noStrike" cap="none">
         <a:solidFill>
           <a:srgbClr val="000000"/>
         </a:solidFill>
@@ -1332,7 +1402,7 @@
         <a:sym typeface="Arial"/>
       </a:defRPr>
     </a:lvl4pPr>
-    <a:lvl5pPr lvl="4" marR="0" rtl="0" algn="l">
+    <a:lvl5pPr marR="0" lvl="4" algn="l" rtl="0">
       <a:lnSpc>
         <a:spcPct val="100000"/>
       </a:lnSpc>
@@ -1346,7 +1416,7 @@
         <a:srgbClr val="000000"/>
       </a:buClr>
       <a:buFont typeface="Arial"/>
-      <a:defRPr b="0" i="0" sz="1400" u="none" cap="none" strike="noStrike">
+      <a:defRPr sz="1400" b="0" i="0" u="none" strike="noStrike" cap="none">
         <a:solidFill>
           <a:srgbClr val="000000"/>
         </a:solidFill>
@@ -1356,7 +1426,7 @@
         <a:sym typeface="Arial"/>
       </a:defRPr>
     </a:lvl5pPr>
-    <a:lvl6pPr lvl="5" marR="0" rtl="0" algn="l">
+    <a:lvl6pPr marR="0" lvl="5" algn="l" rtl="0">
       <a:lnSpc>
         <a:spcPct val="100000"/>
       </a:lnSpc>
@@ -1370,7 +1440,7 @@
         <a:srgbClr val="000000"/>
       </a:buClr>
       <a:buFont typeface="Arial"/>
-      <a:defRPr b="0" i="0" sz="1400" u="none" cap="none" strike="noStrike">
+      <a:defRPr sz="1400" b="0" i="0" u="none" strike="noStrike" cap="none">
         <a:solidFill>
           <a:srgbClr val="000000"/>
         </a:solidFill>
@@ -1380,7 +1450,7 @@
         <a:sym typeface="Arial"/>
       </a:defRPr>
     </a:lvl6pPr>
-    <a:lvl7pPr lvl="6" marR="0" rtl="0" algn="l">
+    <a:lvl7pPr marR="0" lvl="6" algn="l" rtl="0">
       <a:lnSpc>
         <a:spcPct val="100000"/>
       </a:lnSpc>
@@ -1394,7 +1464,7 @@
         <a:srgbClr val="000000"/>
       </a:buClr>
       <a:buFont typeface="Arial"/>
-      <a:defRPr b="0" i="0" sz="1400" u="none" cap="none" strike="noStrike">
+      <a:defRPr sz="1400" b="0" i="0" u="none" strike="noStrike" cap="none">
         <a:solidFill>
           <a:srgbClr val="000000"/>
         </a:solidFill>
@@ -1404,7 +1474,7 @@
         <a:sym typeface="Arial"/>
       </a:defRPr>
     </a:lvl7pPr>
-    <a:lvl8pPr lvl="7" marR="0" rtl="0" algn="l">
+    <a:lvl8pPr marR="0" lvl="7" algn="l" rtl="0">
       <a:lnSpc>
         <a:spcPct val="100000"/>
       </a:lnSpc>
@@ -1418,7 +1488,7 @@
         <a:srgbClr val="000000"/>
       </a:buClr>
       <a:buFont typeface="Arial"/>
-      <a:defRPr b="0" i="0" sz="1400" u="none" cap="none" strike="noStrike">
+      <a:defRPr sz="1400" b="0" i="0" u="none" strike="noStrike" cap="none">
         <a:solidFill>
           <a:srgbClr val="000000"/>
         </a:solidFill>
@@ -1428,7 +1498,7 @@
         <a:sym typeface="Arial"/>
       </a:defRPr>
     </a:lvl8pPr>
-    <a:lvl9pPr lvl="8" marR="0" rtl="0" algn="l">
+    <a:lvl9pPr marR="0" lvl="8" algn="l" rtl="0">
       <a:lnSpc>
         <a:spcPct val="100000"/>
       </a:lnSpc>
@@ -1442,7 +1512,7 @@
         <a:srgbClr val="000000"/>
       </a:buClr>
       <a:buFont typeface="Arial"/>
-      <a:defRPr b="0" i="0" sz="1400" u="none" cap="none" strike="noStrike">
+      <a:defRPr sz="1400" b="0" i="0" u="none" strike="noStrike" cap="none">
         <a:solidFill>
           <a:srgbClr val="000000"/>
         </a:solidFill>
@@ -1457,11 +1527,11 @@
 </file>
 
 <file path=ppt/notesSlides/notesSlide1.xml><?xml version="1.0" encoding="utf-8"?>
-<p:notes xmlns:a="http://schemas.openxmlformats.org/drawingml/2006/main" xmlns:r="http://schemas.openxmlformats.org/officeDocument/2006/relationships" xmlns:mc="http://schemas.openxmlformats.org/markup-compatibility/2006" xmlns:mv="urn:schemas-microsoft-com:mac:vml" xmlns:p="http://schemas.openxmlformats.org/presentationml/2006/main" xmlns:c="http://schemas.openxmlformats.org/drawingml/2006/chart" xmlns:dgm="http://schemas.openxmlformats.org/drawingml/2006/diagram" xmlns:o="urn:schemas-microsoft-com:office:office" xmlns:v="urn:schemas-microsoft-com:vml" xmlns:pvml="urn:schemas-microsoft-com:office:powerpoint" xmlns:com="http://schemas.openxmlformats.org/drawingml/2006/compatibility" xmlns:p14="http://schemas.microsoft.com/office/powerpoint/2010/main" xmlns:p15="http://schemas.microsoft.com/office/powerpoint/2012/main" xmlns:ahyp="http://schemas.microsoft.com/office/drawing/2018/hyperlinkcolor" showMasterPhAnim="0" showMasterSp="0">
+<p:notes xmlns:a="http://schemas.openxmlformats.org/drawingml/2006/main" xmlns:r="http://schemas.openxmlformats.org/officeDocument/2006/relationships" xmlns:p="http://schemas.openxmlformats.org/presentationml/2006/main" showMasterSp="0" showMasterPhAnim="0">
   <p:cSld>
     <p:spTree>
       <p:nvGrpSpPr>
-        <p:cNvPr id="70" name="Shape 70"/>
+        <p:cNvPr id="1" name="Shape 70"/>
         <p:cNvGrpSpPr/>
         <p:nvPr/>
       </p:nvGrpSpPr>
@@ -1476,9 +1546,11 @@
       <p:sp>
         <p:nvSpPr>
           <p:cNvPr id="71" name="Google Shape;71;p1:notes"/>
-          <p:cNvSpPr/>
+          <p:cNvSpPr>
+            <a:spLocks noGrp="1" noRot="1" noChangeAspect="1"/>
+          </p:cNvSpPr>
           <p:nvPr>
-            <p:ph idx="2" type="sldImg"/>
+            <p:ph type="sldImg" idx="2"/>
           </p:nvPr>
         </p:nvSpPr>
         <p:spPr>
@@ -1487,9 +1559,13 @@
             <a:ext cx="5114925" cy="3836988"/>
           </a:xfrm>
           <a:custGeom>
-            <a:rect b="b" l="l" r="r" t="t"/>
+            <a:avLst/>
+            <a:gdLst/>
+            <a:ahLst/>
+            <a:cxnLst/>
+            <a:rect l="l" t="t" r="r" b="b"/>
             <a:pathLst>
-              <a:path extrusionOk="0" h="120000" w="120000">
+              <a:path w="120000" h="120000" extrusionOk="0">
                 <a:moveTo>
                   <a:pt x="0" y="0"/>
                 </a:moveTo>
@@ -1507,23 +1583,25 @@
             </a:pathLst>
           </a:custGeom>
           <a:noFill/>
-          <a:ln cap="flat" cmpd="sng" w="12700">
+          <a:ln w="12700" cap="flat" cmpd="sng">
             <a:solidFill>
               <a:srgbClr val="000000"/>
             </a:solidFill>
             <a:prstDash val="solid"/>
             <a:round/>
-            <a:headEnd len="sm" w="sm" type="none"/>
-            <a:tailEnd len="sm" w="sm" type="none"/>
+            <a:headEnd type="none" w="sm" len="sm"/>
+            <a:tailEnd type="none" w="sm" len="sm"/>
           </a:ln>
         </p:spPr>
       </p:sp>
       <p:sp>
         <p:nvSpPr>
           <p:cNvPr id="72" name="Google Shape;72;p1:notes"/>
-          <p:cNvSpPr txBox="1"/>
+          <p:cNvSpPr txBox="1">
+            <a:spLocks noGrp="1"/>
+          </p:cNvSpPr>
           <p:nvPr>
-            <p:ph idx="1" type="body"/>
+            <p:ph type="body" idx="1"/>
           </p:nvPr>
         </p:nvSpPr>
         <p:spPr>
@@ -1540,12 +1618,12 @@
           </a:ln>
         </p:spPr>
         <p:txBody>
-          <a:bodyPr anchorCtr="0" anchor="t" bIns="47375" lIns="94750" spcFirstLastPara="1" rIns="94750" wrap="square" tIns="47375">
+          <a:bodyPr spcFirstLastPara="1" wrap="square" lIns="94750" tIns="47375" rIns="94750" bIns="47375" anchor="t" anchorCtr="0">
             <a:noAutofit/>
           </a:bodyPr>
           <a:lstStyle/>
           <a:p>
-            <a:pPr xmlns:a="http://schemas.openxmlformats.org/drawingml/2006/main" indent="0" lvl="0" marL="0" rtl="0" algn="l">
+            <a:pPr marL="0" lvl="0" indent="0" algn="l" rtl="0">
               <a:spcBef>
                 <a:spcPts val="0"/>
               </a:spcBef>
@@ -1554,19 +1632,18 @@
               </a:spcAft>
               <a:buNone/>
             </a:pPr>
-            <a:r xmlns:a="http://schemas.openxmlformats.org/drawingml/2006/main">
-              <a:t/>
-            </a:r>
-            <a:endParaRPr xmlns:a="http://schemas.openxmlformats.org/drawingml/2006/main"/>
+            <a:endParaRPr/>
           </a:p>
         </p:txBody>
       </p:sp>
       <p:sp>
         <p:nvSpPr>
           <p:cNvPr id="73" name="Google Shape;73;p1:notes"/>
-          <p:cNvSpPr txBox="1"/>
+          <p:cNvSpPr txBox="1">
+            <a:spLocks noGrp="1"/>
+          </p:cNvSpPr>
           <p:nvPr>
-            <p:ph idx="12" type="sldNum"/>
+            <p:ph type="sldNum" idx="12"/>
           </p:nvPr>
         </p:nvSpPr>
         <p:spPr>
@@ -1583,12 +1660,12 @@
           </a:ln>
         </p:spPr>
         <p:txBody>
-          <a:bodyPr anchorCtr="0" anchor="b" bIns="47375" lIns="94750" spcFirstLastPara="1" rIns="94750" wrap="square" tIns="47375">
+          <a:bodyPr spcFirstLastPara="1" wrap="square" lIns="94750" tIns="47375" rIns="94750" bIns="47375" anchor="b" anchorCtr="0">
             <a:noAutofit/>
           </a:bodyPr>
           <a:lstStyle/>
           <a:p>
-            <a:pPr indent="0" lvl="0" marL="0" rtl="0" algn="r">
+            <a:pPr marL="0" lvl="0" indent="0" algn="r" rtl="0">
               <a:spcBef>
                 <a:spcPts val="0"/>
               </a:spcBef>
@@ -1599,7 +1676,7 @@
             </a:pPr>
             <a:fld id="{00000000-1234-1234-1234-123412341234}" type="slidenum">
               <a:rPr lang="ca-ES"/>
-              <a:t>‹#›</a:t>
+              <a:t>1</a:t>
             </a:fld>
             <a:endParaRPr/>
           </a:p>
@@ -1614,11 +1691,11 @@
 </file>
 
 <file path=ppt/notesSlides/notesSlide2.xml><?xml version="1.0" encoding="utf-8"?>
-<p:notes xmlns:a="http://schemas.openxmlformats.org/drawingml/2006/main" xmlns:r="http://schemas.openxmlformats.org/officeDocument/2006/relationships" xmlns:mc="http://schemas.openxmlformats.org/markup-compatibility/2006" xmlns:mv="urn:schemas-microsoft-com:mac:vml" xmlns:p="http://schemas.openxmlformats.org/presentationml/2006/main" xmlns:c="http://schemas.openxmlformats.org/drawingml/2006/chart" xmlns:dgm="http://schemas.openxmlformats.org/drawingml/2006/diagram" xmlns:o="urn:schemas-microsoft-com:office:office" xmlns:v="urn:schemas-microsoft-com:vml" xmlns:pvml="urn:schemas-microsoft-com:office:powerpoint" xmlns:com="http://schemas.openxmlformats.org/drawingml/2006/compatibility" xmlns:p14="http://schemas.microsoft.com/office/powerpoint/2010/main" xmlns:p15="http://schemas.microsoft.com/office/powerpoint/2012/main" xmlns:ahyp="http://schemas.microsoft.com/office/drawing/2018/hyperlinkcolor" showMasterPhAnim="0" showMasterSp="0">
+<p:notes xmlns:a="http://schemas.openxmlformats.org/drawingml/2006/main" xmlns:r="http://schemas.openxmlformats.org/officeDocument/2006/relationships" xmlns:p="http://schemas.openxmlformats.org/presentationml/2006/main" showMasterSp="0" showMasterPhAnim="0">
   <p:cSld>
     <p:spTree>
       <p:nvGrpSpPr>
-        <p:cNvPr id="78" name="Shape 78"/>
+        <p:cNvPr id="1" name="Shape 78"/>
         <p:cNvGrpSpPr/>
         <p:nvPr/>
       </p:nvGrpSpPr>
@@ -1633,9 +1710,11 @@
       <p:sp>
         <p:nvSpPr>
           <p:cNvPr id="79" name="Google Shape;79;p2:notes"/>
-          <p:cNvSpPr txBox="1"/>
+          <p:cNvSpPr txBox="1">
+            <a:spLocks noGrp="1"/>
+          </p:cNvSpPr>
           <p:nvPr>
-            <p:ph idx="1" type="body"/>
+            <p:ph type="body" idx="1"/>
           </p:nvPr>
         </p:nvSpPr>
         <p:spPr>
@@ -1648,12 +1727,12 @@
           </a:prstGeom>
         </p:spPr>
         <p:txBody>
-          <a:bodyPr anchorCtr="0" anchor="t" bIns="47375" lIns="94750" spcFirstLastPara="1" rIns="94750" wrap="square" tIns="47375">
+          <a:bodyPr spcFirstLastPara="1" wrap="square" lIns="94750" tIns="47375" rIns="94750" bIns="47375" anchor="t" anchorCtr="0">
             <a:noAutofit/>
           </a:bodyPr>
           <a:lstStyle/>
           <a:p>
-            <a:pPr xmlns:a="http://schemas.openxmlformats.org/drawingml/2006/main" indent="0" lvl="0" marL="0" rtl="0" algn="l">
+            <a:pPr marL="0" lvl="0" indent="0" algn="l" rtl="0">
               <a:spcBef>
                 <a:spcPts val="0"/>
               </a:spcBef>
@@ -1662,19 +1741,18 @@
               </a:spcAft>
               <a:buNone/>
             </a:pPr>
-            <a:r xmlns:a="http://schemas.openxmlformats.org/drawingml/2006/main">
-              <a:t/>
-            </a:r>
-            <a:endParaRPr xmlns:a="http://schemas.openxmlformats.org/drawingml/2006/main"/>
+            <a:endParaRPr/>
           </a:p>
         </p:txBody>
       </p:sp>
       <p:sp>
         <p:nvSpPr>
           <p:cNvPr id="80" name="Google Shape;80;p2:notes"/>
-          <p:cNvSpPr/>
+          <p:cNvSpPr>
+            <a:spLocks noGrp="1" noRot="1" noChangeAspect="1"/>
+          </p:cNvSpPr>
           <p:nvPr>
-            <p:ph idx="2" type="sldImg"/>
+            <p:ph type="sldImg" idx="2"/>
           </p:nvPr>
         </p:nvSpPr>
         <p:spPr>
@@ -1683,9 +1761,13 @@
             <a:ext cx="5114925" cy="3836988"/>
           </a:xfrm>
           <a:custGeom>
-            <a:rect b="b" l="l" r="r" t="t"/>
+            <a:avLst/>
+            <a:gdLst/>
+            <a:ahLst/>
+            <a:cxnLst/>
+            <a:rect l="l" t="t" r="r" b="b"/>
             <a:pathLst>
-              <a:path extrusionOk="0" h="120000" w="120000">
+              <a:path w="120000" h="120000" extrusionOk="0">
                 <a:moveTo>
                   <a:pt x="0" y="0"/>
                 </a:moveTo>
@@ -1713,11 +1795,11 @@
 </file>
 
 <file path=ppt/notesSlides/notesSlide3.xml><?xml version="1.0" encoding="utf-8"?>
-<p:notes xmlns:a="http://schemas.openxmlformats.org/drawingml/2006/main" xmlns:r="http://schemas.openxmlformats.org/officeDocument/2006/relationships" xmlns:mc="http://schemas.openxmlformats.org/markup-compatibility/2006" xmlns:mv="urn:schemas-microsoft-com:mac:vml" xmlns:p="http://schemas.openxmlformats.org/presentationml/2006/main" xmlns:c="http://schemas.openxmlformats.org/drawingml/2006/chart" xmlns:dgm="http://schemas.openxmlformats.org/drawingml/2006/diagram" xmlns:o="urn:schemas-microsoft-com:office:office" xmlns:v="urn:schemas-microsoft-com:vml" xmlns:pvml="urn:schemas-microsoft-com:office:powerpoint" xmlns:com="http://schemas.openxmlformats.org/drawingml/2006/compatibility" xmlns:p14="http://schemas.microsoft.com/office/powerpoint/2010/main" xmlns:p15="http://schemas.microsoft.com/office/powerpoint/2012/main" xmlns:ahyp="http://schemas.microsoft.com/office/drawing/2018/hyperlinkcolor" showMasterPhAnim="0" showMasterSp="0">
+<p:notes xmlns:a="http://schemas.openxmlformats.org/drawingml/2006/main" xmlns:r="http://schemas.openxmlformats.org/officeDocument/2006/relationships" xmlns:p="http://schemas.openxmlformats.org/presentationml/2006/main" showMasterSp="0" showMasterPhAnim="0">
   <p:cSld>
     <p:spTree>
       <p:nvGrpSpPr>
-        <p:cNvPr id="84" name="Shape 84"/>
+        <p:cNvPr id="1" name="Shape 84"/>
         <p:cNvGrpSpPr/>
         <p:nvPr/>
       </p:nvGrpSpPr>
@@ -1732,9 +1814,11 @@
       <p:sp>
         <p:nvSpPr>
           <p:cNvPr id="85" name="Google Shape;85;p3:notes"/>
-          <p:cNvSpPr txBox="1"/>
+          <p:cNvSpPr txBox="1">
+            <a:spLocks noGrp="1"/>
+          </p:cNvSpPr>
           <p:nvPr>
-            <p:ph idx="1" type="body"/>
+            <p:ph type="body" idx="1"/>
           </p:nvPr>
         </p:nvSpPr>
         <p:spPr>
@@ -1747,12 +1831,12 @@
           </a:prstGeom>
         </p:spPr>
         <p:txBody>
-          <a:bodyPr anchorCtr="0" anchor="t" bIns="47375" lIns="94750" spcFirstLastPara="1" rIns="94750" wrap="square" tIns="47375">
+          <a:bodyPr spcFirstLastPara="1" wrap="square" lIns="94750" tIns="47375" rIns="94750" bIns="47375" anchor="t" anchorCtr="0">
             <a:noAutofit/>
           </a:bodyPr>
           <a:lstStyle/>
           <a:p>
-            <a:pPr xmlns:a="http://schemas.openxmlformats.org/drawingml/2006/main" indent="0" lvl="0" marL="0" rtl="0" algn="l">
+            <a:pPr marL="0" lvl="0" indent="0" algn="l" rtl="0">
               <a:spcBef>
                 <a:spcPts val="0"/>
               </a:spcBef>
@@ -1761,19 +1845,18 @@
               </a:spcAft>
               <a:buNone/>
             </a:pPr>
-            <a:r xmlns:a="http://schemas.openxmlformats.org/drawingml/2006/main">
-              <a:t/>
-            </a:r>
-            <a:endParaRPr xmlns:a="http://schemas.openxmlformats.org/drawingml/2006/main"/>
+            <a:endParaRPr/>
           </a:p>
         </p:txBody>
       </p:sp>
       <p:sp>
         <p:nvSpPr>
           <p:cNvPr id="86" name="Google Shape;86;p3:notes"/>
-          <p:cNvSpPr/>
+          <p:cNvSpPr>
+            <a:spLocks noGrp="1" noRot="1" noChangeAspect="1"/>
+          </p:cNvSpPr>
           <p:nvPr>
-            <p:ph idx="2" type="sldImg"/>
+            <p:ph type="sldImg" idx="2"/>
           </p:nvPr>
         </p:nvSpPr>
         <p:spPr>
@@ -1782,9 +1865,13 @@
             <a:ext cx="5114925" cy="3836988"/>
           </a:xfrm>
           <a:custGeom>
-            <a:rect b="b" l="l" r="r" t="t"/>
+            <a:avLst/>
+            <a:gdLst/>
+            <a:ahLst/>
+            <a:cxnLst/>
+            <a:rect l="l" t="t" r="r" b="b"/>
             <a:pathLst>
-              <a:path extrusionOk="0" h="120000" w="120000">
+              <a:path w="120000" h="120000" extrusionOk="0">
                 <a:moveTo>
                   <a:pt x="0" y="0"/>
                 </a:moveTo>
@@ -1812,11 +1899,11 @@
 </file>
 
 <file path=ppt/notesSlides/notesSlide4.xml><?xml version="1.0" encoding="utf-8"?>
-<p:notes xmlns:a="http://schemas.openxmlformats.org/drawingml/2006/main" xmlns:r="http://schemas.openxmlformats.org/officeDocument/2006/relationships" xmlns:mc="http://schemas.openxmlformats.org/markup-compatibility/2006" xmlns:mv="urn:schemas-microsoft-com:mac:vml" xmlns:p="http://schemas.openxmlformats.org/presentationml/2006/main" xmlns:c="http://schemas.openxmlformats.org/drawingml/2006/chart" xmlns:dgm="http://schemas.openxmlformats.org/drawingml/2006/diagram" xmlns:o="urn:schemas-microsoft-com:office:office" xmlns:v="urn:schemas-microsoft-com:vml" xmlns:pvml="urn:schemas-microsoft-com:office:powerpoint" xmlns:com="http://schemas.openxmlformats.org/drawingml/2006/compatibility" xmlns:p14="http://schemas.microsoft.com/office/powerpoint/2010/main" xmlns:p15="http://schemas.microsoft.com/office/powerpoint/2012/main" xmlns:ahyp="http://schemas.microsoft.com/office/drawing/2018/hyperlinkcolor" showMasterPhAnim="0" showMasterSp="0">
+<p:notes xmlns:a="http://schemas.openxmlformats.org/drawingml/2006/main" xmlns:r="http://schemas.openxmlformats.org/officeDocument/2006/relationships" xmlns:p="http://schemas.openxmlformats.org/presentationml/2006/main" showMasterSp="0" showMasterPhAnim="0">
   <p:cSld>
     <p:spTree>
       <p:nvGrpSpPr>
-        <p:cNvPr id="90" name="Shape 90"/>
+        <p:cNvPr id="1" name="Shape 90"/>
         <p:cNvGrpSpPr/>
         <p:nvPr/>
       </p:nvGrpSpPr>
@@ -1831,9 +1918,11 @@
       <p:sp>
         <p:nvSpPr>
           <p:cNvPr id="91" name="Google Shape;91;p4:notes"/>
-          <p:cNvSpPr txBox="1"/>
+          <p:cNvSpPr txBox="1">
+            <a:spLocks noGrp="1"/>
+          </p:cNvSpPr>
           <p:nvPr>
-            <p:ph idx="1" type="body"/>
+            <p:ph type="body" idx="1"/>
           </p:nvPr>
         </p:nvSpPr>
         <p:spPr>
@@ -1846,12 +1935,12 @@
           </a:prstGeom>
         </p:spPr>
         <p:txBody>
-          <a:bodyPr anchorCtr="0" anchor="t" bIns="47375" lIns="94750" spcFirstLastPara="1" rIns="94750" wrap="square" tIns="47375">
+          <a:bodyPr spcFirstLastPara="1" wrap="square" lIns="94750" tIns="47375" rIns="94750" bIns="47375" anchor="t" anchorCtr="0">
             <a:noAutofit/>
           </a:bodyPr>
           <a:lstStyle/>
           <a:p>
-            <a:pPr xmlns:a="http://schemas.openxmlformats.org/drawingml/2006/main" indent="0" lvl="0" marL="0" rtl="0" algn="l">
+            <a:pPr marL="0" lvl="0" indent="0" algn="l" rtl="0">
               <a:spcBef>
                 <a:spcPts val="0"/>
               </a:spcBef>
@@ -1860,19 +1949,18 @@
               </a:spcAft>
               <a:buNone/>
             </a:pPr>
-            <a:r xmlns:a="http://schemas.openxmlformats.org/drawingml/2006/main">
-              <a:t/>
-            </a:r>
-            <a:endParaRPr xmlns:a="http://schemas.openxmlformats.org/drawingml/2006/main"/>
+            <a:endParaRPr/>
           </a:p>
         </p:txBody>
       </p:sp>
       <p:sp>
         <p:nvSpPr>
           <p:cNvPr id="92" name="Google Shape;92;p4:notes"/>
-          <p:cNvSpPr/>
+          <p:cNvSpPr>
+            <a:spLocks noGrp="1" noRot="1" noChangeAspect="1"/>
+          </p:cNvSpPr>
           <p:nvPr>
-            <p:ph idx="2" type="sldImg"/>
+            <p:ph type="sldImg" idx="2"/>
           </p:nvPr>
         </p:nvSpPr>
         <p:spPr>
@@ -1881,9 +1969,13 @@
             <a:ext cx="5114925" cy="3836988"/>
           </a:xfrm>
           <a:custGeom>
-            <a:rect b="b" l="l" r="r" t="t"/>
+            <a:avLst/>
+            <a:gdLst/>
+            <a:ahLst/>
+            <a:cxnLst/>
+            <a:rect l="l" t="t" r="r" b="b"/>
             <a:pathLst>
-              <a:path extrusionOk="0" h="120000" w="120000">
+              <a:path w="120000" h="120000" extrusionOk="0">
                 <a:moveTo>
                   <a:pt x="0" y="0"/>
                 </a:moveTo>
@@ -1911,11 +2003,11 @@
 </file>
 
 <file path=ppt/notesSlides/notesSlide5.xml><?xml version="1.0" encoding="utf-8"?>
-<p:notes xmlns:a="http://schemas.openxmlformats.org/drawingml/2006/main" xmlns:r="http://schemas.openxmlformats.org/officeDocument/2006/relationships" xmlns:mc="http://schemas.openxmlformats.org/markup-compatibility/2006" xmlns:mv="urn:schemas-microsoft-com:mac:vml" xmlns:p="http://schemas.openxmlformats.org/presentationml/2006/main" xmlns:c="http://schemas.openxmlformats.org/drawingml/2006/chart" xmlns:dgm="http://schemas.openxmlformats.org/drawingml/2006/diagram" xmlns:o="urn:schemas-microsoft-com:office:office" xmlns:v="urn:schemas-microsoft-com:vml" xmlns:pvml="urn:schemas-microsoft-com:office:powerpoint" xmlns:com="http://schemas.openxmlformats.org/drawingml/2006/compatibility" xmlns:p14="http://schemas.microsoft.com/office/powerpoint/2010/main" xmlns:p15="http://schemas.microsoft.com/office/powerpoint/2012/main" xmlns:ahyp="http://schemas.microsoft.com/office/drawing/2018/hyperlinkcolor" showMasterPhAnim="0" showMasterSp="0">
+<p:notes xmlns:a="http://schemas.openxmlformats.org/drawingml/2006/main" xmlns:r="http://schemas.openxmlformats.org/officeDocument/2006/relationships" xmlns:p="http://schemas.openxmlformats.org/presentationml/2006/main" showMasterSp="0" showMasterPhAnim="0">
   <p:cSld>
     <p:spTree>
       <p:nvGrpSpPr>
-        <p:cNvPr id="96" name="Shape 96"/>
+        <p:cNvPr id="1" name="Shape 96"/>
         <p:cNvGrpSpPr/>
         <p:nvPr/>
       </p:nvGrpSpPr>
@@ -1930,9 +2022,11 @@
       <p:sp>
         <p:nvSpPr>
           <p:cNvPr id="97" name="Google Shape;97;p5:notes"/>
-          <p:cNvSpPr txBox="1"/>
+          <p:cNvSpPr txBox="1">
+            <a:spLocks noGrp="1"/>
+          </p:cNvSpPr>
           <p:nvPr>
-            <p:ph idx="1" type="body"/>
+            <p:ph type="body" idx="1"/>
           </p:nvPr>
         </p:nvSpPr>
         <p:spPr>
@@ -1945,12 +2039,12 @@
           </a:prstGeom>
         </p:spPr>
         <p:txBody>
-          <a:bodyPr anchorCtr="0" anchor="t" bIns="47375" lIns="94750" spcFirstLastPara="1" rIns="94750" wrap="square" tIns="47375">
+          <a:bodyPr spcFirstLastPara="1" wrap="square" lIns="94750" tIns="47375" rIns="94750" bIns="47375" anchor="t" anchorCtr="0">
             <a:noAutofit/>
           </a:bodyPr>
           <a:lstStyle/>
           <a:p>
-            <a:pPr xmlns:a="http://schemas.openxmlformats.org/drawingml/2006/main" indent="0" lvl="0" marL="0" rtl="0" algn="l">
+            <a:pPr marL="0" lvl="0" indent="0" algn="l" rtl="0">
               <a:spcBef>
                 <a:spcPts val="0"/>
               </a:spcBef>
@@ -1959,19 +2053,18 @@
               </a:spcAft>
               <a:buNone/>
             </a:pPr>
-            <a:r xmlns:a="http://schemas.openxmlformats.org/drawingml/2006/main">
-              <a:t/>
-            </a:r>
-            <a:endParaRPr xmlns:a="http://schemas.openxmlformats.org/drawingml/2006/main"/>
+            <a:endParaRPr/>
           </a:p>
         </p:txBody>
       </p:sp>
       <p:sp>
         <p:nvSpPr>
           <p:cNvPr id="98" name="Google Shape;98;p5:notes"/>
-          <p:cNvSpPr/>
+          <p:cNvSpPr>
+            <a:spLocks noGrp="1" noRot="1" noChangeAspect="1"/>
+          </p:cNvSpPr>
           <p:nvPr>
-            <p:ph idx="2" type="sldImg"/>
+            <p:ph type="sldImg" idx="2"/>
           </p:nvPr>
         </p:nvSpPr>
         <p:spPr>
@@ -1980,9 +2073,13 @@
             <a:ext cx="5115000" cy="3837000"/>
           </a:xfrm>
           <a:custGeom>
-            <a:rect b="b" l="l" r="r" t="t"/>
+            <a:avLst/>
+            <a:gdLst/>
+            <a:ahLst/>
+            <a:cxnLst/>
+            <a:rect l="l" t="t" r="r" b="b"/>
             <a:pathLst>
-              <a:path extrusionOk="0" h="120000" w="120000">
+              <a:path w="120000" h="120000" extrusionOk="0">
                 <a:moveTo>
                   <a:pt x="0" y="0"/>
                 </a:moveTo>
@@ -2010,11 +2107,11 @@
 </file>
 
 <file path=ppt/notesSlides/notesSlide6.xml><?xml version="1.0" encoding="utf-8"?>
-<p:notes xmlns:a="http://schemas.openxmlformats.org/drawingml/2006/main" xmlns:r="http://schemas.openxmlformats.org/officeDocument/2006/relationships" xmlns:mc="http://schemas.openxmlformats.org/markup-compatibility/2006" xmlns:mv="urn:schemas-microsoft-com:mac:vml" xmlns:p="http://schemas.openxmlformats.org/presentationml/2006/main" xmlns:c="http://schemas.openxmlformats.org/drawingml/2006/chart" xmlns:dgm="http://schemas.openxmlformats.org/drawingml/2006/diagram" xmlns:o="urn:schemas-microsoft-com:office:office" xmlns:v="urn:schemas-microsoft-com:vml" xmlns:pvml="urn:schemas-microsoft-com:office:powerpoint" xmlns:com="http://schemas.openxmlformats.org/drawingml/2006/compatibility" xmlns:p14="http://schemas.microsoft.com/office/powerpoint/2010/main" xmlns:p15="http://schemas.microsoft.com/office/powerpoint/2012/main" xmlns:ahyp="http://schemas.microsoft.com/office/drawing/2018/hyperlinkcolor" showMasterPhAnim="0" showMasterSp="0">
+<p:notes xmlns:a="http://schemas.openxmlformats.org/drawingml/2006/main" xmlns:r="http://schemas.openxmlformats.org/officeDocument/2006/relationships" xmlns:p="http://schemas.openxmlformats.org/presentationml/2006/main" showMasterSp="0" showMasterPhAnim="0">
   <p:cSld>
     <p:spTree>
       <p:nvGrpSpPr>
-        <p:cNvPr id="102" name="Shape 102"/>
+        <p:cNvPr id="1" name="Shape 102"/>
         <p:cNvGrpSpPr/>
         <p:nvPr/>
       </p:nvGrpSpPr>
@@ -2029,9 +2126,11 @@
       <p:sp>
         <p:nvSpPr>
           <p:cNvPr id="103" name="Google Shape;103;p6:notes"/>
-          <p:cNvSpPr txBox="1"/>
+          <p:cNvSpPr txBox="1">
+            <a:spLocks noGrp="1"/>
+          </p:cNvSpPr>
           <p:nvPr>
-            <p:ph idx="1" type="body"/>
+            <p:ph type="body" idx="1"/>
           </p:nvPr>
         </p:nvSpPr>
         <p:spPr>
@@ -2044,12 +2143,12 @@
           </a:prstGeom>
         </p:spPr>
         <p:txBody>
-          <a:bodyPr anchorCtr="0" anchor="t" bIns="47375" lIns="94750" spcFirstLastPara="1" rIns="94750" wrap="square" tIns="47375">
+          <a:bodyPr spcFirstLastPara="1" wrap="square" lIns="94750" tIns="47375" rIns="94750" bIns="47375" anchor="t" anchorCtr="0">
             <a:noAutofit/>
           </a:bodyPr>
           <a:lstStyle/>
           <a:p>
-            <a:pPr xmlns:a="http://schemas.openxmlformats.org/drawingml/2006/main" indent="0" lvl="0" marL="0" rtl="0" algn="l">
+            <a:pPr marL="0" lvl="0" indent="0" algn="l" rtl="0">
               <a:spcBef>
                 <a:spcPts val="0"/>
               </a:spcBef>
@@ -2058,19 +2157,18 @@
               </a:spcAft>
               <a:buNone/>
             </a:pPr>
-            <a:r xmlns:a="http://schemas.openxmlformats.org/drawingml/2006/main">
-              <a:t/>
-            </a:r>
-            <a:endParaRPr xmlns:a="http://schemas.openxmlformats.org/drawingml/2006/main"/>
+            <a:endParaRPr/>
           </a:p>
         </p:txBody>
       </p:sp>
       <p:sp>
         <p:nvSpPr>
           <p:cNvPr id="104" name="Google Shape;104;p6:notes"/>
-          <p:cNvSpPr/>
+          <p:cNvSpPr>
+            <a:spLocks noGrp="1" noRot="1" noChangeAspect="1"/>
+          </p:cNvSpPr>
           <p:nvPr>
-            <p:ph idx="2" type="sldImg"/>
+            <p:ph type="sldImg" idx="2"/>
           </p:nvPr>
         </p:nvSpPr>
         <p:spPr>
@@ -2079,9 +2177,13 @@
             <a:ext cx="5115000" cy="3837000"/>
           </a:xfrm>
           <a:custGeom>
-            <a:rect b="b" l="l" r="r" t="t"/>
+            <a:avLst/>
+            <a:gdLst/>
+            <a:ahLst/>
+            <a:cxnLst/>
+            <a:rect l="l" t="t" r="r" b="b"/>
             <a:pathLst>
-              <a:path extrusionOk="0" h="120000" w="120000">
+              <a:path w="120000" h="120000" extrusionOk="0">
                 <a:moveTo>
                   <a:pt x="0" y="0"/>
                 </a:moveTo>
@@ -2109,11 +2211,11 @@
 </file>
 
 <file path=ppt/slideLayouts/slideLayout1.xml><?xml version="1.0" encoding="utf-8"?>
-<p:sldLayout xmlns:a="http://schemas.openxmlformats.org/drawingml/2006/main" xmlns:r="http://schemas.openxmlformats.org/officeDocument/2006/relationships" xmlns:mc="http://schemas.openxmlformats.org/markup-compatibility/2006" xmlns:mv="urn:schemas-microsoft-com:mac:vml" xmlns:p="http://schemas.openxmlformats.org/presentationml/2006/main" xmlns:c="http://schemas.openxmlformats.org/drawingml/2006/chart" xmlns:dgm="http://schemas.openxmlformats.org/drawingml/2006/diagram" xmlns:o="urn:schemas-microsoft-com:office:office" xmlns:v="urn:schemas-microsoft-com:vml" xmlns:pvml="urn:schemas-microsoft-com:office:powerpoint" xmlns:com="http://schemas.openxmlformats.org/drawingml/2006/compatibility" xmlns:p14="http://schemas.microsoft.com/office/powerpoint/2010/main" xmlns:p15="http://schemas.microsoft.com/office/powerpoint/2012/main" xmlns:ahyp="http://schemas.microsoft.com/office/drawing/2018/hyperlinkcolor" matchingName="Title Slide">
+<p:sldLayout xmlns:a="http://schemas.openxmlformats.org/drawingml/2006/main" xmlns:r="http://schemas.openxmlformats.org/officeDocument/2006/relationships" xmlns:p="http://schemas.openxmlformats.org/presentationml/2006/main" matchingName="Title Slide">
   <p:cSld name="Title Slide">
     <p:spTree>
       <p:nvGrpSpPr>
-        <p:cNvPr id="13" name="Shape 13"/>
+        <p:cNvPr id="1" name="Shape 13"/>
         <p:cNvGrpSpPr/>
         <p:nvPr/>
       </p:nvGrpSpPr>
@@ -2149,12 +2251,12 @@
           </a:ln>
         </p:spPr>
         <p:txBody>
-          <a:bodyPr anchorCtr="0" anchor="ctr" bIns="45700" lIns="91425" spcFirstLastPara="1" rIns="91425" wrap="square" tIns="45700">
+          <a:bodyPr spcFirstLastPara="1" wrap="square" lIns="91425" tIns="45700" rIns="91425" bIns="45700" anchor="ctr" anchorCtr="0">
             <a:noAutofit/>
           </a:bodyPr>
           <a:lstStyle/>
           <a:p>
-            <a:pPr indent="0" lvl="0" marL="0" marR="0" rtl="0" algn="ctr">
+            <a:pPr marL="0" marR="0" lvl="0" indent="0" algn="ctr" rtl="0">
               <a:spcBef>
                 <a:spcPts val="0"/>
               </a:spcBef>
@@ -2163,10 +2265,7 @@
               </a:spcAft>
               <a:buNone/>
             </a:pPr>
-            <a:r>
-              <a:t/>
-            </a:r>
-            <a:endParaRPr b="0" i="0" sz="1800" u="none" cap="none" strike="noStrike">
+            <a:endParaRPr sz="1800" b="0" i="0" u="none" strike="noStrike" cap="none">
               <a:solidFill>
                 <a:srgbClr val="FFFFFF"/>
               </a:solidFill>
@@ -2181,7 +2280,9 @@
       <p:sp>
         <p:nvSpPr>
           <p:cNvPr id="15" name="Google Shape;15;p2"/>
-          <p:cNvSpPr txBox="1"/>
+          <p:cNvSpPr txBox="1">
+            <a:spLocks noGrp="1"/>
+          </p:cNvSpPr>
           <p:nvPr>
             <p:ph type="ctrTitle"/>
           </p:nvPr>
@@ -2200,7 +2301,7 @@
           </a:ln>
         </p:spPr>
         <p:txBody>
-          <a:bodyPr anchorCtr="0" anchor="b" bIns="45700" lIns="91425" spcFirstLastPara="1" rIns="91425" wrap="square" tIns="45700">
+          <a:bodyPr spcFirstLastPara="1" wrap="square" lIns="91425" tIns="45700" rIns="91425" bIns="45700" anchor="b" anchorCtr="0">
             <a:normAutofit/>
           </a:bodyPr>
           <a:lstStyle>
@@ -2316,15 +2417,19 @@
               <a:defRPr/>
             </a:lvl9pPr>
           </a:lstStyle>
-          <a:p/>
+          <a:p>
+            <a:endParaRPr/>
+          </a:p>
         </p:txBody>
       </p:sp>
       <p:sp>
         <p:nvSpPr>
           <p:cNvPr id="16" name="Google Shape;16;p2"/>
-          <p:cNvSpPr txBox="1"/>
+          <p:cNvSpPr txBox="1">
+            <a:spLocks noGrp="1"/>
+          </p:cNvSpPr>
           <p:nvPr>
-            <p:ph idx="1" type="subTitle"/>
+            <p:ph type="subTitle" idx="1"/>
           </p:nvPr>
         </p:nvSpPr>
         <p:spPr>
@@ -2341,7 +2446,7 @@
           </a:ln>
         </p:spPr>
         <p:txBody>
-          <a:bodyPr anchorCtr="0" anchor="t" bIns="45700" lIns="91425" spcFirstLastPara="1" rIns="91425" wrap="square" tIns="45700">
+          <a:bodyPr spcFirstLastPara="1" wrap="square" lIns="91425" tIns="45700" rIns="91425" bIns="45700" anchor="t" anchorCtr="0">
             <a:normAutofit/>
           </a:bodyPr>
           <a:lstStyle>
@@ -2361,7 +2466,7 @@
               <a:buSzPts val="2000"/>
               <a:buFont typeface="Noto Sans Symbols"/>
               <a:buNone/>
-              <a:defRPr b="0" sz="2000">
+              <a:defRPr sz="2000" b="0">
                 <a:solidFill>
                   <a:schemeClr val="dk2"/>
                 </a:solidFill>
@@ -2516,7 +2621,9 @@
               </a:defRPr>
             </a:lvl9pPr>
           </a:lstStyle>
-          <a:p/>
+          <a:p>
+            <a:endParaRPr/>
+          </a:p>
         </p:txBody>
       </p:sp>
       <p:pic>
@@ -2529,7 +2636,7 @@
           <a:blip r:embed="rId2">
             <a:alphaModFix amt="20000"/>
           </a:blip>
-          <a:srcRect b="0" l="0" r="0" t="0"/>
+          <a:srcRect/>
           <a:stretch/>
         </p:blipFill>
         <p:spPr>
@@ -2556,7 +2663,7 @@
           <a:blip r:embed="rId3">
             <a:alphaModFix amt="20000"/>
           </a:blip>
-          <a:srcRect b="0" l="0" r="0" t="0"/>
+          <a:srcRect/>
           <a:stretch/>
         </p:blipFill>
         <p:spPr>
@@ -2583,7 +2690,7 @@
           <a:blip r:embed="rId4">
             <a:alphaModFix amt="20000"/>
           </a:blip>
-          <a:srcRect b="0" l="0" r="0" t="0"/>
+          <a:srcRect/>
           <a:stretch/>
         </p:blipFill>
         <p:spPr>
@@ -2602,7 +2709,7 @@
       </p:pic>
       <p:pic>
         <p:nvPicPr>
-          <p:cNvPr descr="Imatge que conté Font, Gràfics, logotip, blanc&#10;&#10;Descripció generada automàticament" id="20" name="Google Shape;20;p2"/>
+          <p:cNvPr id="20" name="Google Shape;20;p2" descr="Imatge que conté Font, Gràfics, logotip, blanc&#10;&#10;Descripció generada automàticament"/>
           <p:cNvPicPr preferRelativeResize="0"/>
           <p:nvPr/>
         </p:nvPicPr>
@@ -2610,7 +2717,7 @@
           <a:blip r:embed="rId5">
             <a:alphaModFix/>
           </a:blip>
-          <a:srcRect b="0" l="0" r="0" t="0"/>
+          <a:srcRect/>
           <a:stretch/>
         </p:blipFill>
         <p:spPr>
@@ -2637,7 +2744,7 @@
           <a:blip r:embed="rId4">
             <a:alphaModFix amt="20000"/>
           </a:blip>
-          <a:srcRect b="0" l="0" r="0" t="0"/>
+          <a:srcRect/>
           <a:stretch/>
         </p:blipFill>
         <p:spPr>
@@ -2663,11 +2770,11 @@
 </file>
 
 <file path=ppt/slideLayouts/slideLayout2.xml><?xml version="1.0" encoding="utf-8"?>
-<p:sldLayout xmlns:a="http://schemas.openxmlformats.org/drawingml/2006/main" xmlns:r="http://schemas.openxmlformats.org/officeDocument/2006/relationships" xmlns:mc="http://schemas.openxmlformats.org/markup-compatibility/2006" xmlns:mv="urn:schemas-microsoft-com:mac:vml" xmlns:p="http://schemas.openxmlformats.org/presentationml/2006/main" xmlns:c="http://schemas.openxmlformats.org/drawingml/2006/chart" xmlns:dgm="http://schemas.openxmlformats.org/drawingml/2006/diagram" xmlns:o="urn:schemas-microsoft-com:office:office" xmlns:v="urn:schemas-microsoft-com:vml" xmlns:pvml="urn:schemas-microsoft-com:office:powerpoint" xmlns:com="http://schemas.openxmlformats.org/drawingml/2006/compatibility" xmlns:p14="http://schemas.microsoft.com/office/powerpoint/2010/main" xmlns:p15="http://schemas.microsoft.com/office/powerpoint/2012/main" xmlns:ahyp="http://schemas.microsoft.com/office/drawing/2018/hyperlinkcolor" matchingName="Title and Content">
+<p:sldLayout xmlns:a="http://schemas.openxmlformats.org/drawingml/2006/main" xmlns:r="http://schemas.openxmlformats.org/officeDocument/2006/relationships" xmlns:p="http://schemas.openxmlformats.org/presentationml/2006/main" matchingName="Title and Content">
   <p:cSld name="Title and Content">
     <p:spTree>
       <p:nvGrpSpPr>
-        <p:cNvPr id="22" name="Shape 22"/>
+        <p:cNvPr id="1" name="Shape 22"/>
         <p:cNvGrpSpPr/>
         <p:nvPr/>
       </p:nvGrpSpPr>
@@ -2686,7 +2793,7 @@
           <p:nvPr/>
         </p:nvSpPr>
         <p:spPr>
-          <a:xfrm flipH="1" rot="10800000">
+          <a:xfrm rot="10800000" flipH="1">
             <a:off x="474664" y="1027113"/>
             <a:ext cx="8383587" cy="61912"/>
           </a:xfrm>
@@ -2703,12 +2810,12 @@
           </a:ln>
         </p:spPr>
         <p:txBody>
-          <a:bodyPr anchorCtr="0" anchor="ctr" bIns="45700" lIns="91425" spcFirstLastPara="1" rIns="91425" wrap="square" tIns="45700">
+          <a:bodyPr spcFirstLastPara="1" wrap="square" lIns="91425" tIns="45700" rIns="91425" bIns="45700" anchor="ctr" anchorCtr="0">
             <a:noAutofit/>
           </a:bodyPr>
           <a:lstStyle/>
           <a:p>
-            <a:pPr indent="0" lvl="0" marL="0" marR="0" rtl="0" algn="ctr">
+            <a:pPr marL="0" marR="0" lvl="0" indent="0" algn="ctr" rtl="0">
               <a:spcBef>
                 <a:spcPts val="0"/>
               </a:spcBef>
@@ -2717,10 +2824,7 @@
               </a:spcAft>
               <a:buNone/>
             </a:pPr>
-            <a:r>
-              <a:t/>
-            </a:r>
-            <a:endParaRPr b="0" i="0" sz="1800" u="none" cap="none" strike="noStrike">
+            <a:endParaRPr sz="1800" b="0" i="0" u="none" strike="noStrike" cap="none">
               <a:solidFill>
                 <a:srgbClr val="FFFFFF"/>
               </a:solidFill>
@@ -2735,9 +2839,11 @@
       <p:sp>
         <p:nvSpPr>
           <p:cNvPr id="24" name="Google Shape;24;p3"/>
-          <p:cNvSpPr txBox="1"/>
+          <p:cNvSpPr txBox="1">
+            <a:spLocks noGrp="1"/>
+          </p:cNvSpPr>
           <p:nvPr>
-            <p:ph idx="1" type="body"/>
+            <p:ph type="body" idx="1"/>
           </p:nvPr>
         </p:nvSpPr>
         <p:spPr>
@@ -2754,11 +2860,11 @@
           </a:ln>
         </p:spPr>
         <p:txBody>
-          <a:bodyPr anchorCtr="0" anchor="t" bIns="45700" lIns="91425" spcFirstLastPara="1" rIns="91425" wrap="square" tIns="45700">
+          <a:bodyPr spcFirstLastPara="1" wrap="square" lIns="91425" tIns="45700" rIns="91425" bIns="45700" anchor="t" anchorCtr="0">
             <a:noAutofit/>
           </a:bodyPr>
           <a:lstStyle>
-            <a:lvl1pPr indent="-355600" lvl="0" marL="457200" algn="l">
+            <a:lvl1pPr marL="457200" lvl="0" indent="-355600" algn="l">
               <a:lnSpc>
                 <a:spcPct val="130000"/>
               </a:lnSpc>
@@ -2772,7 +2878,7 @@
               <a:buChar char="◼"/>
               <a:defRPr sz="2000"/>
             </a:lvl1pPr>
-            <a:lvl2pPr indent="-342900" lvl="1" marL="914400" algn="l">
+            <a:lvl2pPr marL="914400" lvl="1" indent="-342900" algn="l">
               <a:lnSpc>
                 <a:spcPct val="130000"/>
               </a:lnSpc>
@@ -2786,7 +2892,7 @@
               <a:buChar char="▪"/>
               <a:defRPr sz="1800"/>
             </a:lvl2pPr>
-            <a:lvl3pPr indent="-330200" lvl="2" marL="1371600" algn="l">
+            <a:lvl3pPr marL="1371600" lvl="2" indent="-330200" algn="l">
               <a:lnSpc>
                 <a:spcPct val="130000"/>
               </a:lnSpc>
@@ -2800,7 +2906,7 @@
               <a:buChar char="o"/>
               <a:defRPr sz="1600"/>
             </a:lvl3pPr>
-            <a:lvl4pPr indent="-317500" lvl="3" marL="1828800" algn="l">
+            <a:lvl4pPr marL="1828800" lvl="3" indent="-317500" algn="l">
               <a:lnSpc>
                 <a:spcPct val="130000"/>
               </a:lnSpc>
@@ -2814,7 +2920,7 @@
               <a:buChar char="◼"/>
               <a:defRPr sz="1400"/>
             </a:lvl4pPr>
-            <a:lvl5pPr indent="-304800" lvl="4" marL="2286000" algn="l">
+            <a:lvl5pPr marL="2286000" lvl="4" indent="-304800" algn="l">
               <a:lnSpc>
                 <a:spcPct val="130000"/>
               </a:lnSpc>
@@ -2828,7 +2934,7 @@
               <a:buChar char="▪"/>
               <a:defRPr sz="1200"/>
             </a:lvl5pPr>
-            <a:lvl6pPr indent="-342900" lvl="5" marL="2743200" algn="l">
+            <a:lvl6pPr marL="2743200" lvl="5" indent="-342900" algn="l">
               <a:spcBef>
                 <a:spcPts val="360"/>
               </a:spcBef>
@@ -2842,7 +2948,7 @@
               <a:buChar char="•"/>
               <a:defRPr/>
             </a:lvl6pPr>
-            <a:lvl7pPr indent="-342900" lvl="6" marL="3200400" algn="l">
+            <a:lvl7pPr marL="3200400" lvl="6" indent="-342900" algn="l">
               <a:spcBef>
                 <a:spcPts val="360"/>
               </a:spcBef>
@@ -2856,7 +2962,7 @@
               <a:buChar char="•"/>
               <a:defRPr/>
             </a:lvl7pPr>
-            <a:lvl8pPr indent="-342900" lvl="7" marL="3657600" algn="l">
+            <a:lvl8pPr marL="3657600" lvl="7" indent="-342900" algn="l">
               <a:spcBef>
                 <a:spcPts val="360"/>
               </a:spcBef>
@@ -2870,7 +2976,7 @@
               <a:buChar char="•"/>
               <a:defRPr/>
             </a:lvl8pPr>
-            <a:lvl9pPr indent="-342900" lvl="8" marL="4114800" algn="l">
+            <a:lvl9pPr marL="4114800" lvl="8" indent="-342900" algn="l">
               <a:spcBef>
                 <a:spcPts val="360"/>
               </a:spcBef>
@@ -2885,7 +2991,9 @@
               <a:defRPr/>
             </a:lvl9pPr>
           </a:lstStyle>
-          <a:p/>
+          <a:p>
+            <a:endParaRPr/>
+          </a:p>
         </p:txBody>
       </p:sp>
       <p:pic>
@@ -2898,7 +3006,7 @@
           <a:blip r:embed="rId2">
             <a:alphaModFix amt="20000"/>
           </a:blip>
-          <a:srcRect b="0" l="0" r="0" t="0"/>
+          <a:srcRect/>
           <a:stretch/>
         </p:blipFill>
         <p:spPr>
@@ -2925,7 +3033,7 @@
           <a:blip r:embed="rId3">
             <a:alphaModFix amt="20000"/>
           </a:blip>
-          <a:srcRect b="0" l="0" r="0" t="0"/>
+          <a:srcRect/>
           <a:stretch/>
         </p:blipFill>
         <p:spPr>
@@ -2945,7 +3053,9 @@
       <p:sp>
         <p:nvSpPr>
           <p:cNvPr id="27" name="Google Shape;27;p3"/>
-          <p:cNvSpPr txBox="1"/>
+          <p:cNvSpPr txBox="1">
+            <a:spLocks noGrp="1"/>
+          </p:cNvSpPr>
           <p:nvPr>
             <p:ph type="title"/>
           </p:nvPr>
@@ -2964,7 +3074,7 @@
           </a:ln>
         </p:spPr>
         <p:txBody>
-          <a:bodyPr anchorCtr="0" anchor="b" bIns="45700" lIns="91425" spcFirstLastPara="1" rIns="91425" wrap="square" tIns="45700">
+          <a:bodyPr spcFirstLastPara="1" wrap="square" lIns="91425" tIns="45700" rIns="91425" bIns="45700" anchor="b" anchorCtr="0">
             <a:noAutofit/>
           </a:bodyPr>
           <a:lstStyle>
@@ -3068,12 +3178,14 @@
               <a:defRPr/>
             </a:lvl9pPr>
           </a:lstStyle>
-          <a:p/>
+          <a:p>
+            <a:endParaRPr/>
+          </a:p>
         </p:txBody>
       </p:sp>
       <p:pic>
         <p:nvPicPr>
-          <p:cNvPr descr="Imatge que conté Font, Gràfics, logotip, blanc&#10;&#10;Descripció generada automàticament" id="28" name="Google Shape;28;p3"/>
+          <p:cNvPr id="28" name="Google Shape;28;p3" descr="Imatge que conté Font, Gràfics, logotip, blanc&#10;&#10;Descripció generada automàticament"/>
           <p:cNvPicPr preferRelativeResize="0"/>
           <p:nvPr/>
         </p:nvPicPr>
@@ -3081,7 +3193,7 @@
           <a:blip r:embed="rId4">
             <a:alphaModFix/>
           </a:blip>
-          <a:srcRect b="0" l="0" r="0" t="0"/>
+          <a:srcRect/>
           <a:stretch/>
         </p:blipFill>
         <p:spPr>
@@ -3108,7 +3220,7 @@
           <a:blip r:embed="rId5">
             <a:alphaModFix amt="20000"/>
           </a:blip>
-          <a:srcRect b="0" l="0" r="0" t="0"/>
+          <a:srcRect/>
           <a:stretch/>
         </p:blipFill>
         <p:spPr>
@@ -3140,14 +3252,14 @@
             <a:avLst/>
           </a:prstGeom>
           <a:noFill/>
-          <a:ln cap="flat" cmpd="sng" w="25400">
+          <a:ln w="25400" cap="flat" cmpd="sng">
             <a:solidFill>
               <a:srgbClr val="7F7F7F"/>
             </a:solidFill>
             <a:prstDash val="solid"/>
             <a:round/>
-            <a:headEnd len="sm" w="sm" type="none"/>
-            <a:tailEnd len="sm" w="sm" type="none"/>
+            <a:headEnd type="none" w="sm" len="sm"/>
+            <a:tailEnd type="none" w="sm" len="sm"/>
           </a:ln>
         </p:spPr>
       </p:cxnSp>
@@ -3160,11 +3272,11 @@
 </file>
 
 <file path=ppt/slideLayouts/slideLayout3.xml><?xml version="1.0" encoding="utf-8"?>
-<p:sldLayout xmlns:a="http://schemas.openxmlformats.org/drawingml/2006/main" xmlns:r="http://schemas.openxmlformats.org/officeDocument/2006/relationships" xmlns:mc="http://schemas.openxmlformats.org/markup-compatibility/2006" xmlns:mv="urn:schemas-microsoft-com:mac:vml" xmlns:p="http://schemas.openxmlformats.org/presentationml/2006/main" xmlns:c="http://schemas.openxmlformats.org/drawingml/2006/chart" xmlns:dgm="http://schemas.openxmlformats.org/drawingml/2006/diagram" xmlns:o="urn:schemas-microsoft-com:office:office" xmlns:v="urn:schemas-microsoft-com:vml" xmlns:pvml="urn:schemas-microsoft-com:office:powerpoint" xmlns:com="http://schemas.openxmlformats.org/drawingml/2006/compatibility" xmlns:p14="http://schemas.microsoft.com/office/powerpoint/2010/main" xmlns:p15="http://schemas.microsoft.com/office/powerpoint/2012/main" xmlns:ahyp="http://schemas.microsoft.com/office/drawing/2018/hyperlinkcolor" matchingName="1_Title and Content">
+<p:sldLayout xmlns:a="http://schemas.openxmlformats.org/drawingml/2006/main" xmlns:r="http://schemas.openxmlformats.org/officeDocument/2006/relationships" xmlns:p="http://schemas.openxmlformats.org/presentationml/2006/main" matchingName="1_Title and Content">
   <p:cSld name="1_Title and Content">
     <p:spTree>
       <p:nvGrpSpPr>
-        <p:cNvPr id="31" name="Shape 31"/>
+        <p:cNvPr id="1" name="Shape 31"/>
         <p:cNvGrpSpPr/>
         <p:nvPr/>
       </p:nvGrpSpPr>
@@ -3179,9 +3291,11 @@
       <p:sp>
         <p:nvSpPr>
           <p:cNvPr id="32" name="Google Shape;32;p4"/>
-          <p:cNvSpPr txBox="1"/>
+          <p:cNvSpPr txBox="1">
+            <a:spLocks noGrp="1"/>
+          </p:cNvSpPr>
           <p:nvPr>
-            <p:ph idx="1" type="body"/>
+            <p:ph type="body" idx="1"/>
           </p:nvPr>
         </p:nvSpPr>
         <p:spPr>
@@ -3198,11 +3312,11 @@
           </a:ln>
         </p:spPr>
         <p:txBody>
-          <a:bodyPr anchorCtr="0" anchor="t" bIns="45700" lIns="91425" spcFirstLastPara="1" rIns="91425" wrap="square" tIns="45700">
+          <a:bodyPr spcFirstLastPara="1" wrap="square" lIns="91425" tIns="45700" rIns="91425" bIns="45700" anchor="t" anchorCtr="0">
             <a:noAutofit/>
           </a:bodyPr>
           <a:lstStyle>
-            <a:lvl1pPr indent="-355600" lvl="0" marL="457200" algn="l">
+            <a:lvl1pPr marL="457200" lvl="0" indent="-355600" algn="l">
               <a:lnSpc>
                 <a:spcPct val="130000"/>
               </a:lnSpc>
@@ -3216,7 +3330,7 @@
               <a:buChar char="◼"/>
               <a:defRPr sz="2000"/>
             </a:lvl1pPr>
-            <a:lvl2pPr indent="-342900" lvl="1" marL="914400" algn="l">
+            <a:lvl2pPr marL="914400" lvl="1" indent="-342900" algn="l">
               <a:lnSpc>
                 <a:spcPct val="130000"/>
               </a:lnSpc>
@@ -3230,7 +3344,7 @@
               <a:buChar char="▪"/>
               <a:defRPr sz="1800"/>
             </a:lvl2pPr>
-            <a:lvl3pPr indent="-330200" lvl="2" marL="1371600" algn="l">
+            <a:lvl3pPr marL="1371600" lvl="2" indent="-330200" algn="l">
               <a:lnSpc>
                 <a:spcPct val="130000"/>
               </a:lnSpc>
@@ -3244,7 +3358,7 @@
               <a:buChar char="o"/>
               <a:defRPr sz="1600"/>
             </a:lvl3pPr>
-            <a:lvl4pPr indent="-317500" lvl="3" marL="1828800" algn="l">
+            <a:lvl4pPr marL="1828800" lvl="3" indent="-317500" algn="l">
               <a:lnSpc>
                 <a:spcPct val="130000"/>
               </a:lnSpc>
@@ -3258,7 +3372,7 @@
               <a:buChar char="◼"/>
               <a:defRPr sz="1400"/>
             </a:lvl4pPr>
-            <a:lvl5pPr indent="-304800" lvl="4" marL="2286000" algn="l">
+            <a:lvl5pPr marL="2286000" lvl="4" indent="-304800" algn="l">
               <a:lnSpc>
                 <a:spcPct val="130000"/>
               </a:lnSpc>
@@ -3272,7 +3386,7 @@
               <a:buChar char="▪"/>
               <a:defRPr sz="1200"/>
             </a:lvl5pPr>
-            <a:lvl6pPr indent="-342900" lvl="5" marL="2743200" algn="l">
+            <a:lvl6pPr marL="2743200" lvl="5" indent="-342900" algn="l">
               <a:spcBef>
                 <a:spcPts val="360"/>
               </a:spcBef>
@@ -3286,7 +3400,7 @@
               <a:buChar char="•"/>
               <a:defRPr/>
             </a:lvl6pPr>
-            <a:lvl7pPr indent="-342900" lvl="6" marL="3200400" algn="l">
+            <a:lvl7pPr marL="3200400" lvl="6" indent="-342900" algn="l">
               <a:spcBef>
                 <a:spcPts val="360"/>
               </a:spcBef>
@@ -3300,7 +3414,7 @@
               <a:buChar char="•"/>
               <a:defRPr/>
             </a:lvl7pPr>
-            <a:lvl8pPr indent="-342900" lvl="7" marL="3657600" algn="l">
+            <a:lvl8pPr marL="3657600" lvl="7" indent="-342900" algn="l">
               <a:spcBef>
                 <a:spcPts val="360"/>
               </a:spcBef>
@@ -3314,7 +3428,7 @@
               <a:buChar char="•"/>
               <a:defRPr/>
             </a:lvl8pPr>
-            <a:lvl9pPr indent="-342900" lvl="8" marL="4114800" algn="l">
+            <a:lvl9pPr marL="4114800" lvl="8" indent="-342900" algn="l">
               <a:spcBef>
                 <a:spcPts val="360"/>
               </a:spcBef>
@@ -3329,12 +3443,14 @@
               <a:defRPr/>
             </a:lvl9pPr>
           </a:lstStyle>
-          <a:p/>
+          <a:p>
+            <a:endParaRPr/>
+          </a:p>
         </p:txBody>
       </p:sp>
       <p:pic>
         <p:nvPicPr>
-          <p:cNvPr descr="Imatge que conté Font, Gràfics, logotip, blanc&#10;&#10;Descripció generada automàticament" id="33" name="Google Shape;33;p4"/>
+          <p:cNvPr id="33" name="Google Shape;33;p4" descr="Imatge que conté Font, Gràfics, logotip, blanc&#10;&#10;Descripció generada automàticament"/>
           <p:cNvPicPr preferRelativeResize="0"/>
           <p:nvPr/>
         </p:nvPicPr>
@@ -3342,7 +3458,7 @@
           <a:blip r:embed="rId2">
             <a:alphaModFix/>
           </a:blip>
-          <a:srcRect b="0" l="0" r="0" t="0"/>
+          <a:srcRect/>
           <a:stretch/>
         </p:blipFill>
         <p:spPr>
@@ -3362,7 +3478,9 @@
       <p:sp>
         <p:nvSpPr>
           <p:cNvPr id="34" name="Google Shape;34;p4"/>
-          <p:cNvSpPr txBox="1"/>
+          <p:cNvSpPr txBox="1">
+            <a:spLocks noGrp="1"/>
+          </p:cNvSpPr>
           <p:nvPr>
             <p:ph type="title"/>
           </p:nvPr>
@@ -3381,7 +3499,7 @@
           </a:ln>
         </p:spPr>
         <p:txBody>
-          <a:bodyPr anchorCtr="0" anchor="ctr" bIns="45700" lIns="91425" spcFirstLastPara="1" rIns="91425" wrap="square" tIns="45700">
+          <a:bodyPr spcFirstLastPara="1" wrap="square" lIns="91425" tIns="45700" rIns="91425" bIns="45700" anchor="ctr" anchorCtr="0">
             <a:noAutofit/>
           </a:bodyPr>
           <a:lstStyle>
@@ -3485,7 +3603,9 @@
               <a:defRPr/>
             </a:lvl9pPr>
           </a:lstStyle>
-          <a:p/>
+          <a:p>
+            <a:endParaRPr/>
+          </a:p>
         </p:txBody>
       </p:sp>
       <p:pic>
@@ -3498,7 +3618,7 @@
           <a:blip r:embed="rId3">
             <a:alphaModFix amt="20000"/>
           </a:blip>
-          <a:srcRect b="0" l="0" r="0" t="0"/>
+          <a:srcRect/>
           <a:stretch/>
         </p:blipFill>
         <p:spPr>
@@ -3525,7 +3645,7 @@
           <a:blip r:embed="rId4">
             <a:alphaModFix amt="20000"/>
           </a:blip>
-          <a:srcRect b="0" l="0" r="0" t="0"/>
+          <a:srcRect/>
           <a:stretch/>
         </p:blipFill>
         <p:spPr>
@@ -3552,7 +3672,7 @@
           <a:blip r:embed="rId5">
             <a:alphaModFix amt="20000"/>
           </a:blip>
-          <a:srcRect b="0" l="0" r="0" t="0"/>
+          <a:srcRect/>
           <a:stretch/>
         </p:blipFill>
         <p:spPr>
@@ -3579,7 +3699,7 @@
           <a:blip r:embed="rId3">
             <a:alphaModFix amt="20000"/>
           </a:blip>
-          <a:srcRect b="0" l="0" r="0" t="0"/>
+          <a:srcRect/>
           <a:stretch/>
         </p:blipFill>
         <p:spPr>
@@ -3606,7 +3726,7 @@
           <a:blip r:embed="rId6">
             <a:alphaModFix amt="20000"/>
           </a:blip>
-          <a:srcRect b="0" l="0" r="0" t="0"/>
+          <a:srcRect/>
           <a:stretch/>
         </p:blipFill>
         <p:spPr>
@@ -3633,7 +3753,7 @@
           <a:blip r:embed="rId7">
             <a:alphaModFix amt="20000"/>
           </a:blip>
-          <a:srcRect b="0" l="0" r="0" t="0"/>
+          <a:srcRect/>
           <a:stretch/>
         </p:blipFill>
         <p:spPr>
@@ -3660,7 +3780,7 @@
           <a:blip r:embed="rId8">
             <a:alphaModFix amt="20000"/>
           </a:blip>
-          <a:srcRect b="0" l="0" r="0" t="0"/>
+          <a:srcRect/>
           <a:stretch/>
         </p:blipFill>
         <p:spPr>
@@ -3680,9 +3800,11 @@
       <p:sp>
         <p:nvSpPr>
           <p:cNvPr id="42" name="Google Shape;42;p4"/>
-          <p:cNvSpPr txBox="1"/>
+          <p:cNvSpPr txBox="1">
+            <a:spLocks noGrp="1"/>
+          </p:cNvSpPr>
           <p:nvPr>
-            <p:ph idx="2" type="body"/>
+            <p:ph type="body" idx="2"/>
           </p:nvPr>
         </p:nvSpPr>
         <p:spPr>
@@ -3699,11 +3821,11 @@
           </a:ln>
         </p:spPr>
         <p:txBody>
-          <a:bodyPr anchorCtr="0" anchor="t" bIns="45700" lIns="91425" spcFirstLastPara="1" rIns="91425" wrap="square" tIns="45700">
+          <a:bodyPr spcFirstLastPara="1" wrap="square" lIns="91425" tIns="45700" rIns="91425" bIns="45700" anchor="t" anchorCtr="0">
             <a:noAutofit/>
           </a:bodyPr>
           <a:lstStyle>
-            <a:lvl1pPr indent="-355600" lvl="0" marL="457200" algn="l">
+            <a:lvl1pPr marL="457200" lvl="0" indent="-355600" algn="l">
               <a:lnSpc>
                 <a:spcPct val="130000"/>
               </a:lnSpc>
@@ -3717,7 +3839,7 @@
               <a:buChar char="◼"/>
               <a:defRPr sz="2000"/>
             </a:lvl1pPr>
-            <a:lvl2pPr indent="-342900" lvl="1" marL="914400" algn="l">
+            <a:lvl2pPr marL="914400" lvl="1" indent="-342900" algn="l">
               <a:lnSpc>
                 <a:spcPct val="130000"/>
               </a:lnSpc>
@@ -3731,7 +3853,7 @@
               <a:buChar char="▪"/>
               <a:defRPr sz="1800"/>
             </a:lvl2pPr>
-            <a:lvl3pPr indent="-330200" lvl="2" marL="1371600" algn="l">
+            <a:lvl3pPr marL="1371600" lvl="2" indent="-330200" algn="l">
               <a:lnSpc>
                 <a:spcPct val="130000"/>
               </a:lnSpc>
@@ -3745,7 +3867,7 @@
               <a:buChar char="o"/>
               <a:defRPr sz="1600"/>
             </a:lvl3pPr>
-            <a:lvl4pPr indent="-317500" lvl="3" marL="1828800" algn="l">
+            <a:lvl4pPr marL="1828800" lvl="3" indent="-317500" algn="l">
               <a:lnSpc>
                 <a:spcPct val="130000"/>
               </a:lnSpc>
@@ -3759,7 +3881,7 @@
               <a:buChar char="◼"/>
               <a:defRPr sz="1400"/>
             </a:lvl4pPr>
-            <a:lvl5pPr indent="-304800" lvl="4" marL="2286000" algn="l">
+            <a:lvl5pPr marL="2286000" lvl="4" indent="-304800" algn="l">
               <a:lnSpc>
                 <a:spcPct val="130000"/>
               </a:lnSpc>
@@ -3773,7 +3895,7 @@
               <a:buChar char="▪"/>
               <a:defRPr sz="1200"/>
             </a:lvl5pPr>
-            <a:lvl6pPr indent="-342900" lvl="5" marL="2743200" algn="l">
+            <a:lvl6pPr marL="2743200" lvl="5" indent="-342900" algn="l">
               <a:spcBef>
                 <a:spcPts val="360"/>
               </a:spcBef>
@@ -3787,7 +3909,7 @@
               <a:buChar char="•"/>
               <a:defRPr/>
             </a:lvl6pPr>
-            <a:lvl7pPr indent="-342900" lvl="6" marL="3200400" algn="l">
+            <a:lvl7pPr marL="3200400" lvl="6" indent="-342900" algn="l">
               <a:spcBef>
                 <a:spcPts val="360"/>
               </a:spcBef>
@@ -3801,7 +3923,7 @@
               <a:buChar char="•"/>
               <a:defRPr/>
             </a:lvl7pPr>
-            <a:lvl8pPr indent="-342900" lvl="7" marL="3657600" algn="l">
+            <a:lvl8pPr marL="3657600" lvl="7" indent="-342900" algn="l">
               <a:spcBef>
                 <a:spcPts val="360"/>
               </a:spcBef>
@@ -3815,7 +3937,7 @@
               <a:buChar char="•"/>
               <a:defRPr/>
             </a:lvl8pPr>
-            <a:lvl9pPr indent="-342900" lvl="8" marL="4114800" algn="l">
+            <a:lvl9pPr marL="4114800" lvl="8" indent="-342900" algn="l">
               <a:spcBef>
                 <a:spcPts val="360"/>
               </a:spcBef>
@@ -3830,7 +3952,9 @@
               <a:defRPr/>
             </a:lvl9pPr>
           </a:lstStyle>
-          <a:p/>
+          <a:p>
+            <a:endParaRPr/>
+          </a:p>
         </p:txBody>
       </p:sp>
       <p:cxnSp>
@@ -3848,14 +3972,14 @@
             <a:avLst/>
           </a:prstGeom>
           <a:noFill/>
-          <a:ln cap="flat" cmpd="sng" w="25400">
+          <a:ln w="25400" cap="flat" cmpd="sng">
             <a:solidFill>
               <a:srgbClr val="7F7F7F"/>
             </a:solidFill>
             <a:prstDash val="solid"/>
             <a:round/>
-            <a:headEnd len="sm" w="sm" type="none"/>
-            <a:tailEnd len="sm" w="sm" type="none"/>
+            <a:headEnd type="none" w="sm" len="sm"/>
+            <a:tailEnd type="none" w="sm" len="sm"/>
           </a:ln>
         </p:spPr>
       </p:cxnSp>
@@ -3868,11 +3992,11 @@
 </file>
 
 <file path=ppt/slideLayouts/slideLayout4.xml><?xml version="1.0" encoding="utf-8"?>
-<p:sldLayout xmlns:a="http://schemas.openxmlformats.org/drawingml/2006/main" xmlns:r="http://schemas.openxmlformats.org/officeDocument/2006/relationships" xmlns:mc="http://schemas.openxmlformats.org/markup-compatibility/2006" xmlns:mv="urn:schemas-microsoft-com:mac:vml" xmlns:p="http://schemas.openxmlformats.org/presentationml/2006/main" xmlns:c="http://schemas.openxmlformats.org/drawingml/2006/chart" xmlns:dgm="http://schemas.openxmlformats.org/drawingml/2006/diagram" xmlns:o="urn:schemas-microsoft-com:office:office" xmlns:v="urn:schemas-microsoft-com:vml" xmlns:pvml="urn:schemas-microsoft-com:office:powerpoint" xmlns:com="http://schemas.openxmlformats.org/drawingml/2006/compatibility" xmlns:p14="http://schemas.microsoft.com/office/powerpoint/2010/main" xmlns:p15="http://schemas.microsoft.com/office/powerpoint/2012/main" xmlns:ahyp="http://schemas.microsoft.com/office/drawing/2018/hyperlinkcolor" matchingName="4_Title and Content">
+<p:sldLayout xmlns:a="http://schemas.openxmlformats.org/drawingml/2006/main" xmlns:r="http://schemas.openxmlformats.org/officeDocument/2006/relationships" xmlns:p="http://schemas.openxmlformats.org/presentationml/2006/main" matchingName="4_Title and Content">
   <p:cSld name="4_Title and Content">
     <p:spTree>
       <p:nvGrpSpPr>
-        <p:cNvPr id="44" name="Shape 44"/>
+        <p:cNvPr id="1" name="Shape 44"/>
         <p:cNvGrpSpPr/>
         <p:nvPr/>
       </p:nvGrpSpPr>
@@ -3887,9 +4011,11 @@
       <p:sp>
         <p:nvSpPr>
           <p:cNvPr id="45" name="Google Shape;45;p5"/>
-          <p:cNvSpPr txBox="1"/>
+          <p:cNvSpPr txBox="1">
+            <a:spLocks noGrp="1"/>
+          </p:cNvSpPr>
           <p:nvPr>
-            <p:ph idx="1" type="body"/>
+            <p:ph type="body" idx="1"/>
           </p:nvPr>
         </p:nvSpPr>
         <p:spPr>
@@ -3906,11 +4032,11 @@
           </a:ln>
         </p:spPr>
         <p:txBody>
-          <a:bodyPr anchorCtr="0" anchor="t" bIns="45700" lIns="91425" spcFirstLastPara="1" rIns="91425" wrap="square" tIns="45700">
+          <a:bodyPr spcFirstLastPara="1" wrap="square" lIns="91425" tIns="45700" rIns="91425" bIns="45700" anchor="t" anchorCtr="0">
             <a:noAutofit/>
           </a:bodyPr>
           <a:lstStyle>
-            <a:lvl1pPr indent="-355600" lvl="0" marL="457200" algn="l">
+            <a:lvl1pPr marL="457200" lvl="0" indent="-355600" algn="l">
               <a:lnSpc>
                 <a:spcPct val="130000"/>
               </a:lnSpc>
@@ -3924,7 +4050,7 @@
               <a:buChar char="◼"/>
               <a:defRPr sz="2000"/>
             </a:lvl1pPr>
-            <a:lvl2pPr indent="-342900" lvl="1" marL="914400" algn="l">
+            <a:lvl2pPr marL="914400" lvl="1" indent="-342900" algn="l">
               <a:lnSpc>
                 <a:spcPct val="130000"/>
               </a:lnSpc>
@@ -3938,7 +4064,7 @@
               <a:buChar char="▪"/>
               <a:defRPr sz="1800"/>
             </a:lvl2pPr>
-            <a:lvl3pPr indent="-330200" lvl="2" marL="1371600" algn="l">
+            <a:lvl3pPr marL="1371600" lvl="2" indent="-330200" algn="l">
               <a:lnSpc>
                 <a:spcPct val="130000"/>
               </a:lnSpc>
@@ -3952,7 +4078,7 @@
               <a:buChar char="o"/>
               <a:defRPr sz="1600"/>
             </a:lvl3pPr>
-            <a:lvl4pPr indent="-317500" lvl="3" marL="1828800" algn="l">
+            <a:lvl4pPr marL="1828800" lvl="3" indent="-317500" algn="l">
               <a:lnSpc>
                 <a:spcPct val="130000"/>
               </a:lnSpc>
@@ -3966,7 +4092,7 @@
               <a:buChar char="◼"/>
               <a:defRPr sz="1400"/>
             </a:lvl4pPr>
-            <a:lvl5pPr indent="-304800" lvl="4" marL="2286000" algn="l">
+            <a:lvl5pPr marL="2286000" lvl="4" indent="-304800" algn="l">
               <a:lnSpc>
                 <a:spcPct val="130000"/>
               </a:lnSpc>
@@ -3980,7 +4106,7 @@
               <a:buChar char="▪"/>
               <a:defRPr sz="1200"/>
             </a:lvl5pPr>
-            <a:lvl6pPr indent="-342900" lvl="5" marL="2743200" algn="l">
+            <a:lvl6pPr marL="2743200" lvl="5" indent="-342900" algn="l">
               <a:spcBef>
                 <a:spcPts val="360"/>
               </a:spcBef>
@@ -3994,7 +4120,7 @@
               <a:buChar char="•"/>
               <a:defRPr/>
             </a:lvl6pPr>
-            <a:lvl7pPr indent="-342900" lvl="6" marL="3200400" algn="l">
+            <a:lvl7pPr marL="3200400" lvl="6" indent="-342900" algn="l">
               <a:spcBef>
                 <a:spcPts val="360"/>
               </a:spcBef>
@@ -4008,7 +4134,7 @@
               <a:buChar char="•"/>
               <a:defRPr/>
             </a:lvl7pPr>
-            <a:lvl8pPr indent="-342900" lvl="7" marL="3657600" algn="l">
+            <a:lvl8pPr marL="3657600" lvl="7" indent="-342900" algn="l">
               <a:spcBef>
                 <a:spcPts val="360"/>
               </a:spcBef>
@@ -4022,7 +4148,7 @@
               <a:buChar char="•"/>
               <a:defRPr/>
             </a:lvl8pPr>
-            <a:lvl9pPr indent="-342900" lvl="8" marL="4114800" algn="l">
+            <a:lvl9pPr marL="4114800" lvl="8" indent="-342900" algn="l">
               <a:spcBef>
                 <a:spcPts val="360"/>
               </a:spcBef>
@@ -4037,12 +4163,14 @@
               <a:defRPr/>
             </a:lvl9pPr>
           </a:lstStyle>
-          <a:p/>
+          <a:p>
+            <a:endParaRPr/>
+          </a:p>
         </p:txBody>
       </p:sp>
       <p:pic>
         <p:nvPicPr>
-          <p:cNvPr descr="Imatge que conté Font, Gràfics, logotip, blanc&#10;&#10;Descripció generada automàticament" id="46" name="Google Shape;46;p5"/>
+          <p:cNvPr id="46" name="Google Shape;46;p5" descr="Imatge que conté Font, Gràfics, logotip, blanc&#10;&#10;Descripció generada automàticament"/>
           <p:cNvPicPr preferRelativeResize="0"/>
           <p:nvPr/>
         </p:nvPicPr>
@@ -4050,7 +4178,7 @@
           <a:blip r:embed="rId2">
             <a:alphaModFix/>
           </a:blip>
-          <a:srcRect b="0" l="0" r="0" t="0"/>
+          <a:srcRect/>
           <a:stretch/>
         </p:blipFill>
         <p:spPr>
@@ -4070,7 +4198,9 @@
       <p:sp>
         <p:nvSpPr>
           <p:cNvPr id="47" name="Google Shape;47;p5"/>
-          <p:cNvSpPr txBox="1"/>
+          <p:cNvSpPr txBox="1">
+            <a:spLocks noGrp="1"/>
+          </p:cNvSpPr>
           <p:nvPr>
             <p:ph type="title"/>
           </p:nvPr>
@@ -4089,7 +4219,7 @@
           </a:ln>
         </p:spPr>
         <p:txBody>
-          <a:bodyPr anchorCtr="0" anchor="ctr" bIns="45700" lIns="91425" spcFirstLastPara="1" rIns="91425" wrap="square" tIns="45700">
+          <a:bodyPr spcFirstLastPara="1" wrap="square" lIns="91425" tIns="45700" rIns="91425" bIns="45700" anchor="ctr" anchorCtr="0">
             <a:noAutofit/>
           </a:bodyPr>
           <a:lstStyle>
@@ -4193,7 +4323,9 @@
               <a:defRPr/>
             </a:lvl9pPr>
           </a:lstStyle>
-          <a:p/>
+          <a:p>
+            <a:endParaRPr/>
+          </a:p>
         </p:txBody>
       </p:sp>
       <p:pic>
@@ -4206,7 +4338,7 @@
           <a:blip r:embed="rId3">
             <a:alphaModFix amt="20000"/>
           </a:blip>
-          <a:srcRect b="0" l="0" r="0" t="0"/>
+          <a:srcRect/>
           <a:stretch/>
         </p:blipFill>
         <p:spPr>
@@ -4233,7 +4365,7 @@
           <a:blip r:embed="rId4">
             <a:alphaModFix amt="20000"/>
           </a:blip>
-          <a:srcRect b="0" l="0" r="0" t="0"/>
+          <a:srcRect/>
           <a:stretch/>
         </p:blipFill>
         <p:spPr>
@@ -4253,9 +4385,11 @@
       <p:sp>
         <p:nvSpPr>
           <p:cNvPr id="50" name="Google Shape;50;p5"/>
-          <p:cNvSpPr txBox="1"/>
+          <p:cNvSpPr txBox="1">
+            <a:spLocks noGrp="1"/>
+          </p:cNvSpPr>
           <p:nvPr>
-            <p:ph idx="2" type="body"/>
+            <p:ph type="body" idx="2"/>
           </p:nvPr>
         </p:nvSpPr>
         <p:spPr>
@@ -4272,11 +4406,11 @@
           </a:ln>
         </p:spPr>
         <p:txBody>
-          <a:bodyPr anchorCtr="0" anchor="t" bIns="45700" lIns="91425" spcFirstLastPara="1" rIns="91425" wrap="square" tIns="45700">
+          <a:bodyPr spcFirstLastPara="1" wrap="square" lIns="91425" tIns="45700" rIns="91425" bIns="45700" anchor="t" anchorCtr="0">
             <a:noAutofit/>
           </a:bodyPr>
           <a:lstStyle>
-            <a:lvl1pPr indent="-355600" lvl="0" marL="457200" algn="l">
+            <a:lvl1pPr marL="457200" lvl="0" indent="-355600" algn="l">
               <a:lnSpc>
                 <a:spcPct val="130000"/>
               </a:lnSpc>
@@ -4290,7 +4424,7 @@
               <a:buChar char="◼"/>
               <a:defRPr sz="2000"/>
             </a:lvl1pPr>
-            <a:lvl2pPr indent="-342900" lvl="1" marL="914400" algn="l">
+            <a:lvl2pPr marL="914400" lvl="1" indent="-342900" algn="l">
               <a:lnSpc>
                 <a:spcPct val="130000"/>
               </a:lnSpc>
@@ -4304,7 +4438,7 @@
               <a:buChar char="▪"/>
               <a:defRPr sz="1800"/>
             </a:lvl2pPr>
-            <a:lvl3pPr indent="-330200" lvl="2" marL="1371600" algn="l">
+            <a:lvl3pPr marL="1371600" lvl="2" indent="-330200" algn="l">
               <a:lnSpc>
                 <a:spcPct val="130000"/>
               </a:lnSpc>
@@ -4318,7 +4452,7 @@
               <a:buChar char="o"/>
               <a:defRPr sz="1600"/>
             </a:lvl3pPr>
-            <a:lvl4pPr indent="-317500" lvl="3" marL="1828800" algn="l">
+            <a:lvl4pPr marL="1828800" lvl="3" indent="-317500" algn="l">
               <a:lnSpc>
                 <a:spcPct val="130000"/>
               </a:lnSpc>
@@ -4332,7 +4466,7 @@
               <a:buChar char="◼"/>
               <a:defRPr sz="1400"/>
             </a:lvl4pPr>
-            <a:lvl5pPr indent="-304800" lvl="4" marL="2286000" algn="l">
+            <a:lvl5pPr marL="2286000" lvl="4" indent="-304800" algn="l">
               <a:lnSpc>
                 <a:spcPct val="130000"/>
               </a:lnSpc>
@@ -4346,7 +4480,7 @@
               <a:buChar char="▪"/>
               <a:defRPr sz="1200"/>
             </a:lvl5pPr>
-            <a:lvl6pPr indent="-342900" lvl="5" marL="2743200" algn="l">
+            <a:lvl6pPr marL="2743200" lvl="5" indent="-342900" algn="l">
               <a:spcBef>
                 <a:spcPts val="360"/>
               </a:spcBef>
@@ -4360,7 +4494,7 @@
               <a:buChar char="•"/>
               <a:defRPr/>
             </a:lvl6pPr>
-            <a:lvl7pPr indent="-342900" lvl="6" marL="3200400" algn="l">
+            <a:lvl7pPr marL="3200400" lvl="6" indent="-342900" algn="l">
               <a:spcBef>
                 <a:spcPts val="360"/>
               </a:spcBef>
@@ -4374,7 +4508,7 @@
               <a:buChar char="•"/>
               <a:defRPr/>
             </a:lvl7pPr>
-            <a:lvl8pPr indent="-342900" lvl="7" marL="3657600" algn="l">
+            <a:lvl8pPr marL="3657600" lvl="7" indent="-342900" algn="l">
               <a:spcBef>
                 <a:spcPts val="360"/>
               </a:spcBef>
@@ -4388,7 +4522,7 @@
               <a:buChar char="•"/>
               <a:defRPr/>
             </a:lvl8pPr>
-            <a:lvl9pPr indent="-342900" lvl="8" marL="4114800" algn="l">
+            <a:lvl9pPr marL="4114800" lvl="8" indent="-342900" algn="l">
               <a:spcBef>
                 <a:spcPts val="360"/>
               </a:spcBef>
@@ -4403,7 +4537,9 @@
               <a:defRPr/>
             </a:lvl9pPr>
           </a:lstStyle>
-          <a:p/>
+          <a:p>
+            <a:endParaRPr/>
+          </a:p>
         </p:txBody>
       </p:sp>
       <p:cxnSp>
@@ -4421,14 +4557,14 @@
             <a:avLst/>
           </a:prstGeom>
           <a:noFill/>
-          <a:ln cap="flat" cmpd="sng" w="25400">
+          <a:ln w="25400" cap="flat" cmpd="sng">
             <a:solidFill>
               <a:srgbClr val="7F7F7F"/>
             </a:solidFill>
             <a:prstDash val="solid"/>
             <a:round/>
-            <a:headEnd len="sm" w="sm" type="none"/>
-            <a:tailEnd len="sm" w="sm" type="none"/>
+            <a:headEnd type="none" w="sm" len="sm"/>
+            <a:tailEnd type="none" w="sm" len="sm"/>
           </a:ln>
         </p:spPr>
       </p:cxnSp>
@@ -4441,11 +4577,11 @@
 </file>
 
 <file path=ppt/slideLayouts/slideLayout5.xml><?xml version="1.0" encoding="utf-8"?>
-<p:sldLayout xmlns:a="http://schemas.openxmlformats.org/drawingml/2006/main" xmlns:r="http://schemas.openxmlformats.org/officeDocument/2006/relationships" xmlns:mc="http://schemas.openxmlformats.org/markup-compatibility/2006" xmlns:mv="urn:schemas-microsoft-com:mac:vml" xmlns:p="http://schemas.openxmlformats.org/presentationml/2006/main" xmlns:c="http://schemas.openxmlformats.org/drawingml/2006/chart" xmlns:dgm="http://schemas.openxmlformats.org/drawingml/2006/diagram" xmlns:o="urn:schemas-microsoft-com:office:office" xmlns:v="urn:schemas-microsoft-com:vml" xmlns:pvml="urn:schemas-microsoft-com:office:powerpoint" xmlns:com="http://schemas.openxmlformats.org/drawingml/2006/compatibility" xmlns:p14="http://schemas.microsoft.com/office/powerpoint/2010/main" xmlns:p15="http://schemas.microsoft.com/office/powerpoint/2012/main" xmlns:ahyp="http://schemas.microsoft.com/office/drawing/2018/hyperlinkcolor" matchingName="3_Title and Content">
+<p:sldLayout xmlns:a="http://schemas.openxmlformats.org/drawingml/2006/main" xmlns:r="http://schemas.openxmlformats.org/officeDocument/2006/relationships" xmlns:p="http://schemas.openxmlformats.org/presentationml/2006/main" matchingName="3_Title and Content">
   <p:cSld name="3_Title and Content">
     <p:spTree>
       <p:nvGrpSpPr>
-        <p:cNvPr id="52" name="Shape 52"/>
+        <p:cNvPr id="1" name="Shape 52"/>
         <p:cNvGrpSpPr/>
         <p:nvPr/>
       </p:nvGrpSpPr>
@@ -4459,7 +4595,7 @@
       </p:grpSpPr>
       <p:pic>
         <p:nvPicPr>
-          <p:cNvPr descr="Imatge que conté Font, Gràfics, logotip, blanc&#10;&#10;Descripció generada automàticament" id="53" name="Google Shape;53;p6"/>
+          <p:cNvPr id="53" name="Google Shape;53;p6" descr="Imatge que conté Font, Gràfics, logotip, blanc&#10;&#10;Descripció generada automàticament"/>
           <p:cNvPicPr preferRelativeResize="0"/>
           <p:nvPr/>
         </p:nvPicPr>
@@ -4467,7 +4603,7 @@
           <a:blip r:embed="rId2">
             <a:alphaModFix/>
           </a:blip>
-          <a:srcRect b="0" l="0" r="0" t="0"/>
+          <a:srcRect/>
           <a:stretch/>
         </p:blipFill>
         <p:spPr>
@@ -4487,7 +4623,9 @@
       <p:sp>
         <p:nvSpPr>
           <p:cNvPr id="54" name="Google Shape;54;p6"/>
-          <p:cNvSpPr txBox="1"/>
+          <p:cNvSpPr txBox="1">
+            <a:spLocks noGrp="1"/>
+          </p:cNvSpPr>
           <p:nvPr>
             <p:ph type="title"/>
           </p:nvPr>
@@ -4506,7 +4644,7 @@
           </a:ln>
         </p:spPr>
         <p:txBody>
-          <a:bodyPr anchorCtr="0" anchor="ctr" bIns="45700" lIns="91425" spcFirstLastPara="1" rIns="91425" wrap="square" tIns="45700">
+          <a:bodyPr spcFirstLastPara="1" wrap="square" lIns="91425" tIns="45700" rIns="91425" bIns="45700" anchor="ctr" anchorCtr="0">
             <a:noAutofit/>
           </a:bodyPr>
           <a:lstStyle>
@@ -4610,7 +4748,9 @@
               <a:defRPr/>
             </a:lvl9pPr>
           </a:lstStyle>
-          <a:p/>
+          <a:p>
+            <a:endParaRPr/>
+          </a:p>
         </p:txBody>
       </p:sp>
       <p:pic>
@@ -4623,7 +4763,7 @@
           <a:blip r:embed="rId3">
             <a:alphaModFix amt="20000"/>
           </a:blip>
-          <a:srcRect b="0" l="0" r="0" t="0"/>
+          <a:srcRect/>
           <a:stretch/>
         </p:blipFill>
         <p:spPr>
@@ -4650,7 +4790,7 @@
           <a:blip r:embed="rId3">
             <a:alphaModFix amt="20000"/>
           </a:blip>
-          <a:srcRect b="0" l="0" r="0" t="0"/>
+          <a:srcRect/>
           <a:stretch/>
         </p:blipFill>
         <p:spPr>
@@ -4670,9 +4810,11 @@
       <p:sp>
         <p:nvSpPr>
           <p:cNvPr id="57" name="Google Shape;57;p6"/>
-          <p:cNvSpPr txBox="1"/>
+          <p:cNvSpPr txBox="1">
+            <a:spLocks noGrp="1"/>
+          </p:cNvSpPr>
           <p:nvPr>
-            <p:ph idx="1" type="body"/>
+            <p:ph type="body" idx="1"/>
           </p:nvPr>
         </p:nvSpPr>
         <p:spPr>
@@ -4689,11 +4831,11 @@
           </a:ln>
         </p:spPr>
         <p:txBody>
-          <a:bodyPr anchorCtr="0" anchor="t" bIns="45700" lIns="91425" spcFirstLastPara="1" rIns="91425" wrap="square" tIns="45700">
+          <a:bodyPr spcFirstLastPara="1" wrap="square" lIns="91425" tIns="45700" rIns="91425" bIns="45700" anchor="t" anchorCtr="0">
             <a:noAutofit/>
           </a:bodyPr>
           <a:lstStyle>
-            <a:lvl1pPr indent="-336550" lvl="0" marL="457200" algn="l">
+            <a:lvl1pPr marL="457200" lvl="0" indent="-336550" algn="l">
               <a:lnSpc>
                 <a:spcPct val="130000"/>
               </a:lnSpc>
@@ -4710,7 +4852,7 @@
               <a:buChar char="◼"/>
               <a:defRPr sz="1700"/>
             </a:lvl1pPr>
-            <a:lvl2pPr indent="-317500" lvl="1" marL="914400" algn="l">
+            <a:lvl2pPr marL="914400" lvl="1" indent="-317500" algn="l">
               <a:lnSpc>
                 <a:spcPct val="130000"/>
               </a:lnSpc>
@@ -4724,7 +4866,7 @@
               <a:buChar char="▪"/>
               <a:defRPr sz="1400"/>
             </a:lvl2pPr>
-            <a:lvl3pPr indent="-317500" lvl="2" marL="1371600" algn="l">
+            <a:lvl3pPr marL="1371600" lvl="2" indent="-317500" algn="l">
               <a:lnSpc>
                 <a:spcPct val="130000"/>
               </a:lnSpc>
@@ -4738,7 +4880,7 @@
               <a:buChar char="o"/>
               <a:defRPr sz="1400"/>
             </a:lvl3pPr>
-            <a:lvl4pPr indent="-317500" lvl="3" marL="1828800" algn="l">
+            <a:lvl4pPr marL="1828800" lvl="3" indent="-317500" algn="l">
               <a:lnSpc>
                 <a:spcPct val="130000"/>
               </a:lnSpc>
@@ -4752,7 +4894,7 @@
               <a:buChar char="◼"/>
               <a:defRPr sz="1400"/>
             </a:lvl4pPr>
-            <a:lvl5pPr indent="-317500" lvl="4" marL="2286000" algn="l">
+            <a:lvl5pPr marL="2286000" lvl="4" indent="-317500" algn="l">
               <a:lnSpc>
                 <a:spcPct val="130000"/>
               </a:lnSpc>
@@ -4766,7 +4908,7 @@
               <a:buChar char="▪"/>
               <a:defRPr sz="1400"/>
             </a:lvl5pPr>
-            <a:lvl6pPr indent="-342900" lvl="5" marL="2743200" algn="l">
+            <a:lvl6pPr marL="2743200" lvl="5" indent="-342900" algn="l">
               <a:spcBef>
                 <a:spcPts val="360"/>
               </a:spcBef>
@@ -4780,7 +4922,7 @@
               <a:buChar char="•"/>
               <a:defRPr/>
             </a:lvl6pPr>
-            <a:lvl7pPr indent="-342900" lvl="6" marL="3200400" algn="l">
+            <a:lvl7pPr marL="3200400" lvl="6" indent="-342900" algn="l">
               <a:spcBef>
                 <a:spcPts val="360"/>
               </a:spcBef>
@@ -4794,7 +4936,7 @@
               <a:buChar char="•"/>
               <a:defRPr/>
             </a:lvl7pPr>
-            <a:lvl8pPr indent="-342900" lvl="7" marL="3657600" algn="l">
+            <a:lvl8pPr marL="3657600" lvl="7" indent="-342900" algn="l">
               <a:spcBef>
                 <a:spcPts val="360"/>
               </a:spcBef>
@@ -4808,7 +4950,7 @@
               <a:buChar char="•"/>
               <a:defRPr/>
             </a:lvl8pPr>
-            <a:lvl9pPr indent="-342900" lvl="8" marL="4114800" algn="l">
+            <a:lvl9pPr marL="4114800" lvl="8" indent="-342900" algn="l">
               <a:spcBef>
                 <a:spcPts val="360"/>
               </a:spcBef>
@@ -4823,7 +4965,9 @@
               <a:defRPr/>
             </a:lvl9pPr>
           </a:lstStyle>
-          <a:p/>
+          <a:p>
+            <a:endParaRPr/>
+          </a:p>
         </p:txBody>
       </p:sp>
       <p:cxnSp>
@@ -4841,14 +4985,14 @@
             <a:avLst/>
           </a:prstGeom>
           <a:noFill/>
-          <a:ln cap="flat" cmpd="sng" w="25400">
+          <a:ln w="25400" cap="flat" cmpd="sng">
             <a:solidFill>
               <a:srgbClr val="7F7F7F"/>
             </a:solidFill>
             <a:prstDash val="solid"/>
             <a:round/>
-            <a:headEnd len="sm" w="sm" type="none"/>
-            <a:tailEnd len="sm" w="sm" type="none"/>
+            <a:headEnd type="none" w="sm" len="sm"/>
+            <a:tailEnd type="none" w="sm" len="sm"/>
           </a:ln>
         </p:spPr>
       </p:cxnSp>
@@ -4862,7 +5006,7 @@
           <a:blip r:embed="rId4">
             <a:alphaModFix amt="20000"/>
           </a:blip>
-          <a:srcRect b="0" l="0" r="0" t="0"/>
+          <a:srcRect/>
           <a:stretch/>
         </p:blipFill>
         <p:spPr>
@@ -4882,9 +5026,11 @@
       <p:sp>
         <p:nvSpPr>
           <p:cNvPr id="60" name="Google Shape;60;p6"/>
-          <p:cNvSpPr txBox="1"/>
+          <p:cNvSpPr txBox="1">
+            <a:spLocks noGrp="1"/>
+          </p:cNvSpPr>
           <p:nvPr>
-            <p:ph idx="2" type="body"/>
+            <p:ph type="body" idx="2"/>
           </p:nvPr>
         </p:nvSpPr>
         <p:spPr>
@@ -4901,11 +5047,11 @@
           </a:ln>
         </p:spPr>
         <p:txBody>
-          <a:bodyPr anchorCtr="0" anchor="t" bIns="45700" lIns="91425" spcFirstLastPara="1" rIns="91425" wrap="square" tIns="45700">
+          <a:bodyPr spcFirstLastPara="1" wrap="square" lIns="91425" tIns="45700" rIns="91425" bIns="45700" anchor="t" anchorCtr="0">
             <a:noAutofit/>
           </a:bodyPr>
           <a:lstStyle>
-            <a:lvl1pPr indent="-336550" lvl="0" marL="457200" algn="l">
+            <a:lvl1pPr marL="457200" lvl="0" indent="-336550" algn="l">
               <a:lnSpc>
                 <a:spcPct val="130000"/>
               </a:lnSpc>
@@ -4919,7 +5065,7 @@
               <a:buChar char="◼"/>
               <a:defRPr sz="1700"/>
             </a:lvl1pPr>
-            <a:lvl2pPr indent="-317500" lvl="1" marL="914400" algn="l">
+            <a:lvl2pPr marL="914400" lvl="1" indent="-317500" algn="l">
               <a:lnSpc>
                 <a:spcPct val="130000"/>
               </a:lnSpc>
@@ -4933,7 +5079,7 @@
               <a:buChar char="▪"/>
               <a:defRPr sz="1400"/>
             </a:lvl2pPr>
-            <a:lvl3pPr indent="-317500" lvl="2" marL="1371600" algn="l">
+            <a:lvl3pPr marL="1371600" lvl="2" indent="-317500" algn="l">
               <a:lnSpc>
                 <a:spcPct val="130000"/>
               </a:lnSpc>
@@ -4947,7 +5093,7 @@
               <a:buChar char="o"/>
               <a:defRPr sz="1400"/>
             </a:lvl3pPr>
-            <a:lvl4pPr indent="-317500" lvl="3" marL="1828800" algn="l">
+            <a:lvl4pPr marL="1828800" lvl="3" indent="-317500" algn="l">
               <a:lnSpc>
                 <a:spcPct val="130000"/>
               </a:lnSpc>
@@ -4961,7 +5107,7 @@
               <a:buChar char="◼"/>
               <a:defRPr sz="1400"/>
             </a:lvl4pPr>
-            <a:lvl5pPr indent="-317500" lvl="4" marL="2286000" algn="l">
+            <a:lvl5pPr marL="2286000" lvl="4" indent="-317500" algn="l">
               <a:lnSpc>
                 <a:spcPct val="130000"/>
               </a:lnSpc>
@@ -4975,7 +5121,7 @@
               <a:buChar char="▪"/>
               <a:defRPr sz="1400"/>
             </a:lvl5pPr>
-            <a:lvl6pPr indent="-342900" lvl="5" marL="2743200" algn="l">
+            <a:lvl6pPr marL="2743200" lvl="5" indent="-342900" algn="l">
               <a:spcBef>
                 <a:spcPts val="360"/>
               </a:spcBef>
@@ -4989,7 +5135,7 @@
               <a:buChar char="•"/>
               <a:defRPr/>
             </a:lvl6pPr>
-            <a:lvl7pPr indent="-342900" lvl="6" marL="3200400" algn="l">
+            <a:lvl7pPr marL="3200400" lvl="6" indent="-342900" algn="l">
               <a:spcBef>
                 <a:spcPts val="360"/>
               </a:spcBef>
@@ -5003,7 +5149,7 @@
               <a:buChar char="•"/>
               <a:defRPr/>
             </a:lvl7pPr>
-            <a:lvl8pPr indent="-342900" lvl="7" marL="3657600" algn="l">
+            <a:lvl8pPr marL="3657600" lvl="7" indent="-342900" algn="l">
               <a:spcBef>
                 <a:spcPts val="360"/>
               </a:spcBef>
@@ -5017,7 +5163,7 @@
               <a:buChar char="•"/>
               <a:defRPr/>
             </a:lvl8pPr>
-            <a:lvl9pPr indent="-342900" lvl="8" marL="4114800" algn="l">
+            <a:lvl9pPr marL="4114800" lvl="8" indent="-342900" algn="l">
               <a:spcBef>
                 <a:spcPts val="360"/>
               </a:spcBef>
@@ -5032,7 +5178,9 @@
               <a:defRPr/>
             </a:lvl9pPr>
           </a:lstStyle>
-          <a:p/>
+          <a:p>
+            <a:endParaRPr/>
+          </a:p>
         </p:txBody>
       </p:sp>
     </p:spTree>
@@ -5044,11 +5192,11 @@
 </file>
 
 <file path=ppt/slideLayouts/slideLayout6.xml><?xml version="1.0" encoding="utf-8"?>
-<p:sldLayout xmlns:a="http://schemas.openxmlformats.org/drawingml/2006/main" xmlns:r="http://schemas.openxmlformats.org/officeDocument/2006/relationships" xmlns:mc="http://schemas.openxmlformats.org/markup-compatibility/2006" xmlns:mv="urn:schemas-microsoft-com:mac:vml" xmlns:p="http://schemas.openxmlformats.org/presentationml/2006/main" xmlns:c="http://schemas.openxmlformats.org/drawingml/2006/chart" xmlns:dgm="http://schemas.openxmlformats.org/drawingml/2006/diagram" xmlns:o="urn:schemas-microsoft-com:office:office" xmlns:v="urn:schemas-microsoft-com:vml" xmlns:pvml="urn:schemas-microsoft-com:office:powerpoint" xmlns:com="http://schemas.openxmlformats.org/drawingml/2006/compatibility" xmlns:p14="http://schemas.microsoft.com/office/powerpoint/2010/main" xmlns:p15="http://schemas.microsoft.com/office/powerpoint/2012/main" xmlns:ahyp="http://schemas.microsoft.com/office/drawing/2018/hyperlinkcolor" matchingName="2_Title and Content">
+<p:sldLayout xmlns:a="http://schemas.openxmlformats.org/drawingml/2006/main" xmlns:r="http://schemas.openxmlformats.org/officeDocument/2006/relationships" xmlns:p="http://schemas.openxmlformats.org/presentationml/2006/main" matchingName="2_Title and Content">
   <p:cSld name="2_Title and Content">
     <p:spTree>
       <p:nvGrpSpPr>
-        <p:cNvPr id="61" name="Shape 61"/>
+        <p:cNvPr id="1" name="Shape 61"/>
         <p:cNvGrpSpPr/>
         <p:nvPr/>
       </p:nvGrpSpPr>
@@ -5067,7 +5215,7 @@
           <p:nvPr/>
         </p:nvSpPr>
         <p:spPr>
-          <a:xfrm flipH="1" rot="10800000">
+          <a:xfrm rot="10800000" flipH="1">
             <a:off x="474664" y="1027113"/>
             <a:ext cx="8383587" cy="61912"/>
           </a:xfrm>
@@ -5084,12 +5232,12 @@
           </a:ln>
         </p:spPr>
         <p:txBody>
-          <a:bodyPr anchorCtr="0" anchor="ctr" bIns="45700" lIns="91425" spcFirstLastPara="1" rIns="91425" wrap="square" tIns="45700">
+          <a:bodyPr spcFirstLastPara="1" wrap="square" lIns="91425" tIns="45700" rIns="91425" bIns="45700" anchor="ctr" anchorCtr="0">
             <a:noAutofit/>
           </a:bodyPr>
           <a:lstStyle/>
           <a:p>
-            <a:pPr indent="0" lvl="0" marL="0" marR="0" rtl="0" algn="ctr">
+            <a:pPr marL="0" marR="0" lvl="0" indent="0" algn="ctr" rtl="0">
               <a:spcBef>
                 <a:spcPts val="0"/>
               </a:spcBef>
@@ -5098,10 +5246,7 @@
               </a:spcAft>
               <a:buNone/>
             </a:pPr>
-            <a:r>
-              <a:t/>
-            </a:r>
-            <a:endParaRPr b="0" i="0" sz="1800" u="none" cap="none" strike="noStrike">
+            <a:endParaRPr sz="1800" b="0" i="0" u="none" strike="noStrike" cap="none">
               <a:solidFill>
                 <a:srgbClr val="FFFFFF"/>
               </a:solidFill>
@@ -5116,9 +5261,11 @@
       <p:sp>
         <p:nvSpPr>
           <p:cNvPr id="63" name="Google Shape;63;p7"/>
-          <p:cNvSpPr txBox="1"/>
+          <p:cNvSpPr txBox="1">
+            <a:spLocks noGrp="1"/>
+          </p:cNvSpPr>
           <p:nvPr>
-            <p:ph idx="1" type="body"/>
+            <p:ph type="body" idx="1"/>
           </p:nvPr>
         </p:nvSpPr>
         <p:spPr>
@@ -5135,11 +5282,11 @@
           </a:ln>
         </p:spPr>
         <p:txBody>
-          <a:bodyPr anchorCtr="0" anchor="ctr" bIns="45700" lIns="91425" spcFirstLastPara="1" rIns="91425" wrap="square" tIns="45700">
+          <a:bodyPr spcFirstLastPara="1" wrap="square" lIns="91425" tIns="45700" rIns="91425" bIns="45700" anchor="ctr" anchorCtr="0">
             <a:noAutofit/>
           </a:bodyPr>
           <a:lstStyle>
-            <a:lvl1pPr indent="-381000" lvl="0" marL="457200" algn="l">
+            <a:lvl1pPr marL="457200" lvl="0" indent="-381000" algn="l">
               <a:lnSpc>
                 <a:spcPct val="130000"/>
               </a:lnSpc>
@@ -5154,7 +5301,7 @@
               <a:buAutoNum type="romanUcPeriod"/>
               <a:defRPr sz="2400"/>
             </a:lvl1pPr>
-            <a:lvl2pPr indent="-355600" lvl="1" marL="914400" algn="l">
+            <a:lvl2pPr marL="914400" lvl="1" indent="-355600" algn="l">
               <a:lnSpc>
                 <a:spcPct val="130000"/>
               </a:lnSpc>
@@ -5169,7 +5316,7 @@
               <a:buAutoNum type="romanUcPeriod"/>
               <a:defRPr sz="2000"/>
             </a:lvl2pPr>
-            <a:lvl3pPr indent="-342900" lvl="2" marL="1371600" algn="l">
+            <a:lvl3pPr marL="1371600" lvl="2" indent="-342900" algn="l">
               <a:lnSpc>
                 <a:spcPct val="130000"/>
               </a:lnSpc>
@@ -5184,7 +5331,7 @@
               <a:buAutoNum type="romanUcPeriod"/>
               <a:defRPr sz="1800"/>
             </a:lvl3pPr>
-            <a:lvl4pPr indent="-330200" lvl="3" marL="1828800" algn="l">
+            <a:lvl4pPr marL="1828800" lvl="3" indent="-330200" algn="l">
               <a:lnSpc>
                 <a:spcPct val="130000"/>
               </a:lnSpc>
@@ -5199,7 +5346,7 @@
               <a:buAutoNum type="romanUcPeriod"/>
               <a:defRPr sz="1600"/>
             </a:lvl4pPr>
-            <a:lvl5pPr indent="-317500" lvl="4" marL="2286000" algn="l">
+            <a:lvl5pPr marL="2286000" lvl="4" indent="-317500" algn="l">
               <a:lnSpc>
                 <a:spcPct val="130000"/>
               </a:lnSpc>
@@ -5214,7 +5361,7 @@
               <a:buAutoNum type="romanUcPeriod"/>
               <a:defRPr sz="1400"/>
             </a:lvl5pPr>
-            <a:lvl6pPr indent="-342900" lvl="5" marL="2743200" algn="l">
+            <a:lvl6pPr marL="2743200" lvl="5" indent="-342900" algn="l">
               <a:spcBef>
                 <a:spcPts val="600"/>
               </a:spcBef>
@@ -5228,7 +5375,7 @@
               <a:buChar char="•"/>
               <a:defRPr/>
             </a:lvl6pPr>
-            <a:lvl7pPr indent="-342900" lvl="6" marL="3200400" algn="l">
+            <a:lvl7pPr marL="3200400" lvl="6" indent="-342900" algn="l">
               <a:spcBef>
                 <a:spcPts val="360"/>
               </a:spcBef>
@@ -5242,7 +5389,7 @@
               <a:buChar char="•"/>
               <a:defRPr/>
             </a:lvl7pPr>
-            <a:lvl8pPr indent="-342900" lvl="7" marL="3657600" algn="l">
+            <a:lvl8pPr marL="3657600" lvl="7" indent="-342900" algn="l">
               <a:spcBef>
                 <a:spcPts val="360"/>
               </a:spcBef>
@@ -5256,7 +5403,7 @@
               <a:buChar char="•"/>
               <a:defRPr/>
             </a:lvl8pPr>
-            <a:lvl9pPr indent="-342900" lvl="8" marL="4114800" algn="l">
+            <a:lvl9pPr marL="4114800" lvl="8" indent="-342900" algn="l">
               <a:spcBef>
                 <a:spcPts val="360"/>
               </a:spcBef>
@@ -5271,7 +5418,9 @@
               <a:defRPr/>
             </a:lvl9pPr>
           </a:lstStyle>
-          <a:p/>
+          <a:p>
+            <a:endParaRPr/>
+          </a:p>
         </p:txBody>
       </p:sp>
       <p:pic>
@@ -5284,7 +5433,7 @@
           <a:blip r:embed="rId2">
             <a:alphaModFix amt="20000"/>
           </a:blip>
-          <a:srcRect b="0" l="0" r="0" t="0"/>
+          <a:srcRect/>
           <a:stretch/>
         </p:blipFill>
         <p:spPr>
@@ -5311,7 +5460,7 @@
           <a:blip r:embed="rId3">
             <a:alphaModFix amt="20000"/>
           </a:blip>
-          <a:srcRect b="0" l="0" r="0" t="0"/>
+          <a:srcRect/>
           <a:stretch/>
         </p:blipFill>
         <p:spPr>
@@ -5338,7 +5487,7 @@
           <a:blip r:embed="rId4">
             <a:alphaModFix/>
           </a:blip>
-          <a:srcRect b="0" l="0" r="0" t="0"/>
+          <a:srcRect/>
           <a:stretch/>
         </p:blipFill>
         <p:spPr>
@@ -5357,7 +5506,7 @@
       </p:pic>
       <p:pic>
         <p:nvPicPr>
-          <p:cNvPr descr="Imatge que conté Font, Gràfics, logotip, blanc&#10;&#10;Descripció generada automàticament" id="67" name="Google Shape;67;p7"/>
+          <p:cNvPr id="67" name="Google Shape;67;p7" descr="Imatge que conté Font, Gràfics, logotip, blanc&#10;&#10;Descripció generada automàticament"/>
           <p:cNvPicPr preferRelativeResize="0"/>
           <p:nvPr/>
         </p:nvPicPr>
@@ -5365,7 +5514,7 @@
           <a:blip r:embed="rId5">
             <a:alphaModFix/>
           </a:blip>
-          <a:srcRect b="0" l="0" r="0" t="0"/>
+          <a:srcRect/>
           <a:stretch/>
         </p:blipFill>
         <p:spPr>
@@ -5385,7 +5534,9 @@
       <p:sp>
         <p:nvSpPr>
           <p:cNvPr id="68" name="Google Shape;68;p7"/>
-          <p:cNvSpPr txBox="1"/>
+          <p:cNvSpPr txBox="1">
+            <a:spLocks noGrp="1"/>
+          </p:cNvSpPr>
           <p:nvPr>
             <p:ph type="title"/>
           </p:nvPr>
@@ -5404,7 +5555,7 @@
           </a:ln>
         </p:spPr>
         <p:txBody>
-          <a:bodyPr anchorCtr="0" anchor="b" bIns="45700" lIns="91425" spcFirstLastPara="1" rIns="91425" wrap="square" tIns="45700">
+          <a:bodyPr spcFirstLastPara="1" wrap="square" lIns="91425" tIns="45700" rIns="91425" bIns="45700" anchor="b" anchorCtr="0">
             <a:noAutofit/>
           </a:bodyPr>
           <a:lstStyle>
@@ -5508,7 +5659,9 @@
               <a:defRPr/>
             </a:lvl9pPr>
           </a:lstStyle>
-          <a:p/>
+          <a:p>
+            <a:endParaRPr/>
+          </a:p>
         </p:txBody>
       </p:sp>
       <p:pic>
@@ -5521,7 +5674,7 @@
           <a:blip r:embed="rId6">
             <a:alphaModFix amt="20000"/>
           </a:blip>
-          <a:srcRect b="0" l="0" r="0" t="0"/>
+          <a:srcRect/>
           <a:stretch/>
         </p:blipFill>
         <p:spPr>
@@ -5547,18 +5700,19 @@
 </file>
 
 <file path=ppt/slideMasters/slideMaster1.xml><?xml version="1.0" encoding="utf-8"?>
-<p:sldMaster xmlns:a="http://schemas.openxmlformats.org/drawingml/2006/main" xmlns:r="http://schemas.openxmlformats.org/officeDocument/2006/relationships" xmlns:mc="http://schemas.openxmlformats.org/markup-compatibility/2006" xmlns:mv="urn:schemas-microsoft-com:mac:vml" xmlns:p="http://schemas.openxmlformats.org/presentationml/2006/main" xmlns:c="http://schemas.openxmlformats.org/drawingml/2006/chart" xmlns:dgm="http://schemas.openxmlformats.org/drawingml/2006/diagram" xmlns:o="urn:schemas-microsoft-com:office:office" xmlns:v="urn:schemas-microsoft-com:vml" xmlns:pvml="urn:schemas-microsoft-com:office:powerpoint" xmlns:com="http://schemas.openxmlformats.org/drawingml/2006/compatibility" xmlns:p14="http://schemas.microsoft.com/office/powerpoint/2010/main" xmlns:p15="http://schemas.microsoft.com/office/powerpoint/2012/main" xmlns:ahyp="http://schemas.microsoft.com/office/drawing/2018/hyperlinkcolor">
+<p:sldMaster xmlns:a="http://schemas.openxmlformats.org/drawingml/2006/main" xmlns:r="http://schemas.openxmlformats.org/officeDocument/2006/relationships" xmlns:p="http://schemas.openxmlformats.org/presentationml/2006/main">
   <p:cSld>
     <p:bg>
       <p:bgPr>
         <a:solidFill>
           <a:schemeClr val="lt1"/>
         </a:solidFill>
+        <a:effectLst/>
       </p:bgPr>
     </p:bg>
     <p:spTree>
       <p:nvGrpSpPr>
-        <p:cNvPr id="9" name="Shape 9"/>
+        <p:cNvPr id="1" name="Shape 9"/>
         <p:cNvGrpSpPr/>
         <p:nvPr/>
       </p:nvGrpSpPr>
@@ -5573,7 +5727,9 @@
       <p:sp>
         <p:nvSpPr>
           <p:cNvPr id="10" name="Google Shape;10;p1"/>
-          <p:cNvSpPr txBox="1"/>
+          <p:cNvSpPr txBox="1">
+            <a:spLocks noGrp="1"/>
+          </p:cNvSpPr>
           <p:nvPr>
             <p:ph type="title"/>
           </p:nvPr>
@@ -5592,20 +5748,20 @@
           </a:ln>
         </p:spPr>
         <p:txBody>
-          <a:bodyPr anchorCtr="0" anchor="b" bIns="45700" lIns="91425" spcFirstLastPara="1" rIns="91425" wrap="square" tIns="45700">
+          <a:bodyPr spcFirstLastPara="1" wrap="square" lIns="91425" tIns="45700" rIns="91425" bIns="45700" anchor="b" anchorCtr="0">
             <a:noAutofit/>
           </a:bodyPr>
           <a:lstStyle>
-            <a:lvl1pPr lvl="0" marR="0" rtl="0" algn="l">
-              <a:spcBef>
-                <a:spcPts val="0"/>
-              </a:spcBef>
-              <a:spcAft>
-                <a:spcPts val="0"/>
-              </a:spcAft>
-              <a:buSzPts val="1400"/>
-              <a:buNone/>
-              <a:defRPr b="0" i="0" sz="2800" u="none" cap="none" strike="noStrike">
+            <a:lvl1pPr marR="0" lvl="0" algn="l" rtl="0">
+              <a:spcBef>
+                <a:spcPts val="0"/>
+              </a:spcBef>
+              <a:spcAft>
+                <a:spcPts val="0"/>
+              </a:spcAft>
+              <a:buSzPts val="1400"/>
+              <a:buNone/>
+              <a:defRPr sz="2800" b="0" i="0" u="none" strike="noStrike" cap="none">
                 <a:solidFill>
                   <a:srgbClr val="7030A0"/>
                 </a:solidFill>
@@ -5615,16 +5771,16 @@
                 <a:sym typeface="Arial"/>
               </a:defRPr>
             </a:lvl1pPr>
-            <a:lvl2pPr lvl="1" marR="0" rtl="0" algn="l">
-              <a:spcBef>
-                <a:spcPts val="0"/>
-              </a:spcBef>
-              <a:spcAft>
-                <a:spcPts val="0"/>
-              </a:spcAft>
-              <a:buSzPts val="1400"/>
-              <a:buNone/>
-              <a:defRPr b="0" i="0" sz="4000" u="none" cap="none" strike="noStrike">
+            <a:lvl2pPr marR="0" lvl="1" algn="l" rtl="0">
+              <a:spcBef>
+                <a:spcPts val="0"/>
+              </a:spcBef>
+              <a:spcAft>
+                <a:spcPts val="0"/>
+              </a:spcAft>
+              <a:buSzPts val="1400"/>
+              <a:buNone/>
+              <a:defRPr sz="4000" b="0" i="0" u="none" strike="noStrike" cap="none">
                 <a:solidFill>
                   <a:schemeClr val="accent1"/>
                 </a:solidFill>
@@ -5634,16 +5790,16 @@
                 <a:sym typeface="Calibri"/>
               </a:defRPr>
             </a:lvl2pPr>
-            <a:lvl3pPr lvl="2" marR="0" rtl="0" algn="l">
-              <a:spcBef>
-                <a:spcPts val="0"/>
-              </a:spcBef>
-              <a:spcAft>
-                <a:spcPts val="0"/>
-              </a:spcAft>
-              <a:buSzPts val="1400"/>
-              <a:buNone/>
-              <a:defRPr b="0" i="0" sz="4000" u="none" cap="none" strike="noStrike">
+            <a:lvl3pPr marR="0" lvl="2" algn="l" rtl="0">
+              <a:spcBef>
+                <a:spcPts val="0"/>
+              </a:spcBef>
+              <a:spcAft>
+                <a:spcPts val="0"/>
+              </a:spcAft>
+              <a:buSzPts val="1400"/>
+              <a:buNone/>
+              <a:defRPr sz="4000" b="0" i="0" u="none" strike="noStrike" cap="none">
                 <a:solidFill>
                   <a:schemeClr val="accent1"/>
                 </a:solidFill>
@@ -5653,16 +5809,16 @@
                 <a:sym typeface="Calibri"/>
               </a:defRPr>
             </a:lvl3pPr>
-            <a:lvl4pPr lvl="3" marR="0" rtl="0" algn="l">
-              <a:spcBef>
-                <a:spcPts val="0"/>
-              </a:spcBef>
-              <a:spcAft>
-                <a:spcPts val="0"/>
-              </a:spcAft>
-              <a:buSzPts val="1400"/>
-              <a:buNone/>
-              <a:defRPr b="0" i="0" sz="4000" u="none" cap="none" strike="noStrike">
+            <a:lvl4pPr marR="0" lvl="3" algn="l" rtl="0">
+              <a:spcBef>
+                <a:spcPts val="0"/>
+              </a:spcBef>
+              <a:spcAft>
+                <a:spcPts val="0"/>
+              </a:spcAft>
+              <a:buSzPts val="1400"/>
+              <a:buNone/>
+              <a:defRPr sz="4000" b="0" i="0" u="none" strike="noStrike" cap="none">
                 <a:solidFill>
                   <a:schemeClr val="accent1"/>
                 </a:solidFill>
@@ -5672,16 +5828,16 @@
                 <a:sym typeface="Calibri"/>
               </a:defRPr>
             </a:lvl4pPr>
-            <a:lvl5pPr lvl="4" marR="0" rtl="0" algn="l">
-              <a:spcBef>
-                <a:spcPts val="0"/>
-              </a:spcBef>
-              <a:spcAft>
-                <a:spcPts val="0"/>
-              </a:spcAft>
-              <a:buSzPts val="1400"/>
-              <a:buNone/>
-              <a:defRPr b="0" i="0" sz="4000" u="none" cap="none" strike="noStrike">
+            <a:lvl5pPr marR="0" lvl="4" algn="l" rtl="0">
+              <a:spcBef>
+                <a:spcPts val="0"/>
+              </a:spcBef>
+              <a:spcAft>
+                <a:spcPts val="0"/>
+              </a:spcAft>
+              <a:buSzPts val="1400"/>
+              <a:buNone/>
+              <a:defRPr sz="4000" b="0" i="0" u="none" strike="noStrike" cap="none">
                 <a:solidFill>
                   <a:schemeClr val="accent1"/>
                 </a:solidFill>
@@ -5691,16 +5847,16 @@
                 <a:sym typeface="Calibri"/>
               </a:defRPr>
             </a:lvl5pPr>
-            <a:lvl6pPr lvl="5" marR="0" rtl="0" algn="l">
-              <a:spcBef>
-                <a:spcPts val="0"/>
-              </a:spcBef>
-              <a:spcAft>
-                <a:spcPts val="0"/>
-              </a:spcAft>
-              <a:buSzPts val="1400"/>
-              <a:buNone/>
-              <a:defRPr b="0" i="0" sz="4000" u="none" cap="none" strike="noStrike">
+            <a:lvl6pPr marR="0" lvl="5" algn="l" rtl="0">
+              <a:spcBef>
+                <a:spcPts val="0"/>
+              </a:spcBef>
+              <a:spcAft>
+                <a:spcPts val="0"/>
+              </a:spcAft>
+              <a:buSzPts val="1400"/>
+              <a:buNone/>
+              <a:defRPr sz="4000" b="0" i="0" u="none" strike="noStrike" cap="none">
                 <a:solidFill>
                   <a:schemeClr val="accent1"/>
                 </a:solidFill>
@@ -5710,16 +5866,16 @@
                 <a:sym typeface="Calibri"/>
               </a:defRPr>
             </a:lvl6pPr>
-            <a:lvl7pPr lvl="6" marR="0" rtl="0" algn="l">
-              <a:spcBef>
-                <a:spcPts val="0"/>
-              </a:spcBef>
-              <a:spcAft>
-                <a:spcPts val="0"/>
-              </a:spcAft>
-              <a:buSzPts val="1400"/>
-              <a:buNone/>
-              <a:defRPr b="0" i="0" sz="4000" u="none" cap="none" strike="noStrike">
+            <a:lvl7pPr marR="0" lvl="6" algn="l" rtl="0">
+              <a:spcBef>
+                <a:spcPts val="0"/>
+              </a:spcBef>
+              <a:spcAft>
+                <a:spcPts val="0"/>
+              </a:spcAft>
+              <a:buSzPts val="1400"/>
+              <a:buNone/>
+              <a:defRPr sz="4000" b="0" i="0" u="none" strike="noStrike" cap="none">
                 <a:solidFill>
                   <a:schemeClr val="accent1"/>
                 </a:solidFill>
@@ -5729,16 +5885,16 @@
                 <a:sym typeface="Calibri"/>
               </a:defRPr>
             </a:lvl7pPr>
-            <a:lvl8pPr lvl="7" marR="0" rtl="0" algn="l">
-              <a:spcBef>
-                <a:spcPts val="0"/>
-              </a:spcBef>
-              <a:spcAft>
-                <a:spcPts val="0"/>
-              </a:spcAft>
-              <a:buSzPts val="1400"/>
-              <a:buNone/>
-              <a:defRPr b="0" i="0" sz="4000" u="none" cap="none" strike="noStrike">
+            <a:lvl8pPr marR="0" lvl="7" algn="l" rtl="0">
+              <a:spcBef>
+                <a:spcPts val="0"/>
+              </a:spcBef>
+              <a:spcAft>
+                <a:spcPts val="0"/>
+              </a:spcAft>
+              <a:buSzPts val="1400"/>
+              <a:buNone/>
+              <a:defRPr sz="4000" b="0" i="0" u="none" strike="noStrike" cap="none">
                 <a:solidFill>
                   <a:schemeClr val="accent1"/>
                 </a:solidFill>
@@ -5748,16 +5904,16 @@
                 <a:sym typeface="Calibri"/>
               </a:defRPr>
             </a:lvl8pPr>
-            <a:lvl9pPr lvl="8" marR="0" rtl="0" algn="l">
-              <a:spcBef>
-                <a:spcPts val="0"/>
-              </a:spcBef>
-              <a:spcAft>
-                <a:spcPts val="0"/>
-              </a:spcAft>
-              <a:buSzPts val="1400"/>
-              <a:buNone/>
-              <a:defRPr b="0" i="0" sz="4000" u="none" cap="none" strike="noStrike">
+            <a:lvl9pPr marR="0" lvl="8" algn="l" rtl="0">
+              <a:spcBef>
+                <a:spcPts val="0"/>
+              </a:spcBef>
+              <a:spcAft>
+                <a:spcPts val="0"/>
+              </a:spcAft>
+              <a:buSzPts val="1400"/>
+              <a:buNone/>
+              <a:defRPr sz="4000" b="0" i="0" u="none" strike="noStrike" cap="none">
                 <a:solidFill>
                   <a:schemeClr val="accent1"/>
                 </a:solidFill>
@@ -5768,15 +5924,19 @@
               </a:defRPr>
             </a:lvl9pPr>
           </a:lstStyle>
-          <a:p/>
+          <a:p>
+            <a:endParaRPr/>
+          </a:p>
         </p:txBody>
       </p:sp>
       <p:sp>
         <p:nvSpPr>
           <p:cNvPr id="11" name="Google Shape;11;p1"/>
-          <p:cNvSpPr txBox="1"/>
+          <p:cNvSpPr txBox="1">
+            <a:spLocks noGrp="1"/>
+          </p:cNvSpPr>
           <p:nvPr>
-            <p:ph idx="1" type="body"/>
+            <p:ph type="body" idx="1"/>
           </p:nvPr>
         </p:nvSpPr>
         <p:spPr>
@@ -5793,11 +5953,11 @@
           </a:ln>
         </p:spPr>
         <p:txBody>
-          <a:bodyPr anchorCtr="0" anchor="t" bIns="45700" lIns="91425" spcFirstLastPara="1" rIns="91425" wrap="square" tIns="45700">
+          <a:bodyPr spcFirstLastPara="1" wrap="square" lIns="91425" tIns="45700" rIns="91425" bIns="45700" anchor="t" anchorCtr="0">
             <a:noAutofit/>
           </a:bodyPr>
           <a:lstStyle>
-            <a:lvl1pPr indent="-355600" lvl="0" marL="457200" marR="0" rtl="0" algn="l">
+            <a:lvl1pPr marL="457200" marR="0" lvl="0" indent="-355600" algn="l" rtl="0">
               <a:lnSpc>
                 <a:spcPct val="130000"/>
               </a:lnSpc>
@@ -5813,7 +5973,7 @@
               <a:buSzPts val="2000"/>
               <a:buFont typeface="Noto Sans Symbols"/>
               <a:buChar char="◼"/>
-              <a:defRPr b="0" i="0" sz="2000" u="none" cap="none" strike="noStrike">
+              <a:defRPr sz="2000" b="0" i="0" u="none" strike="noStrike" cap="none">
                 <a:solidFill>
                   <a:schemeClr val="dk1"/>
                 </a:solidFill>
@@ -5823,7 +5983,7 @@
                 <a:sym typeface="Arial"/>
               </a:defRPr>
             </a:lvl1pPr>
-            <a:lvl2pPr indent="-342900" lvl="1" marL="914400" marR="0" rtl="0" algn="l">
+            <a:lvl2pPr marL="914400" marR="0" lvl="1" indent="-342900" algn="l" rtl="0">
               <a:lnSpc>
                 <a:spcPct val="130000"/>
               </a:lnSpc>
@@ -5839,7 +5999,7 @@
               <a:buSzPts val="1800"/>
               <a:buFont typeface="Noto Sans Symbols"/>
               <a:buChar char="▪"/>
-              <a:defRPr b="0" i="0" sz="1800" u="none" cap="none" strike="noStrike">
+              <a:defRPr sz="1800" b="0" i="0" u="none" strike="noStrike" cap="none">
                 <a:solidFill>
                   <a:schemeClr val="dk2"/>
                 </a:solidFill>
@@ -5849,7 +6009,7 @@
                 <a:sym typeface="Arial"/>
               </a:defRPr>
             </a:lvl2pPr>
-            <a:lvl3pPr indent="-330200" lvl="2" marL="1371600" marR="0" rtl="0" algn="l">
+            <a:lvl3pPr marL="1371600" marR="0" lvl="2" indent="-330200" algn="l" rtl="0">
               <a:lnSpc>
                 <a:spcPct val="130000"/>
               </a:lnSpc>
@@ -5865,7 +6025,7 @@
               <a:buSzPts val="1600"/>
               <a:buFont typeface="Courier New"/>
               <a:buChar char="o"/>
-              <a:defRPr b="0" i="0" sz="1600" u="none" cap="none" strike="noStrike">
+              <a:defRPr sz="1600" b="0" i="0" u="none" strike="noStrike" cap="none">
                 <a:solidFill>
                   <a:schemeClr val="dk2"/>
                 </a:solidFill>
@@ -5875,7 +6035,7 @@
                 <a:sym typeface="Arial"/>
               </a:defRPr>
             </a:lvl3pPr>
-            <a:lvl4pPr indent="-317500" lvl="3" marL="1828800" marR="0" rtl="0" algn="l">
+            <a:lvl4pPr marL="1828800" marR="0" lvl="3" indent="-317500" algn="l" rtl="0">
               <a:lnSpc>
                 <a:spcPct val="130000"/>
               </a:lnSpc>
@@ -5891,7 +6051,7 @@
               <a:buSzPts val="1400"/>
               <a:buFont typeface="Noto Sans Symbols"/>
               <a:buChar char="◼"/>
-              <a:defRPr b="0" i="0" sz="1400" u="none" cap="none" strike="noStrike">
+              <a:defRPr sz="1400" b="0" i="0" u="none" strike="noStrike" cap="none">
                 <a:solidFill>
                   <a:schemeClr val="dk2"/>
                 </a:solidFill>
@@ -5901,7 +6061,7 @@
                 <a:sym typeface="Arial"/>
               </a:defRPr>
             </a:lvl4pPr>
-            <a:lvl5pPr indent="-304800" lvl="4" marL="2286000" marR="0" rtl="0" algn="l">
+            <a:lvl5pPr marL="2286000" marR="0" lvl="4" indent="-304800" algn="l" rtl="0">
               <a:lnSpc>
                 <a:spcPct val="130000"/>
               </a:lnSpc>
@@ -5917,7 +6077,7 @@
               <a:buSzPts val="1200"/>
               <a:buFont typeface="Noto Sans Symbols"/>
               <a:buChar char="▪"/>
-              <a:defRPr b="0" i="0" sz="1200" u="none" cap="none" strike="noStrike">
+              <a:defRPr sz="1200" b="0" i="0" u="none" strike="noStrike" cap="none">
                 <a:solidFill>
                   <a:schemeClr val="dk2"/>
                 </a:solidFill>
@@ -5927,7 +6087,7 @@
                 <a:sym typeface="Arial"/>
               </a:defRPr>
             </a:lvl5pPr>
-            <a:lvl6pPr indent="-355600" lvl="5" marL="2743200" marR="0" rtl="0" algn="l">
+            <a:lvl6pPr marL="2743200" marR="0" lvl="5" indent="-355600" algn="l" rtl="0">
               <a:spcBef>
                 <a:spcPts val="400"/>
               </a:spcBef>
@@ -5940,7 +6100,7 @@
               <a:buSzPts val="2000"/>
               <a:buFont typeface="Arial"/>
               <a:buChar char="•"/>
-              <a:defRPr b="0" i="0" sz="2000" u="none" cap="none" strike="noStrike">
+              <a:defRPr sz="2000" b="0" i="0" u="none" strike="noStrike" cap="none">
                 <a:solidFill>
                   <a:schemeClr val="dk1"/>
                 </a:solidFill>
@@ -5950,7 +6110,7 @@
                 <a:sym typeface="Century Gothic"/>
               </a:defRPr>
             </a:lvl6pPr>
-            <a:lvl7pPr indent="-355600" lvl="6" marL="3200400" marR="0" rtl="0" algn="l">
+            <a:lvl7pPr marL="3200400" marR="0" lvl="6" indent="-355600" algn="l" rtl="0">
               <a:spcBef>
                 <a:spcPts val="400"/>
               </a:spcBef>
@@ -5963,7 +6123,7 @@
               <a:buSzPts val="2000"/>
               <a:buFont typeface="Arial"/>
               <a:buChar char="•"/>
-              <a:defRPr b="0" i="0" sz="2000" u="none" cap="none" strike="noStrike">
+              <a:defRPr sz="2000" b="0" i="0" u="none" strike="noStrike" cap="none">
                 <a:solidFill>
                   <a:schemeClr val="dk1"/>
                 </a:solidFill>
@@ -5973,7 +6133,7 @@
                 <a:sym typeface="Century Gothic"/>
               </a:defRPr>
             </a:lvl7pPr>
-            <a:lvl8pPr indent="-355600" lvl="7" marL="3657600" marR="0" rtl="0" algn="l">
+            <a:lvl8pPr marL="3657600" marR="0" lvl="7" indent="-355600" algn="l" rtl="0">
               <a:spcBef>
                 <a:spcPts val="400"/>
               </a:spcBef>
@@ -5986,7 +6146,7 @@
               <a:buSzPts val="2000"/>
               <a:buFont typeface="Arial"/>
               <a:buChar char="•"/>
-              <a:defRPr b="0" i="0" sz="2000" u="none" cap="none" strike="noStrike">
+              <a:defRPr sz="2000" b="0" i="0" u="none" strike="noStrike" cap="none">
                 <a:solidFill>
                   <a:schemeClr val="dk1"/>
                 </a:solidFill>
@@ -5996,7 +6156,7 @@
                 <a:sym typeface="Century Gothic"/>
               </a:defRPr>
             </a:lvl8pPr>
-            <a:lvl9pPr indent="-355600" lvl="8" marL="4114800" marR="0" rtl="0" algn="l">
+            <a:lvl9pPr marL="4114800" marR="0" lvl="8" indent="-355600" algn="l" rtl="0">
               <a:spcBef>
                 <a:spcPts val="400"/>
               </a:spcBef>
@@ -6009,7 +6169,7 @@
               <a:buSzPts val="2000"/>
               <a:buFont typeface="Arial"/>
               <a:buChar char="•"/>
-              <a:defRPr b="0" i="0" sz="2000" u="none" cap="none" strike="noStrike">
+              <a:defRPr sz="2000" b="0" i="0" u="none" strike="noStrike" cap="none">
                 <a:solidFill>
                   <a:schemeClr val="dk1"/>
                 </a:solidFill>
@@ -6020,7 +6180,9 @@
               </a:defRPr>
             </a:lvl9pPr>
           </a:lstStyle>
-          <a:p/>
+          <a:p>
+            <a:endParaRPr/>
+          </a:p>
         </p:txBody>
       </p:sp>
       <p:sp>
@@ -6043,12 +6205,12 @@
           </a:ln>
         </p:spPr>
         <p:txBody>
-          <a:bodyPr anchorCtr="0" anchor="t" bIns="45700" lIns="91425" spcFirstLastPara="1" rIns="91425" wrap="square" tIns="45700">
+          <a:bodyPr spcFirstLastPara="1" wrap="square" lIns="91425" tIns="45700" rIns="91425" bIns="45700" anchor="t" anchorCtr="0">
             <a:spAutoFit/>
           </a:bodyPr>
           <a:lstStyle/>
           <a:p>
-            <a:pPr indent="0" lvl="0" marL="0" marR="0" rtl="0" algn="r">
+            <a:pPr marL="0" marR="0" lvl="0" indent="0" algn="r" rtl="0">
               <a:spcBef>
                 <a:spcPts val="0"/>
               </a:spcBef>
@@ -6058,7 +6220,7 @@
               <a:buNone/>
             </a:pPr>
             <a:fld id="{00000000-1234-1234-1234-123412341234}" type="slidenum">
-              <a:rPr b="0" i="0" lang="ca-ES" sz="1200" u="none" cap="none" strike="noStrike">
+              <a:rPr lang="ca-ES" sz="1200" b="0" i="0" u="none" strike="noStrike" cap="none">
                 <a:solidFill>
                   <a:srgbClr val="000000"/>
                 </a:solidFill>
@@ -6069,7 +6231,7 @@
               </a:rPr>
               <a:t>‹#›</a:t>
             </a:fld>
-            <a:endParaRPr b="0" i="0" sz="1200" u="none" cap="none" strike="noStrike">
+            <a:endParaRPr sz="1200" b="0" i="0" u="none" strike="noStrike" cap="none">
               <a:solidFill>
                 <a:srgbClr val="000000"/>
               </a:solidFill>
@@ -6083,7 +6245,7 @@
       </p:sp>
     </p:spTree>
   </p:cSld>
-  <p:clrMap accent1="accent1" accent2="accent2" accent3="accent3" accent4="accent4" accent5="accent5" accent6="accent6" bg1="lt1" bg2="dk2" tx1="dk1" tx2="lt2" folHlink="folHlink" hlink="hlink"/>
+  <p:clrMap bg1="lt1" tx1="dk1" bg2="dk2" tx2="lt2" accent1="accent1" accent2="accent2" accent3="accent3" accent4="accent4" accent5="accent5" accent6="accent6" hlink="hlink" folHlink="folHlink"/>
   <p:sldLayoutIdLst>
     <p:sldLayoutId id="2147483648" r:id="rId1"/>
     <p:sldLayoutId id="2147483649" r:id="rId2"/>
@@ -6092,10 +6254,10 @@
     <p:sldLayoutId id="2147483652" r:id="rId5"/>
     <p:sldLayoutId id="2147483653" r:id="rId6"/>
   </p:sldLayoutIdLst>
-  <p:hf dt="0" ftr="0" hdr="0" sldNum="0"/>
+  <p:hf sldNum="0" hdr="0" ftr="0" dt="0"/>
   <p:txStyles>
     <p:titleStyle>
-      <a:defPPr lvl="0" marR="0" rtl="0" algn="l">
+      <a:defPPr marR="0" lvl="0" algn="l" rtl="0">
         <a:lnSpc>
           <a:spcPct val="100000"/>
         </a:lnSpc>
@@ -6106,7 +6268,7 @@
           <a:spcPts val="0"/>
         </a:spcAft>
       </a:defPPr>
-      <a:lvl1pPr lvl="0" marR="0" rtl="0" algn="l">
+      <a:lvl1pPr marR="0" lvl="0" algn="l" rtl="0">
         <a:lnSpc>
           <a:spcPct val="100000"/>
         </a:lnSpc>
@@ -6120,7 +6282,7 @@
           <a:srgbClr val="000000"/>
         </a:buClr>
         <a:buFont typeface="Arial"/>
-        <a:defRPr b="0" i="0" sz="1400" u="none" cap="none" strike="noStrike">
+        <a:defRPr sz="1400" b="0" i="0" u="none" strike="noStrike" cap="none">
           <a:solidFill>
             <a:srgbClr val="000000"/>
           </a:solidFill>
@@ -6130,7 +6292,7 @@
           <a:sym typeface="Arial"/>
         </a:defRPr>
       </a:lvl1pPr>
-      <a:lvl2pPr lvl="1" marR="0" rtl="0" algn="l">
+      <a:lvl2pPr marR="0" lvl="1" algn="l" rtl="0">
         <a:lnSpc>
           <a:spcPct val="100000"/>
         </a:lnSpc>
@@ -6144,7 +6306,7 @@
           <a:srgbClr val="000000"/>
         </a:buClr>
         <a:buFont typeface="Arial"/>
-        <a:defRPr b="0" i="0" sz="1400" u="none" cap="none" strike="noStrike">
+        <a:defRPr sz="1400" b="0" i="0" u="none" strike="noStrike" cap="none">
           <a:solidFill>
             <a:srgbClr val="000000"/>
           </a:solidFill>
@@ -6154,7 +6316,7 @@
           <a:sym typeface="Arial"/>
         </a:defRPr>
       </a:lvl2pPr>
-      <a:lvl3pPr lvl="2" marR="0" rtl="0" algn="l">
+      <a:lvl3pPr marR="0" lvl="2" algn="l" rtl="0">
         <a:lnSpc>
           <a:spcPct val="100000"/>
         </a:lnSpc>
@@ -6168,7 +6330,7 @@
           <a:srgbClr val="000000"/>
         </a:buClr>
         <a:buFont typeface="Arial"/>
-        <a:defRPr b="0" i="0" sz="1400" u="none" cap="none" strike="noStrike">
+        <a:defRPr sz="1400" b="0" i="0" u="none" strike="noStrike" cap="none">
           <a:solidFill>
             <a:srgbClr val="000000"/>
           </a:solidFill>
@@ -6178,7 +6340,7 @@
           <a:sym typeface="Arial"/>
         </a:defRPr>
       </a:lvl3pPr>
-      <a:lvl4pPr lvl="3" marR="0" rtl="0" algn="l">
+      <a:lvl4pPr marR="0" lvl="3" algn="l" rtl="0">
         <a:lnSpc>
           <a:spcPct val="100000"/>
         </a:lnSpc>
@@ -6192,7 +6354,7 @@
           <a:srgbClr val="000000"/>
         </a:buClr>
         <a:buFont typeface="Arial"/>
-        <a:defRPr b="0" i="0" sz="1400" u="none" cap="none" strike="noStrike">
+        <a:defRPr sz="1400" b="0" i="0" u="none" strike="noStrike" cap="none">
           <a:solidFill>
             <a:srgbClr val="000000"/>
           </a:solidFill>
@@ -6202,7 +6364,7 @@
           <a:sym typeface="Arial"/>
         </a:defRPr>
       </a:lvl4pPr>
-      <a:lvl5pPr lvl="4" marR="0" rtl="0" algn="l">
+      <a:lvl5pPr marR="0" lvl="4" algn="l" rtl="0">
         <a:lnSpc>
           <a:spcPct val="100000"/>
         </a:lnSpc>
@@ -6216,7 +6378,7 @@
           <a:srgbClr val="000000"/>
         </a:buClr>
         <a:buFont typeface="Arial"/>
-        <a:defRPr b="0" i="0" sz="1400" u="none" cap="none" strike="noStrike">
+        <a:defRPr sz="1400" b="0" i="0" u="none" strike="noStrike" cap="none">
           <a:solidFill>
             <a:srgbClr val="000000"/>
           </a:solidFill>
@@ -6226,7 +6388,7 @@
           <a:sym typeface="Arial"/>
         </a:defRPr>
       </a:lvl5pPr>
-      <a:lvl6pPr lvl="5" marR="0" rtl="0" algn="l">
+      <a:lvl6pPr marR="0" lvl="5" algn="l" rtl="0">
         <a:lnSpc>
           <a:spcPct val="100000"/>
         </a:lnSpc>
@@ -6240,7 +6402,7 @@
           <a:srgbClr val="000000"/>
         </a:buClr>
         <a:buFont typeface="Arial"/>
-        <a:defRPr b="0" i="0" sz="1400" u="none" cap="none" strike="noStrike">
+        <a:defRPr sz="1400" b="0" i="0" u="none" strike="noStrike" cap="none">
           <a:solidFill>
             <a:srgbClr val="000000"/>
           </a:solidFill>
@@ -6250,7 +6412,7 @@
           <a:sym typeface="Arial"/>
         </a:defRPr>
       </a:lvl6pPr>
-      <a:lvl7pPr lvl="6" marR="0" rtl="0" algn="l">
+      <a:lvl7pPr marR="0" lvl="6" algn="l" rtl="0">
         <a:lnSpc>
           <a:spcPct val="100000"/>
         </a:lnSpc>
@@ -6264,7 +6426,7 @@
           <a:srgbClr val="000000"/>
         </a:buClr>
         <a:buFont typeface="Arial"/>
-        <a:defRPr b="0" i="0" sz="1400" u="none" cap="none" strike="noStrike">
+        <a:defRPr sz="1400" b="0" i="0" u="none" strike="noStrike" cap="none">
           <a:solidFill>
             <a:srgbClr val="000000"/>
           </a:solidFill>
@@ -6274,7 +6436,7 @@
           <a:sym typeface="Arial"/>
         </a:defRPr>
       </a:lvl7pPr>
-      <a:lvl8pPr lvl="7" marR="0" rtl="0" algn="l">
+      <a:lvl8pPr marR="0" lvl="7" algn="l" rtl="0">
         <a:lnSpc>
           <a:spcPct val="100000"/>
         </a:lnSpc>
@@ -6288,7 +6450,7 @@
           <a:srgbClr val="000000"/>
         </a:buClr>
         <a:buFont typeface="Arial"/>
-        <a:defRPr b="0" i="0" sz="1400" u="none" cap="none" strike="noStrike">
+        <a:defRPr sz="1400" b="0" i="0" u="none" strike="noStrike" cap="none">
           <a:solidFill>
             <a:srgbClr val="000000"/>
           </a:solidFill>
@@ -6298,7 +6460,7 @@
           <a:sym typeface="Arial"/>
         </a:defRPr>
       </a:lvl8pPr>
-      <a:lvl9pPr lvl="8" marR="0" rtl="0" algn="l">
+      <a:lvl9pPr marR="0" lvl="8" algn="l" rtl="0">
         <a:lnSpc>
           <a:spcPct val="100000"/>
         </a:lnSpc>
@@ -6312,7 +6474,7 @@
           <a:srgbClr val="000000"/>
         </a:buClr>
         <a:buFont typeface="Arial"/>
-        <a:defRPr b="0" i="0" sz="1400" u="none" cap="none" strike="noStrike">
+        <a:defRPr sz="1400" b="0" i="0" u="none" strike="noStrike" cap="none">
           <a:solidFill>
             <a:srgbClr val="000000"/>
           </a:solidFill>
@@ -6324,7 +6486,7 @@
       </a:lvl9pPr>
     </p:titleStyle>
     <p:bodyStyle>
-      <a:defPPr lvl="0" marR="0" rtl="0" algn="l">
+      <a:defPPr marR="0" lvl="0" algn="l" rtl="0">
         <a:lnSpc>
           <a:spcPct val="100000"/>
         </a:lnSpc>
@@ -6335,7 +6497,7 @@
           <a:spcPts val="0"/>
         </a:spcAft>
       </a:defPPr>
-      <a:lvl1pPr lvl="0" marR="0" rtl="0" algn="l">
+      <a:lvl1pPr marR="0" lvl="0" algn="l" rtl="0">
         <a:lnSpc>
           <a:spcPct val="100000"/>
         </a:lnSpc>
@@ -6349,7 +6511,7 @@
           <a:srgbClr val="000000"/>
         </a:buClr>
         <a:buFont typeface="Arial"/>
-        <a:defRPr b="0" i="0" sz="1400" u="none" cap="none" strike="noStrike">
+        <a:defRPr sz="1400" b="0" i="0" u="none" strike="noStrike" cap="none">
           <a:solidFill>
             <a:srgbClr val="000000"/>
           </a:solidFill>
@@ -6359,7 +6521,7 @@
           <a:sym typeface="Arial"/>
         </a:defRPr>
       </a:lvl1pPr>
-      <a:lvl2pPr lvl="1" marR="0" rtl="0" algn="l">
+      <a:lvl2pPr marR="0" lvl="1" algn="l" rtl="0">
         <a:lnSpc>
           <a:spcPct val="100000"/>
         </a:lnSpc>
@@ -6373,7 +6535,7 @@
           <a:srgbClr val="000000"/>
         </a:buClr>
         <a:buFont typeface="Arial"/>
-        <a:defRPr b="0" i="0" sz="1400" u="none" cap="none" strike="noStrike">
+        <a:defRPr sz="1400" b="0" i="0" u="none" strike="noStrike" cap="none">
           <a:solidFill>
             <a:srgbClr val="000000"/>
           </a:solidFill>
@@ -6383,7 +6545,7 @@
           <a:sym typeface="Arial"/>
         </a:defRPr>
       </a:lvl2pPr>
-      <a:lvl3pPr lvl="2" marR="0" rtl="0" algn="l">
+      <a:lvl3pPr marR="0" lvl="2" algn="l" rtl="0">
         <a:lnSpc>
           <a:spcPct val="100000"/>
         </a:lnSpc>
@@ -6397,7 +6559,7 @@
           <a:srgbClr val="000000"/>
         </a:buClr>
         <a:buFont typeface="Arial"/>
-        <a:defRPr b="0" i="0" sz="1400" u="none" cap="none" strike="noStrike">
+        <a:defRPr sz="1400" b="0" i="0" u="none" strike="noStrike" cap="none">
           <a:solidFill>
             <a:srgbClr val="000000"/>
           </a:solidFill>
@@ -6407,7 +6569,7 @@
           <a:sym typeface="Arial"/>
         </a:defRPr>
       </a:lvl3pPr>
-      <a:lvl4pPr lvl="3" marR="0" rtl="0" algn="l">
+      <a:lvl4pPr marR="0" lvl="3" algn="l" rtl="0">
         <a:lnSpc>
           <a:spcPct val="100000"/>
         </a:lnSpc>
@@ -6421,7 +6583,7 @@
           <a:srgbClr val="000000"/>
         </a:buClr>
         <a:buFont typeface="Arial"/>
-        <a:defRPr b="0" i="0" sz="1400" u="none" cap="none" strike="noStrike">
+        <a:defRPr sz="1400" b="0" i="0" u="none" strike="noStrike" cap="none">
           <a:solidFill>
             <a:srgbClr val="000000"/>
           </a:solidFill>
@@ -6431,7 +6593,7 @@
           <a:sym typeface="Arial"/>
         </a:defRPr>
       </a:lvl4pPr>
-      <a:lvl5pPr lvl="4" marR="0" rtl="0" algn="l">
+      <a:lvl5pPr marR="0" lvl="4" algn="l" rtl="0">
         <a:lnSpc>
           <a:spcPct val="100000"/>
         </a:lnSpc>
@@ -6445,7 +6607,7 @@
           <a:srgbClr val="000000"/>
         </a:buClr>
         <a:buFont typeface="Arial"/>
-        <a:defRPr b="0" i="0" sz="1400" u="none" cap="none" strike="noStrike">
+        <a:defRPr sz="1400" b="0" i="0" u="none" strike="noStrike" cap="none">
           <a:solidFill>
             <a:srgbClr val="000000"/>
           </a:solidFill>
@@ -6455,7 +6617,7 @@
           <a:sym typeface="Arial"/>
         </a:defRPr>
       </a:lvl5pPr>
-      <a:lvl6pPr lvl="5" marR="0" rtl="0" algn="l">
+      <a:lvl6pPr marR="0" lvl="5" algn="l" rtl="0">
         <a:lnSpc>
           <a:spcPct val="100000"/>
         </a:lnSpc>
@@ -6469,7 +6631,7 @@
           <a:srgbClr val="000000"/>
         </a:buClr>
         <a:buFont typeface="Arial"/>
-        <a:defRPr b="0" i="0" sz="1400" u="none" cap="none" strike="noStrike">
+        <a:defRPr sz="1400" b="0" i="0" u="none" strike="noStrike" cap="none">
           <a:solidFill>
             <a:srgbClr val="000000"/>
           </a:solidFill>
@@ -6479,7 +6641,7 @@
           <a:sym typeface="Arial"/>
         </a:defRPr>
       </a:lvl6pPr>
-      <a:lvl7pPr lvl="6" marR="0" rtl="0" algn="l">
+      <a:lvl7pPr marR="0" lvl="6" algn="l" rtl="0">
         <a:lnSpc>
           <a:spcPct val="100000"/>
         </a:lnSpc>
@@ -6493,7 +6655,7 @@
           <a:srgbClr val="000000"/>
         </a:buClr>
         <a:buFont typeface="Arial"/>
-        <a:defRPr b="0" i="0" sz="1400" u="none" cap="none" strike="noStrike">
+        <a:defRPr sz="1400" b="0" i="0" u="none" strike="noStrike" cap="none">
           <a:solidFill>
             <a:srgbClr val="000000"/>
           </a:solidFill>
@@ -6503,7 +6665,7 @@
           <a:sym typeface="Arial"/>
         </a:defRPr>
       </a:lvl7pPr>
-      <a:lvl8pPr lvl="7" marR="0" rtl="0" algn="l">
+      <a:lvl8pPr marR="0" lvl="7" algn="l" rtl="0">
         <a:lnSpc>
           <a:spcPct val="100000"/>
         </a:lnSpc>
@@ -6517,7 +6679,7 @@
           <a:srgbClr val="000000"/>
         </a:buClr>
         <a:buFont typeface="Arial"/>
-        <a:defRPr b="0" i="0" sz="1400" u="none" cap="none" strike="noStrike">
+        <a:defRPr sz="1400" b="0" i="0" u="none" strike="noStrike" cap="none">
           <a:solidFill>
             <a:srgbClr val="000000"/>
           </a:solidFill>
@@ -6527,7 +6689,7 @@
           <a:sym typeface="Arial"/>
         </a:defRPr>
       </a:lvl8pPr>
-      <a:lvl9pPr lvl="8" marR="0" rtl="0" algn="l">
+      <a:lvl9pPr marR="0" lvl="8" algn="l" rtl="0">
         <a:lnSpc>
           <a:spcPct val="100000"/>
         </a:lnSpc>
@@ -6541,7 +6703,7 @@
           <a:srgbClr val="000000"/>
         </a:buClr>
         <a:buFont typeface="Arial"/>
-        <a:defRPr b="0" i="0" sz="1400" u="none" cap="none" strike="noStrike">
+        <a:defRPr sz="1400" b="0" i="0" u="none" strike="noStrike" cap="none">
           <a:solidFill>
             <a:srgbClr val="000000"/>
           </a:solidFill>
@@ -6553,7 +6715,7 @@
       </a:lvl9pPr>
     </p:bodyStyle>
     <p:otherStyle>
-      <a:defPPr lvl="0" marR="0" rtl="0" algn="l">
+      <a:defPPr marR="0" lvl="0" algn="l" rtl="0">
         <a:lnSpc>
           <a:spcPct val="100000"/>
         </a:lnSpc>
@@ -6564,7 +6726,7 @@
           <a:spcPts val="0"/>
         </a:spcAft>
       </a:defPPr>
-      <a:lvl1pPr lvl="0" marR="0" rtl="0" algn="l">
+      <a:lvl1pPr marR="0" lvl="0" algn="l" rtl="0">
         <a:lnSpc>
           <a:spcPct val="100000"/>
         </a:lnSpc>
@@ -6578,7 +6740,7 @@
           <a:srgbClr val="000000"/>
         </a:buClr>
         <a:buFont typeface="Arial"/>
-        <a:defRPr b="0" i="0" sz="1400" u="none" cap="none" strike="noStrike">
+        <a:defRPr sz="1400" b="0" i="0" u="none" strike="noStrike" cap="none">
           <a:solidFill>
             <a:srgbClr val="000000"/>
           </a:solidFill>
@@ -6588,7 +6750,7 @@
           <a:sym typeface="Arial"/>
         </a:defRPr>
       </a:lvl1pPr>
-      <a:lvl2pPr lvl="1" marR="0" rtl="0" algn="l">
+      <a:lvl2pPr marR="0" lvl="1" algn="l" rtl="0">
         <a:lnSpc>
           <a:spcPct val="100000"/>
         </a:lnSpc>
@@ -6602,7 +6764,7 @@
           <a:srgbClr val="000000"/>
         </a:buClr>
         <a:buFont typeface="Arial"/>
-        <a:defRPr b="0" i="0" sz="1400" u="none" cap="none" strike="noStrike">
+        <a:defRPr sz="1400" b="0" i="0" u="none" strike="noStrike" cap="none">
           <a:solidFill>
             <a:srgbClr val="000000"/>
           </a:solidFill>
@@ -6612,7 +6774,7 @@
           <a:sym typeface="Arial"/>
         </a:defRPr>
       </a:lvl2pPr>
-      <a:lvl3pPr lvl="2" marR="0" rtl="0" algn="l">
+      <a:lvl3pPr marR="0" lvl="2" algn="l" rtl="0">
         <a:lnSpc>
           <a:spcPct val="100000"/>
         </a:lnSpc>
@@ -6626,7 +6788,7 @@
           <a:srgbClr val="000000"/>
         </a:buClr>
         <a:buFont typeface="Arial"/>
-        <a:defRPr b="0" i="0" sz="1400" u="none" cap="none" strike="noStrike">
+        <a:defRPr sz="1400" b="0" i="0" u="none" strike="noStrike" cap="none">
           <a:solidFill>
             <a:srgbClr val="000000"/>
           </a:solidFill>
@@ -6636,7 +6798,7 @@
           <a:sym typeface="Arial"/>
         </a:defRPr>
       </a:lvl3pPr>
-      <a:lvl4pPr lvl="3" marR="0" rtl="0" algn="l">
+      <a:lvl4pPr marR="0" lvl="3" algn="l" rtl="0">
         <a:lnSpc>
           <a:spcPct val="100000"/>
         </a:lnSpc>
@@ -6650,7 +6812,7 @@
           <a:srgbClr val="000000"/>
         </a:buClr>
         <a:buFont typeface="Arial"/>
-        <a:defRPr b="0" i="0" sz="1400" u="none" cap="none" strike="noStrike">
+        <a:defRPr sz="1400" b="0" i="0" u="none" strike="noStrike" cap="none">
           <a:solidFill>
             <a:srgbClr val="000000"/>
           </a:solidFill>
@@ -6660,7 +6822,7 @@
           <a:sym typeface="Arial"/>
         </a:defRPr>
       </a:lvl4pPr>
-      <a:lvl5pPr lvl="4" marR="0" rtl="0" algn="l">
+      <a:lvl5pPr marR="0" lvl="4" algn="l" rtl="0">
         <a:lnSpc>
           <a:spcPct val="100000"/>
         </a:lnSpc>
@@ -6674,7 +6836,7 @@
           <a:srgbClr val="000000"/>
         </a:buClr>
         <a:buFont typeface="Arial"/>
-        <a:defRPr b="0" i="0" sz="1400" u="none" cap="none" strike="noStrike">
+        <a:defRPr sz="1400" b="0" i="0" u="none" strike="noStrike" cap="none">
           <a:solidFill>
             <a:srgbClr val="000000"/>
           </a:solidFill>
@@ -6684,7 +6846,7 @@
           <a:sym typeface="Arial"/>
         </a:defRPr>
       </a:lvl5pPr>
-      <a:lvl6pPr lvl="5" marR="0" rtl="0" algn="l">
+      <a:lvl6pPr marR="0" lvl="5" algn="l" rtl="0">
         <a:lnSpc>
           <a:spcPct val="100000"/>
         </a:lnSpc>
@@ -6698,7 +6860,7 @@
           <a:srgbClr val="000000"/>
         </a:buClr>
         <a:buFont typeface="Arial"/>
-        <a:defRPr b="0" i="0" sz="1400" u="none" cap="none" strike="noStrike">
+        <a:defRPr sz="1400" b="0" i="0" u="none" strike="noStrike" cap="none">
           <a:solidFill>
             <a:srgbClr val="000000"/>
           </a:solidFill>
@@ -6708,7 +6870,7 @@
           <a:sym typeface="Arial"/>
         </a:defRPr>
       </a:lvl6pPr>
-      <a:lvl7pPr lvl="6" marR="0" rtl="0" algn="l">
+      <a:lvl7pPr marR="0" lvl="6" algn="l" rtl="0">
         <a:lnSpc>
           <a:spcPct val="100000"/>
         </a:lnSpc>
@@ -6722,7 +6884,7 @@
           <a:srgbClr val="000000"/>
         </a:buClr>
         <a:buFont typeface="Arial"/>
-        <a:defRPr b="0" i="0" sz="1400" u="none" cap="none" strike="noStrike">
+        <a:defRPr sz="1400" b="0" i="0" u="none" strike="noStrike" cap="none">
           <a:solidFill>
             <a:srgbClr val="000000"/>
           </a:solidFill>
@@ -6732,7 +6894,7 @@
           <a:sym typeface="Arial"/>
         </a:defRPr>
       </a:lvl7pPr>
-      <a:lvl8pPr lvl="7" marR="0" rtl="0" algn="l">
+      <a:lvl8pPr marR="0" lvl="7" algn="l" rtl="0">
         <a:lnSpc>
           <a:spcPct val="100000"/>
         </a:lnSpc>
@@ -6746,7 +6908,7 @@
           <a:srgbClr val="000000"/>
         </a:buClr>
         <a:buFont typeface="Arial"/>
-        <a:defRPr b="0" i="0" sz="1400" u="none" cap="none" strike="noStrike">
+        <a:defRPr sz="1400" b="0" i="0" u="none" strike="noStrike" cap="none">
           <a:solidFill>
             <a:srgbClr val="000000"/>
           </a:solidFill>
@@ -6756,7 +6918,7 @@
           <a:sym typeface="Arial"/>
         </a:defRPr>
       </a:lvl8pPr>
-      <a:lvl9pPr lvl="8" marR="0" rtl="0" algn="l">
+      <a:lvl9pPr marR="0" lvl="8" algn="l" rtl="0">
         <a:lnSpc>
           <a:spcPct val="100000"/>
         </a:lnSpc>
@@ -6770,7 +6932,7 @@
           <a:srgbClr val="000000"/>
         </a:buClr>
         <a:buFont typeface="Arial"/>
-        <a:defRPr b="0" i="0" sz="1400" u="none" cap="none" strike="noStrike">
+        <a:defRPr sz="1400" b="0" i="0" u="none" strike="noStrike" cap="none">
           <a:solidFill>
             <a:srgbClr val="000000"/>
           </a:solidFill>
@@ -6786,11 +6948,11 @@
 </file>
 
 <file path=ppt/slides/slide1.xml><?xml version="1.0" encoding="utf-8"?>
-<p:sld xmlns:a="http://schemas.openxmlformats.org/drawingml/2006/main" xmlns:r="http://schemas.openxmlformats.org/officeDocument/2006/relationships" xmlns:mc="http://schemas.openxmlformats.org/markup-compatibility/2006" xmlns:mv="urn:schemas-microsoft-com:mac:vml" xmlns:p="http://schemas.openxmlformats.org/presentationml/2006/main" xmlns:c="http://schemas.openxmlformats.org/drawingml/2006/chart" xmlns:dgm="http://schemas.openxmlformats.org/drawingml/2006/diagram" xmlns:o="urn:schemas-microsoft-com:office:office" xmlns:v="urn:schemas-microsoft-com:vml" xmlns:pvml="urn:schemas-microsoft-com:office:powerpoint" xmlns:com="http://schemas.openxmlformats.org/drawingml/2006/compatibility" xmlns:p14="http://schemas.microsoft.com/office/powerpoint/2010/main" xmlns:p15="http://schemas.microsoft.com/office/powerpoint/2012/main" xmlns:ahyp="http://schemas.microsoft.com/office/drawing/2018/hyperlinkcolor">
+<p:sld xmlns:a="http://schemas.openxmlformats.org/drawingml/2006/main" xmlns:r="http://schemas.openxmlformats.org/officeDocument/2006/relationships" xmlns:p="http://schemas.openxmlformats.org/presentationml/2006/main">
   <p:cSld>
     <p:spTree>
       <p:nvGrpSpPr>
-        <p:cNvPr id="74" name="Shape 74"/>
+        <p:cNvPr id="1" name="Shape 74"/>
         <p:cNvGrpSpPr/>
         <p:nvPr/>
       </p:nvGrpSpPr>
@@ -6805,7 +6967,9 @@
       <p:sp>
         <p:nvSpPr>
           <p:cNvPr id="75" name="Google Shape;75;p8"/>
-          <p:cNvSpPr txBox="1"/>
+          <p:cNvSpPr txBox="1">
+            <a:spLocks noGrp="1"/>
+          </p:cNvSpPr>
           <p:nvPr>
             <p:ph type="ctrTitle"/>
           </p:nvPr>
@@ -6824,12 +6988,12 @@
           </a:ln>
         </p:spPr>
         <p:txBody>
-          <a:bodyPr anchorCtr="0" anchor="ctr" bIns="45700" lIns="91425" spcFirstLastPara="1" rIns="91425" wrap="square" tIns="45700">
+          <a:bodyPr spcFirstLastPara="1" wrap="square" lIns="91425" tIns="45700" rIns="91425" bIns="45700" anchor="ctr" anchorCtr="0">
             <a:normAutofit/>
           </a:bodyPr>
           <a:lstStyle/>
           <a:p>
-            <a:pPr xmlns:a="http://schemas.openxmlformats.org/drawingml/2006/main" indent="0" lvl="0" marL="0" rtl="0" algn="ctr">
+            <a:pPr marL="0" lvl="0" indent="0" algn="ctr" rtl="0">
               <a:lnSpc>
                 <a:spcPct val="150000"/>
               </a:lnSpc>
@@ -6846,7 +7010,7 @@
               <a:buFont typeface="Arial"/>
               <a:buNone/>
             </a:pPr>
-            <a:r xmlns:a="http://schemas.openxmlformats.org/drawingml/2006/main">
+            <a:r>
               <a:rPr lang="en" sz="3100">
                 <a:latin typeface="Avenir"/>
                 <a:ea typeface="Avenir"/>
@@ -6855,7 +7019,7 @@
               </a:rPr>
               <a:t>How many codes does the _____ padlock support?</a:t>
             </a:r>
-            <a:endParaRPr xmlns:a="http://schemas.openxmlformats.org/drawingml/2006/main" sz="2900">
+            <a:endParaRPr sz="2900">
               <a:latin typeface="Avenir"/>
               <a:ea typeface="Avenir"/>
               <a:cs typeface="Avenir"/>
@@ -6874,7 +7038,7 @@
           <a:blip r:embed="rId3">
             <a:alphaModFix/>
           </a:blip>
-          <a:srcRect b="82560" l="0" r="0" t="0"/>
+          <a:srcRect b="82560"/>
           <a:stretch/>
         </p:blipFill>
         <p:spPr>
@@ -6911,12 +7075,12 @@
           </a:ln>
         </p:spPr>
         <p:txBody>
-          <a:bodyPr anchorCtr="0" anchor="ctr" bIns="45700" lIns="91425" spcFirstLastPara="1" rIns="91425" wrap="square" tIns="45700">
+          <a:bodyPr spcFirstLastPara="1" wrap="square" lIns="91425" tIns="45700" rIns="91425" bIns="45700" anchor="ctr" anchorCtr="0">
             <a:normAutofit/>
           </a:bodyPr>
           <a:lstStyle/>
           <a:p>
-            <a:pPr xmlns:a="http://schemas.openxmlformats.org/drawingml/2006/main" indent="0" lvl="0" marL="0" marR="0" rtl="0" algn="l">
+            <a:pPr marL="0" marR="0" lvl="0" indent="0" algn="l" rtl="0">
               <a:lnSpc>
                 <a:spcPct val="150000"/>
               </a:lnSpc>
@@ -6933,8 +7097,8 @@
               <a:buFont typeface="Arial"/>
               <a:buNone/>
             </a:pPr>
-            <a:r xmlns:a="http://schemas.openxmlformats.org/drawingml/2006/main">
-              <a:rPr b="1" i="0" lang="en" sz="2400" u="none" cap="none" strike="noStrike">
+            <a:r>
+              <a:rPr lang="en" sz="2400" b="1" i="0" u="none" strike="noStrike" cap="none">
                 <a:solidFill>
                   <a:srgbClr val="262626"/>
                 </a:solidFill>
@@ -6945,7 +7109,7 @@
               </a:rPr>
               <a:t>Working group members:</a:t>
             </a:r>
-            <a:endParaRPr xmlns:a="http://schemas.openxmlformats.org/drawingml/2006/main">
+            <a:endParaRPr>
               <a:latin typeface="Avenir"/>
               <a:ea typeface="Avenir"/>
               <a:cs typeface="Avenir"/>
@@ -6953,7 +7117,7 @@
             </a:endParaRPr>
           </a:p>
           <a:p>
-            <a:pPr xmlns:a="http://schemas.openxmlformats.org/drawingml/2006/main" indent="-342900" lvl="0" marL="342900" marR="0" rtl="0" algn="l">
+            <a:pPr marL="342900" marR="0" lvl="0" indent="-342900" algn="l" rtl="0">
               <a:lnSpc>
                 <a:spcPct val="150000"/>
               </a:lnSpc>
@@ -6970,8 +7134,8 @@
               <a:buFont typeface="Avenir"/>
               <a:buChar char="▪"/>
             </a:pPr>
-            <a:r xmlns:a="http://schemas.openxmlformats.org/drawingml/2006/main">
-              <a:rPr i="0" lang="en" sz="2400" u="none" cap="none" strike="noStrike">
+            <a:r>
+              <a:rPr lang="en" sz="2400" i="0" u="none" strike="noStrike" cap="none">
                 <a:solidFill>
                   <a:srgbClr val="262626"/>
                 </a:solidFill>
@@ -6982,7 +7146,7 @@
               </a:rPr>
               <a:t>...</a:t>
             </a:r>
-            <a:endParaRPr xmlns:a="http://schemas.openxmlformats.org/drawingml/2006/main">
+            <a:endParaRPr>
               <a:latin typeface="Avenir"/>
               <a:ea typeface="Avenir"/>
               <a:cs typeface="Avenir"/>
@@ -6990,7 +7154,7 @@
             </a:endParaRPr>
           </a:p>
           <a:p>
-            <a:pPr xmlns:a="http://schemas.openxmlformats.org/drawingml/2006/main" indent="-342900" lvl="0" marL="342900" marR="0" rtl="0" algn="l">
+            <a:pPr marL="342900" marR="0" lvl="0" indent="-342900" algn="l" rtl="0">
               <a:lnSpc>
                 <a:spcPct val="150000"/>
               </a:lnSpc>
@@ -7007,8 +7171,8 @@
               <a:buFont typeface="Avenir"/>
               <a:buChar char="▪"/>
             </a:pPr>
-            <a:r xmlns:a="http://schemas.openxmlformats.org/drawingml/2006/main">
-              <a:rPr i="0" lang="en" sz="2400" u="none" cap="none" strike="noStrike">
+            <a:r>
+              <a:rPr lang="en" sz="2400" i="0" u="none" strike="noStrike" cap="none">
                 <a:solidFill>
                   <a:srgbClr val="262626"/>
                 </a:solidFill>
@@ -7019,7 +7183,7 @@
               </a:rPr>
               <a:t>...</a:t>
             </a:r>
-            <a:endParaRPr xmlns:a="http://schemas.openxmlformats.org/drawingml/2006/main">
+            <a:endParaRPr>
               <a:latin typeface="Avenir"/>
               <a:ea typeface="Avenir"/>
               <a:cs typeface="Avenir"/>
@@ -7027,7 +7191,7 @@
             </a:endParaRPr>
           </a:p>
           <a:p>
-            <a:pPr xmlns:a="http://schemas.openxmlformats.org/drawingml/2006/main" indent="-342900" lvl="0" marL="342900" marR="0" rtl="0" algn="l">
+            <a:pPr marL="342900" marR="0" lvl="0" indent="-342900" algn="l" rtl="0">
               <a:lnSpc>
                 <a:spcPct val="150000"/>
               </a:lnSpc>
@@ -7044,8 +7208,8 @@
               <a:buFont typeface="Avenir"/>
               <a:buChar char="▪"/>
             </a:pPr>
-            <a:r xmlns:a="http://schemas.openxmlformats.org/drawingml/2006/main">
-              <a:rPr i="0" lang="en" sz="2400" u="none" cap="none" strike="noStrike">
+            <a:r>
+              <a:rPr lang="en" sz="2400" i="0" u="none" strike="noStrike" cap="none">
                 <a:solidFill>
                   <a:srgbClr val="262626"/>
                 </a:solidFill>
@@ -7056,7 +7220,7 @@
               </a:rPr>
               <a:t>...</a:t>
             </a:r>
-            <a:endParaRPr xmlns:a="http://schemas.openxmlformats.org/drawingml/2006/main">
+            <a:endParaRPr>
               <a:latin typeface="Avenir"/>
               <a:ea typeface="Avenir"/>
               <a:cs typeface="Avenir"/>
@@ -7064,7 +7228,7 @@
             </a:endParaRPr>
           </a:p>
           <a:p>
-            <a:pPr xmlns:a="http://schemas.openxmlformats.org/drawingml/2006/main" indent="-342900" lvl="0" marL="342900" marR="0" rtl="0" algn="l">
+            <a:pPr marL="342900" marR="0" lvl="0" indent="-342900" algn="l" rtl="0">
               <a:lnSpc>
                 <a:spcPct val="150000"/>
               </a:lnSpc>
@@ -7081,8 +7245,8 @@
               <a:buFont typeface="Avenir"/>
               <a:buChar char="▪"/>
             </a:pPr>
-            <a:r xmlns:a="http://schemas.openxmlformats.org/drawingml/2006/main">
-              <a:rPr i="0" lang="en" sz="2400" u="none" cap="none" strike="noStrike">
+            <a:r>
+              <a:rPr lang="en" sz="2400" i="0" u="none" strike="noStrike" cap="none">
                 <a:solidFill>
                   <a:srgbClr val="262626"/>
                 </a:solidFill>
@@ -7093,7 +7257,7 @@
               </a:rPr>
               <a:t>...</a:t>
             </a:r>
-            <a:endParaRPr xmlns:a="http://schemas.openxmlformats.org/drawingml/2006/main">
+            <a:endParaRPr>
               <a:latin typeface="Avenir"/>
               <a:ea typeface="Avenir"/>
               <a:cs typeface="Avenir"/>
@@ -7102,6 +7266,52 @@
           </a:p>
         </p:txBody>
       </p:sp>
+      <p:pic>
+        <p:nvPicPr>
+          <p:cNvPr id="2" name="Picture 1" descr="A grey square with white text&#10;&#10;AI-generated content may be incorrect.">
+            <a:extLst>
+              <a:ext uri="{FF2B5EF4-FFF2-40B4-BE49-F238E27FC236}">
+                <a16:creationId xmlns:a16="http://schemas.microsoft.com/office/drawing/2014/main" id="{2ADF4236-C311-988C-1EAF-F33444BF8989}"/>
+              </a:ext>
+            </a:extLst>
+          </p:cNvPr>
+          <p:cNvPicPr>
+            <a:picLocks noChangeAspect="1"/>
+          </p:cNvPicPr>
+          <p:nvPr/>
+        </p:nvPicPr>
+        <p:blipFill rotWithShape="1">
+          <a:blip r:embed="rId4">
+            <a:extLst>
+              <a:ext uri="{28A0092B-C50C-407E-A947-70E740481C1C}">
+                <a14:useLocalDpi xmlns:a14="http://schemas.microsoft.com/office/drawing/2010/main" val="0"/>
+              </a:ext>
+            </a:extLst>
+          </a:blip>
+          <a:srcRect r="18171" b="16231"/>
+          <a:stretch>
+            <a:fillRect/>
+          </a:stretch>
+        </p:blipFill>
+        <p:spPr bwMode="auto">
+          <a:xfrm>
+            <a:off x="6652896" y="5860757"/>
+            <a:ext cx="2092960" cy="556895"/>
+          </a:xfrm>
+          <a:prstGeom prst="rect">
+            <a:avLst/>
+          </a:prstGeom>
+          <a:noFill/>
+          <a:ln>
+            <a:noFill/>
+          </a:ln>
+          <a:extLst>
+            <a:ext uri="{53640926-AAD7-44D8-BBD7-CCE9431645EC}">
+              <a14:shadowObscured xmlns:a14="http://schemas.microsoft.com/office/drawing/2010/main"/>
+            </a:ext>
+          </a:extLst>
+        </p:spPr>
+      </p:pic>
     </p:spTree>
   </p:cSld>
   <p:clrMapOvr>
@@ -7111,11 +7321,11 @@
 </file>
 
 <file path=ppt/slides/slide2.xml><?xml version="1.0" encoding="utf-8"?>
-<p:sld xmlns:a="http://schemas.openxmlformats.org/drawingml/2006/main" xmlns:r="http://schemas.openxmlformats.org/officeDocument/2006/relationships" xmlns:mc="http://schemas.openxmlformats.org/markup-compatibility/2006" xmlns:mv="urn:schemas-microsoft-com:mac:vml" xmlns:p="http://schemas.openxmlformats.org/presentationml/2006/main" xmlns:c="http://schemas.openxmlformats.org/drawingml/2006/chart" xmlns:dgm="http://schemas.openxmlformats.org/drawingml/2006/diagram" xmlns:o="urn:schemas-microsoft-com:office:office" xmlns:v="urn:schemas-microsoft-com:vml" xmlns:pvml="urn:schemas-microsoft-com:office:powerpoint" xmlns:com="http://schemas.openxmlformats.org/drawingml/2006/compatibility" xmlns:p14="http://schemas.microsoft.com/office/powerpoint/2010/main" xmlns:p15="http://schemas.microsoft.com/office/powerpoint/2012/main" xmlns:ahyp="http://schemas.microsoft.com/office/drawing/2018/hyperlinkcolor">
+<p:sld xmlns:a="http://schemas.openxmlformats.org/drawingml/2006/main" xmlns:r="http://schemas.openxmlformats.org/officeDocument/2006/relationships" xmlns:p="http://schemas.openxmlformats.org/presentationml/2006/main">
   <p:cSld>
     <p:spTree>
       <p:nvGrpSpPr>
-        <p:cNvPr id="81" name="Shape 81"/>
+        <p:cNvPr id="1" name="Shape 81"/>
         <p:cNvGrpSpPr/>
         <p:nvPr/>
       </p:nvGrpSpPr>
@@ -7130,9 +7340,11 @@
       <p:sp>
         <p:nvSpPr>
           <p:cNvPr id="82" name="Google Shape;82;p9"/>
-          <p:cNvSpPr txBox="1"/>
+          <p:cNvSpPr txBox="1">
+            <a:spLocks noGrp="1"/>
+          </p:cNvSpPr>
           <p:nvPr>
-            <p:ph idx="1" type="body"/>
+            <p:ph type="body" idx="1"/>
           </p:nvPr>
         </p:nvSpPr>
         <p:spPr>
@@ -7149,12 +7361,12 @@
           </a:ln>
         </p:spPr>
         <p:txBody>
-          <a:bodyPr anchorCtr="0" anchor="t" bIns="45700" lIns="91425" spcFirstLastPara="1" rIns="91425" wrap="square" tIns="45700">
+          <a:bodyPr spcFirstLastPara="1" wrap="square" lIns="91425" tIns="45700" rIns="91425" bIns="45700" anchor="t" anchorCtr="0">
             <a:noAutofit/>
           </a:bodyPr>
           <a:lstStyle/>
           <a:p>
-            <a:pPr xmlns:a="http://schemas.openxmlformats.org/drawingml/2006/main" indent="0" lvl="0" marL="0" rtl="0" algn="l">
+            <a:pPr marL="0" lvl="0" indent="0" algn="l" rtl="0">
               <a:lnSpc>
                 <a:spcPct val="130000"/>
               </a:lnSpc>
@@ -7167,8 +7379,8 @@
               <a:buSzPts val="2000"/>
               <a:buNone/>
             </a:pPr>
-            <a:r xmlns:a="http://schemas.openxmlformats.org/drawingml/2006/main">
-              <a:rPr b="1" lang="en">
+            <a:r>
+              <a:rPr lang="en" b="1">
                 <a:latin typeface="Avenir"/>
                 <a:ea typeface="Avenir"/>
                 <a:cs typeface="Avenir"/>
@@ -7176,7 +7388,7 @@
               </a:rPr>
               <a:t>Padlock features</a:t>
             </a:r>
-            <a:endParaRPr xmlns:a="http://schemas.openxmlformats.org/drawingml/2006/main">
+            <a:endParaRPr>
               <a:latin typeface="Avenir"/>
               <a:ea typeface="Avenir"/>
               <a:cs typeface="Avenir"/>
@@ -7184,7 +7396,7 @@
             </a:endParaRPr>
           </a:p>
           <a:p>
-            <a:pPr xmlns:a="http://schemas.openxmlformats.org/drawingml/2006/main" indent="-228600" lvl="0" marL="228600" rtl="0" algn="l">
+            <a:pPr marL="228600" lvl="0" indent="-228600" algn="l" rtl="0">
               <a:lnSpc>
                 <a:spcPct val="130000"/>
               </a:lnSpc>
@@ -7198,7 +7410,7 @@
               <a:buFont typeface="Avenir"/>
               <a:buChar char="◼"/>
             </a:pPr>
-            <a:r xmlns:a="http://schemas.openxmlformats.org/drawingml/2006/main">
+            <a:r>
               <a:rPr lang="en">
                 <a:latin typeface="Avenir"/>
                 <a:ea typeface="Avenir"/>
@@ -7207,7 +7419,7 @@
               </a:rPr>
               <a:t>What are the characteristics of the padlock you are studying?</a:t>
             </a:r>
-            <a:endParaRPr xmlns:a="http://schemas.openxmlformats.org/drawingml/2006/main">
+            <a:endParaRPr>
               <a:latin typeface="Avenir"/>
               <a:ea typeface="Avenir"/>
               <a:cs typeface="Avenir"/>
@@ -7215,7 +7427,7 @@
             </a:endParaRPr>
           </a:p>
           <a:p>
-            <a:pPr xmlns:a="http://schemas.openxmlformats.org/drawingml/2006/main" indent="-101600" lvl="0" marL="228600" rtl="0" algn="l">
+            <a:pPr marL="228600" lvl="0" indent="-101600" algn="l" rtl="0">
               <a:lnSpc>
                 <a:spcPct val="130000"/>
               </a:lnSpc>
@@ -7228,17 +7440,16 @@
               <a:buSzPts val="2000"/>
               <a:buNone/>
             </a:pPr>
-            <a:r xmlns:a="http://schemas.openxmlformats.org/drawingml/2006/main">
-              <a:t/>
-            </a:r>
-            <a:endParaRPr xmlns:a="http://schemas.openxmlformats.org/drawingml/2006/main"/>
+            <a:endParaRPr/>
           </a:p>
         </p:txBody>
       </p:sp>
       <p:sp>
         <p:nvSpPr>
           <p:cNvPr id="83" name="Google Shape;83;p9"/>
-          <p:cNvSpPr txBox="1"/>
+          <p:cNvSpPr txBox="1">
+            <a:spLocks noGrp="1"/>
+          </p:cNvSpPr>
           <p:nvPr>
             <p:ph type="title"/>
           </p:nvPr>
@@ -7257,12 +7468,12 @@
           </a:ln>
         </p:spPr>
         <p:txBody>
-          <a:bodyPr anchorCtr="0" anchor="b" bIns="45700" lIns="91425" spcFirstLastPara="1" rIns="91425" wrap="square" tIns="45700">
+          <a:bodyPr spcFirstLastPara="1" wrap="square" lIns="91425" tIns="45700" rIns="91425" bIns="45700" anchor="b" anchorCtr="0">
             <a:noAutofit/>
           </a:bodyPr>
           <a:lstStyle/>
           <a:p>
-            <a:pPr xmlns:a="http://schemas.openxmlformats.org/drawingml/2006/main" indent="0" lvl="0" marL="0" rtl="0" algn="l">
+            <a:pPr marL="0" lvl="0" indent="0" algn="l" rtl="0">
               <a:spcBef>
                 <a:spcPts val="0"/>
               </a:spcBef>
@@ -7271,7 +7482,7 @@
               </a:spcAft>
               <a:buNone/>
             </a:pPr>
-            <a:r xmlns:a="http://schemas.openxmlformats.org/drawingml/2006/main">
+            <a:r>
               <a:rPr lang="en">
                 <a:latin typeface="Avenir"/>
                 <a:ea typeface="Avenir"/>
@@ -7280,7 +7491,7 @@
               </a:rPr>
               <a:t>How many codes does the padlock we studied support?</a:t>
             </a:r>
-            <a:endParaRPr xmlns:a="http://schemas.openxmlformats.org/drawingml/2006/main">
+            <a:endParaRPr>
               <a:latin typeface="Avenir"/>
               <a:ea typeface="Avenir"/>
               <a:cs typeface="Avenir"/>
@@ -7298,11 +7509,11 @@
 </file>
 
 <file path=ppt/slides/slide3.xml><?xml version="1.0" encoding="utf-8"?>
-<p:sld xmlns:a="http://schemas.openxmlformats.org/drawingml/2006/main" xmlns:r="http://schemas.openxmlformats.org/officeDocument/2006/relationships" xmlns:mc="http://schemas.openxmlformats.org/markup-compatibility/2006" xmlns:mv="urn:schemas-microsoft-com:mac:vml" xmlns:p="http://schemas.openxmlformats.org/presentationml/2006/main" xmlns:c="http://schemas.openxmlformats.org/drawingml/2006/chart" xmlns:dgm="http://schemas.openxmlformats.org/drawingml/2006/diagram" xmlns:o="urn:schemas-microsoft-com:office:office" xmlns:v="urn:schemas-microsoft-com:vml" xmlns:pvml="urn:schemas-microsoft-com:office:powerpoint" xmlns:com="http://schemas.openxmlformats.org/drawingml/2006/compatibility" xmlns:p14="http://schemas.microsoft.com/office/powerpoint/2010/main" xmlns:p15="http://schemas.microsoft.com/office/powerpoint/2012/main" xmlns:ahyp="http://schemas.microsoft.com/office/drawing/2018/hyperlinkcolor">
+<p:sld xmlns:a="http://schemas.openxmlformats.org/drawingml/2006/main" xmlns:r="http://schemas.openxmlformats.org/officeDocument/2006/relationships" xmlns:p="http://schemas.openxmlformats.org/presentationml/2006/main">
   <p:cSld>
     <p:spTree>
       <p:nvGrpSpPr>
-        <p:cNvPr id="87" name="Shape 87"/>
+        <p:cNvPr id="1" name="Shape 87"/>
         <p:cNvGrpSpPr/>
         <p:nvPr/>
       </p:nvGrpSpPr>
@@ -7317,9 +7528,11 @@
       <p:sp>
         <p:nvSpPr>
           <p:cNvPr id="88" name="Google Shape;88;p10"/>
-          <p:cNvSpPr txBox="1"/>
+          <p:cNvSpPr txBox="1">
+            <a:spLocks noGrp="1"/>
+          </p:cNvSpPr>
           <p:nvPr>
-            <p:ph idx="1" type="body"/>
+            <p:ph type="body" idx="1"/>
           </p:nvPr>
         </p:nvSpPr>
         <p:spPr>
@@ -7336,12 +7549,12 @@
           </a:ln>
         </p:spPr>
         <p:txBody>
-          <a:bodyPr anchorCtr="0" anchor="t" bIns="45700" lIns="91425" spcFirstLastPara="1" rIns="91425" wrap="square" tIns="45700">
+          <a:bodyPr spcFirstLastPara="1" wrap="square" lIns="91425" tIns="45700" rIns="91425" bIns="45700" anchor="t" anchorCtr="0">
             <a:noAutofit/>
           </a:bodyPr>
           <a:lstStyle/>
           <a:p>
-            <a:pPr xmlns:a="http://schemas.openxmlformats.org/drawingml/2006/main" indent="0" lvl="0" marL="0" rtl="0" algn="l">
+            <a:pPr marL="0" lvl="0" indent="0" algn="l" rtl="0">
               <a:lnSpc>
                 <a:spcPct val="130000"/>
               </a:lnSpc>
@@ -7354,8 +7567,8 @@
               <a:buSzPts val="2000"/>
               <a:buNone/>
             </a:pPr>
-            <a:r xmlns:a="http://schemas.openxmlformats.org/drawingml/2006/main">
-              <a:rPr b="1" lang="en">
+            <a:r>
+              <a:rPr lang="en" b="1">
                 <a:latin typeface="Avenir"/>
                 <a:ea typeface="Avenir"/>
                 <a:cs typeface="Avenir"/>
@@ -7363,7 +7576,7 @@
               </a:rPr>
               <a:t>Simulation of possible codes</a:t>
             </a:r>
-            <a:endParaRPr xmlns:a="http://schemas.openxmlformats.org/drawingml/2006/main">
+            <a:endParaRPr>
               <a:latin typeface="Avenir"/>
               <a:ea typeface="Avenir"/>
               <a:cs typeface="Avenir"/>
@@ -7371,7 +7584,7 @@
             </a:endParaRPr>
           </a:p>
           <a:p>
-            <a:pPr xmlns:a="http://schemas.openxmlformats.org/drawingml/2006/main" indent="-228600" lvl="0" marL="228600" rtl="0" algn="l">
+            <a:pPr marL="228600" lvl="0" indent="-228600" algn="l" rtl="0">
               <a:lnSpc>
                 <a:spcPct val="130000"/>
               </a:lnSpc>
@@ -7385,7 +7598,7 @@
               <a:buFont typeface="Avenir"/>
               <a:buChar char="◼"/>
             </a:pPr>
-            <a:r xmlns:a="http://schemas.openxmlformats.org/drawingml/2006/main">
+            <a:r>
               <a:rPr lang="en">
                 <a:latin typeface="Avenir"/>
                 <a:ea typeface="Avenir"/>
@@ -7394,7 +7607,7 @@
               </a:rPr>
               <a:t>How to generate the list (even if it is partial) of possible codes that the padlock supports? </a:t>
             </a:r>
-            <a:r xmlns:a="http://schemas.openxmlformats.org/drawingml/2006/main">
+            <a:r>
               <a:rPr lang="en">
                 <a:solidFill>
                   <a:srgbClr val="7F7F7F"/>
@@ -7406,7 +7619,7 @@
               </a:rPr>
               <a:t>Add photos of how you have prepared the lists with the codes.</a:t>
             </a:r>
-            <a:endParaRPr xmlns:a="http://schemas.openxmlformats.org/drawingml/2006/main">
+            <a:endParaRPr>
               <a:latin typeface="Avenir"/>
               <a:ea typeface="Avenir"/>
               <a:cs typeface="Avenir"/>
@@ -7414,7 +7627,7 @@
             </a:endParaRPr>
           </a:p>
           <a:p>
-            <a:pPr xmlns:a="http://schemas.openxmlformats.org/drawingml/2006/main" indent="-228600" lvl="0" marL="228600" rtl="0" algn="l">
+            <a:pPr marL="228600" lvl="0" indent="-228600" algn="l" rtl="0">
               <a:lnSpc>
                 <a:spcPct val="130000"/>
               </a:lnSpc>
@@ -7428,7 +7641,7 @@
               <a:buFont typeface="Avenir"/>
               <a:buChar char="◼"/>
             </a:pPr>
-            <a:r xmlns:a="http://schemas.openxmlformats.org/drawingml/2006/main">
+            <a:r>
               <a:rPr lang="en">
                 <a:latin typeface="Avenir"/>
                 <a:ea typeface="Avenir"/>
@@ -7437,7 +7650,7 @@
               </a:rPr>
               <a:t>What is the total number of codes that your padlock supports?</a:t>
             </a:r>
-            <a:endParaRPr xmlns:a="http://schemas.openxmlformats.org/drawingml/2006/main">
+            <a:endParaRPr>
               <a:latin typeface="Avenir"/>
               <a:ea typeface="Avenir"/>
               <a:cs typeface="Avenir"/>
@@ -7445,7 +7658,7 @@
             </a:endParaRPr>
           </a:p>
           <a:p>
-            <a:pPr xmlns:a="http://schemas.openxmlformats.org/drawingml/2006/main" indent="-101600" lvl="0" marL="228600" rtl="0" algn="l">
+            <a:pPr marL="228600" lvl="0" indent="-101600" algn="l" rtl="0">
               <a:lnSpc>
                 <a:spcPct val="130000"/>
               </a:lnSpc>
@@ -7458,13 +7671,10 @@
               <a:buSzPts val="2000"/>
               <a:buNone/>
             </a:pPr>
-            <a:r xmlns:a="http://schemas.openxmlformats.org/drawingml/2006/main">
-              <a:t/>
-            </a:r>
-            <a:endParaRPr xmlns:a="http://schemas.openxmlformats.org/drawingml/2006/main"/>
+            <a:endParaRPr/>
           </a:p>
           <a:p>
-            <a:pPr xmlns:a="http://schemas.openxmlformats.org/drawingml/2006/main" indent="-101600" lvl="0" marL="228600" rtl="0" algn="l">
+            <a:pPr marL="228600" lvl="0" indent="-101600" algn="l" rtl="0">
               <a:lnSpc>
                 <a:spcPct val="130000"/>
               </a:lnSpc>
@@ -7477,17 +7687,16 @@
               <a:buSzPts val="2000"/>
               <a:buNone/>
             </a:pPr>
-            <a:r xmlns:a="http://schemas.openxmlformats.org/drawingml/2006/main">
-              <a:t/>
-            </a:r>
-            <a:endParaRPr xmlns:a="http://schemas.openxmlformats.org/drawingml/2006/main"/>
+            <a:endParaRPr/>
           </a:p>
         </p:txBody>
       </p:sp>
       <p:sp>
         <p:nvSpPr>
           <p:cNvPr id="89" name="Google Shape;89;p10"/>
-          <p:cNvSpPr txBox="1"/>
+          <p:cNvSpPr txBox="1">
+            <a:spLocks noGrp="1"/>
+          </p:cNvSpPr>
           <p:nvPr>
             <p:ph type="title"/>
           </p:nvPr>
@@ -7506,12 +7715,12 @@
           </a:ln>
         </p:spPr>
         <p:txBody>
-          <a:bodyPr anchorCtr="0" anchor="b" bIns="45700" lIns="91425" spcFirstLastPara="1" rIns="91425" wrap="square" tIns="45700">
+          <a:bodyPr spcFirstLastPara="1" wrap="square" lIns="91425" tIns="45700" rIns="91425" bIns="45700" anchor="b" anchorCtr="0">
             <a:noAutofit/>
           </a:bodyPr>
           <a:lstStyle/>
           <a:p>
-            <a:pPr xmlns:a="http://schemas.openxmlformats.org/drawingml/2006/main" indent="0" lvl="0" marL="0" rtl="0" algn="l">
+            <a:pPr marL="0" lvl="0" indent="0" algn="l" rtl="0">
               <a:spcBef>
                 <a:spcPts val="0"/>
               </a:spcBef>
@@ -7520,7 +7729,7 @@
               </a:spcAft>
               <a:buNone/>
             </a:pPr>
-            <a:r xmlns:a="http://schemas.openxmlformats.org/drawingml/2006/main">
+            <a:r>
               <a:rPr lang="en">
                 <a:latin typeface="Avenir"/>
                 <a:ea typeface="Avenir"/>
@@ -7529,7 +7738,7 @@
               </a:rPr>
               <a:t>How many codes does the padlock we studied support?</a:t>
             </a:r>
-            <a:endParaRPr xmlns:a="http://schemas.openxmlformats.org/drawingml/2006/main">
+            <a:endParaRPr>
               <a:latin typeface="Avenir"/>
               <a:ea typeface="Avenir"/>
               <a:cs typeface="Avenir"/>
@@ -7547,11 +7756,11 @@
 </file>
 
 <file path=ppt/slides/slide4.xml><?xml version="1.0" encoding="utf-8"?>
-<p:sld xmlns:a="http://schemas.openxmlformats.org/drawingml/2006/main" xmlns:r="http://schemas.openxmlformats.org/officeDocument/2006/relationships" xmlns:mc="http://schemas.openxmlformats.org/markup-compatibility/2006" xmlns:mv="urn:schemas-microsoft-com:mac:vml" xmlns:p="http://schemas.openxmlformats.org/presentationml/2006/main" xmlns:c="http://schemas.openxmlformats.org/drawingml/2006/chart" xmlns:dgm="http://schemas.openxmlformats.org/drawingml/2006/diagram" xmlns:o="urn:schemas-microsoft-com:office:office" xmlns:v="urn:schemas-microsoft-com:vml" xmlns:pvml="urn:schemas-microsoft-com:office:powerpoint" xmlns:com="http://schemas.openxmlformats.org/drawingml/2006/compatibility" xmlns:p14="http://schemas.microsoft.com/office/powerpoint/2010/main" xmlns:p15="http://schemas.microsoft.com/office/powerpoint/2012/main" xmlns:ahyp="http://schemas.microsoft.com/office/drawing/2018/hyperlinkcolor">
+<p:sld xmlns:a="http://schemas.openxmlformats.org/drawingml/2006/main" xmlns:r="http://schemas.openxmlformats.org/officeDocument/2006/relationships" xmlns:p="http://schemas.openxmlformats.org/presentationml/2006/main">
   <p:cSld>
     <p:spTree>
       <p:nvGrpSpPr>
-        <p:cNvPr id="93" name="Shape 93"/>
+        <p:cNvPr id="1" name="Shape 93"/>
         <p:cNvGrpSpPr/>
         <p:nvPr/>
       </p:nvGrpSpPr>
@@ -7566,9 +7775,11 @@
       <p:sp>
         <p:nvSpPr>
           <p:cNvPr id="94" name="Google Shape;94;p11"/>
-          <p:cNvSpPr txBox="1"/>
+          <p:cNvSpPr txBox="1">
+            <a:spLocks noGrp="1"/>
+          </p:cNvSpPr>
           <p:nvPr>
-            <p:ph idx="1" type="body"/>
+            <p:ph type="body" idx="1"/>
           </p:nvPr>
         </p:nvSpPr>
         <p:spPr>
@@ -7585,12 +7796,12 @@
           </a:ln>
         </p:spPr>
         <p:txBody>
-          <a:bodyPr anchorCtr="0" anchor="t" bIns="45700" lIns="91425" spcFirstLastPara="1" rIns="91425" wrap="square" tIns="45700">
+          <a:bodyPr spcFirstLastPara="1" wrap="square" lIns="91425" tIns="45700" rIns="91425" bIns="45700" anchor="t" anchorCtr="0">
             <a:noAutofit/>
           </a:bodyPr>
           <a:lstStyle/>
           <a:p>
-            <a:pPr xmlns:a="http://schemas.openxmlformats.org/drawingml/2006/main" indent="0" lvl="0" marL="0" rtl="0" algn="l">
+            <a:pPr marL="0" lvl="0" indent="0" algn="l" rtl="0">
               <a:lnSpc>
                 <a:spcPct val="130000"/>
               </a:lnSpc>
@@ -7603,8 +7814,8 @@
               <a:buSzPts val="2000"/>
               <a:buNone/>
             </a:pPr>
-            <a:r xmlns:a="http://schemas.openxmlformats.org/drawingml/2006/main">
-              <a:rPr b="1" lang="en">
+            <a:r>
+              <a:rPr lang="en" b="1">
                 <a:latin typeface="Avenir"/>
                 <a:ea typeface="Avenir"/>
                 <a:cs typeface="Avenir"/>
@@ -7612,7 +7823,7 @@
               </a:rPr>
               <a:t>Justification of how the number of codes was found</a:t>
             </a:r>
-            <a:endParaRPr xmlns:a="http://schemas.openxmlformats.org/drawingml/2006/main">
+            <a:endParaRPr>
               <a:latin typeface="Avenir"/>
               <a:ea typeface="Avenir"/>
               <a:cs typeface="Avenir"/>
@@ -7620,7 +7831,7 @@
             </a:endParaRPr>
           </a:p>
           <a:p>
-            <a:pPr xmlns:a="http://schemas.openxmlformats.org/drawingml/2006/main" indent="-228600" lvl="0" marL="228600" rtl="0" algn="l">
+            <a:pPr marL="228600" lvl="0" indent="-228600" algn="l" rtl="0">
               <a:lnSpc>
                 <a:spcPct val="130000"/>
               </a:lnSpc>
@@ -7634,7 +7845,7 @@
               <a:buFont typeface="Avenir"/>
               <a:buChar char="◼"/>
             </a:pPr>
-            <a:r xmlns:a="http://schemas.openxmlformats.org/drawingml/2006/main">
+            <a:r>
               <a:rPr lang="en">
                 <a:latin typeface="Avenir"/>
                 <a:ea typeface="Avenir"/>
@@ -7643,7 +7854,7 @@
               </a:rPr>
               <a:t>What counting strategies or techniques were used? </a:t>
             </a:r>
-            <a:r xmlns:a="http://schemas.openxmlformats.org/drawingml/2006/main">
+            <a:r>
               <a:rPr lang="en">
                 <a:solidFill>
                   <a:srgbClr val="7F7F7F"/>
@@ -7655,7 +7866,7 @@
               </a:rPr>
               <a:t>Add photos of how you made the lists with the codes.</a:t>
             </a:r>
-            <a:endParaRPr xmlns:a="http://schemas.openxmlformats.org/drawingml/2006/main">
+            <a:endParaRPr>
               <a:latin typeface="Avenir"/>
               <a:ea typeface="Avenir"/>
               <a:cs typeface="Avenir"/>
@@ -7663,7 +7874,7 @@
             </a:endParaRPr>
           </a:p>
           <a:p>
-            <a:pPr xmlns:a="http://schemas.openxmlformats.org/drawingml/2006/main" indent="-228600" lvl="0" marL="228600" rtl="0" algn="l">
+            <a:pPr marL="228600" lvl="0" indent="-228600" algn="l" rtl="0">
               <a:lnSpc>
                 <a:spcPct val="130000"/>
               </a:lnSpc>
@@ -7677,7 +7888,7 @@
               <a:buFont typeface="Avenir"/>
               <a:buChar char="◼"/>
             </a:pPr>
-            <a:r xmlns:a="http://schemas.openxmlformats.org/drawingml/2006/main">
+            <a:r>
               <a:rPr lang="en">
                 <a:latin typeface="Avenir"/>
                 <a:ea typeface="Avenir"/>
@@ -7686,7 +7897,7 @@
               </a:rPr>
               <a:t>How did we make sure we didn't overcount or undercount codes?</a:t>
             </a:r>
-            <a:endParaRPr xmlns:a="http://schemas.openxmlformats.org/drawingml/2006/main">
+            <a:endParaRPr>
               <a:latin typeface="Avenir"/>
               <a:ea typeface="Avenir"/>
               <a:cs typeface="Avenir"/>
@@ -7694,7 +7905,7 @@
             </a:endParaRPr>
           </a:p>
           <a:p>
-            <a:pPr xmlns:a="http://schemas.openxmlformats.org/drawingml/2006/main" indent="0" lvl="0" marL="0" rtl="0" algn="l">
+            <a:pPr marL="0" lvl="0" indent="0" algn="l" rtl="0">
               <a:lnSpc>
                 <a:spcPct val="130000"/>
               </a:lnSpc>
@@ -7707,13 +7918,10 @@
               <a:buSzPts val="2000"/>
               <a:buNone/>
             </a:pPr>
-            <a:r xmlns:a="http://schemas.openxmlformats.org/drawingml/2006/main">
-              <a:t/>
-            </a:r>
-            <a:endParaRPr xmlns:a="http://schemas.openxmlformats.org/drawingml/2006/main"/>
+            <a:endParaRPr/>
           </a:p>
           <a:p>
-            <a:pPr xmlns:a="http://schemas.openxmlformats.org/drawingml/2006/main" indent="-101600" lvl="0" marL="228600" rtl="0" algn="l">
+            <a:pPr marL="228600" lvl="0" indent="-101600" algn="l" rtl="0">
               <a:lnSpc>
                 <a:spcPct val="130000"/>
               </a:lnSpc>
@@ -7726,17 +7934,16 @@
               <a:buSzPts val="2000"/>
               <a:buNone/>
             </a:pPr>
-            <a:r xmlns:a="http://schemas.openxmlformats.org/drawingml/2006/main">
-              <a:t/>
-            </a:r>
-            <a:endParaRPr xmlns:a="http://schemas.openxmlformats.org/drawingml/2006/main"/>
+            <a:endParaRPr/>
           </a:p>
         </p:txBody>
       </p:sp>
       <p:sp>
         <p:nvSpPr>
           <p:cNvPr id="95" name="Google Shape;95;p11"/>
-          <p:cNvSpPr txBox="1"/>
+          <p:cNvSpPr txBox="1">
+            <a:spLocks noGrp="1"/>
+          </p:cNvSpPr>
           <p:nvPr>
             <p:ph type="title"/>
           </p:nvPr>
@@ -7755,12 +7962,12 @@
           </a:ln>
         </p:spPr>
         <p:txBody>
-          <a:bodyPr anchorCtr="0" anchor="b" bIns="45700" lIns="91425" spcFirstLastPara="1" rIns="91425" wrap="square" tIns="45700">
+          <a:bodyPr spcFirstLastPara="1" wrap="square" lIns="91425" tIns="45700" rIns="91425" bIns="45700" anchor="b" anchorCtr="0">
             <a:noAutofit/>
           </a:bodyPr>
           <a:lstStyle/>
           <a:p>
-            <a:pPr xmlns:a="http://schemas.openxmlformats.org/drawingml/2006/main" indent="0" lvl="0" marL="0" rtl="0" algn="l">
+            <a:pPr marL="0" lvl="0" indent="0" algn="l" rtl="0">
               <a:spcBef>
                 <a:spcPts val="0"/>
               </a:spcBef>
@@ -7769,7 +7976,7 @@
               </a:spcAft>
               <a:buNone/>
             </a:pPr>
-            <a:r xmlns:a="http://schemas.openxmlformats.org/drawingml/2006/main">
+            <a:r>
               <a:rPr lang="en">
                 <a:latin typeface="Avenir"/>
                 <a:ea typeface="Avenir"/>
@@ -7778,7 +7985,7 @@
               </a:rPr>
               <a:t>How many codes does the padlock we studied support?</a:t>
             </a:r>
-            <a:endParaRPr xmlns:a="http://schemas.openxmlformats.org/drawingml/2006/main">
+            <a:endParaRPr>
               <a:latin typeface="Avenir"/>
               <a:ea typeface="Avenir"/>
               <a:cs typeface="Avenir"/>
@@ -7796,11 +8003,11 @@
 </file>
 
 <file path=ppt/slides/slide5.xml><?xml version="1.0" encoding="utf-8"?>
-<p:sld xmlns:a="http://schemas.openxmlformats.org/drawingml/2006/main" xmlns:r="http://schemas.openxmlformats.org/officeDocument/2006/relationships" xmlns:mc="http://schemas.openxmlformats.org/markup-compatibility/2006" xmlns:mv="urn:schemas-microsoft-com:mac:vml" xmlns:p="http://schemas.openxmlformats.org/presentationml/2006/main" xmlns:c="http://schemas.openxmlformats.org/drawingml/2006/chart" xmlns:dgm="http://schemas.openxmlformats.org/drawingml/2006/diagram" xmlns:o="urn:schemas-microsoft-com:office:office" xmlns:v="urn:schemas-microsoft-com:vml" xmlns:pvml="urn:schemas-microsoft-com:office:powerpoint" xmlns:com="http://schemas.openxmlformats.org/drawingml/2006/compatibility" xmlns:p14="http://schemas.microsoft.com/office/powerpoint/2010/main" xmlns:p15="http://schemas.microsoft.com/office/powerpoint/2012/main" xmlns:ahyp="http://schemas.microsoft.com/office/drawing/2018/hyperlinkcolor">
+<p:sld xmlns:a="http://schemas.openxmlformats.org/drawingml/2006/main" xmlns:r="http://schemas.openxmlformats.org/officeDocument/2006/relationships" xmlns:p="http://schemas.openxmlformats.org/presentationml/2006/main">
   <p:cSld>
     <p:spTree>
       <p:nvGrpSpPr>
-        <p:cNvPr id="99" name="Shape 99"/>
+        <p:cNvPr id="1" name="Shape 99"/>
         <p:cNvGrpSpPr/>
         <p:nvPr/>
       </p:nvGrpSpPr>
@@ -7815,9 +8022,11 @@
       <p:sp>
         <p:nvSpPr>
           <p:cNvPr id="100" name="Google Shape;100;p12"/>
-          <p:cNvSpPr txBox="1"/>
+          <p:cNvSpPr txBox="1">
+            <a:spLocks noGrp="1"/>
+          </p:cNvSpPr>
           <p:nvPr>
-            <p:ph idx="1" type="body"/>
+            <p:ph type="body" idx="1"/>
           </p:nvPr>
         </p:nvSpPr>
         <p:spPr>
@@ -7834,12 +8043,12 @@
           </a:ln>
         </p:spPr>
         <p:txBody>
-          <a:bodyPr anchorCtr="0" anchor="t" bIns="45700" lIns="91425" spcFirstLastPara="1" rIns="91425" wrap="square" tIns="45700">
+          <a:bodyPr spcFirstLastPara="1" wrap="square" lIns="91425" tIns="45700" rIns="91425" bIns="45700" anchor="t" anchorCtr="0">
             <a:noAutofit/>
           </a:bodyPr>
           <a:lstStyle/>
           <a:p>
-            <a:pPr xmlns:a="http://schemas.openxmlformats.org/drawingml/2006/main" indent="0" lvl="0" marL="0" rtl="0" algn="l">
+            <a:pPr marL="0" lvl="0" indent="0" algn="l" rtl="0">
               <a:lnSpc>
                 <a:spcPct val="130000"/>
               </a:lnSpc>
@@ -7852,8 +8061,8 @@
               <a:buSzPts val="2000"/>
               <a:buNone/>
             </a:pPr>
-            <a:r xmlns:a="http://schemas.openxmlformats.org/drawingml/2006/main">
-              <a:rPr b="1" lang="en">
+            <a:r>
+              <a:rPr lang="en" b="1">
                 <a:latin typeface="Avenir"/>
                 <a:ea typeface="Avenir"/>
                 <a:cs typeface="Avenir"/>
@@ -7861,8 +8070,8 @@
               </a:rPr>
               <a:t>Other questions about the padlock – </a:t>
             </a:r>
-            <a:r xmlns:a="http://schemas.openxmlformats.org/drawingml/2006/main">
-              <a:rPr b="1" lang="en">
+            <a:r>
+              <a:rPr lang="en" b="1">
                 <a:solidFill>
                   <a:srgbClr val="7030A0"/>
                 </a:solidFill>
@@ -7873,7 +8082,7 @@
               </a:rPr>
               <a:t>About the time to open the padlock</a:t>
             </a:r>
-            <a:endParaRPr xmlns:a="http://schemas.openxmlformats.org/drawingml/2006/main">
+            <a:endParaRPr>
               <a:latin typeface="Avenir"/>
               <a:ea typeface="Avenir"/>
               <a:cs typeface="Avenir"/>
@@ -7881,7 +8090,7 @@
             </a:endParaRPr>
           </a:p>
           <a:p>
-            <a:pPr xmlns:a="http://schemas.openxmlformats.org/drawingml/2006/main" indent="-228600" lvl="0" marL="228600" rtl="0" algn="l">
+            <a:pPr marL="228600" lvl="0" indent="-228600" algn="l" rtl="0">
               <a:lnSpc>
                 <a:spcPct val="130000"/>
               </a:lnSpc>
@@ -7895,7 +8104,7 @@
               <a:buFont typeface="Avenir"/>
               <a:buChar char="◼"/>
             </a:pPr>
-            <a:r xmlns:a="http://schemas.openxmlformats.org/drawingml/2006/main">
+            <a:r>
               <a:rPr lang="en">
                 <a:latin typeface="Avenir"/>
                 <a:ea typeface="Avenir"/>
@@ -7904,7 +8113,7 @@
               </a:rPr>
               <a:t>If we have to open the padlock by trying all the codes, how long (minimum and maximum) do you estimate it would take to open the padlock?</a:t>
             </a:r>
-            <a:endParaRPr xmlns:a="http://schemas.openxmlformats.org/drawingml/2006/main">
+            <a:endParaRPr>
               <a:latin typeface="Avenir"/>
               <a:ea typeface="Avenir"/>
               <a:cs typeface="Avenir"/>
@@ -7912,7 +8121,7 @@
             </a:endParaRPr>
           </a:p>
           <a:p>
-            <a:pPr xmlns:a="http://schemas.openxmlformats.org/drawingml/2006/main" indent="-228600" lvl="0" marL="228600" rtl="0" algn="l">
+            <a:pPr marL="228600" lvl="0" indent="-228600" algn="l" rtl="0">
               <a:lnSpc>
                 <a:spcPct val="130000"/>
               </a:lnSpc>
@@ -7926,7 +8135,7 @@
               <a:buFont typeface="Avenir"/>
               <a:buChar char="◼"/>
             </a:pPr>
-            <a:r xmlns:a="http://schemas.openxmlformats.org/drawingml/2006/main">
+            <a:r>
               <a:rPr lang="en">
                 <a:latin typeface="Avenir"/>
                 <a:ea typeface="Avenir"/>
@@ -7935,7 +8144,7 @@
               </a:rPr>
               <a:t>...</a:t>
             </a:r>
-            <a:endParaRPr xmlns:a="http://schemas.openxmlformats.org/drawingml/2006/main">
+            <a:endParaRPr>
               <a:latin typeface="Avenir"/>
               <a:ea typeface="Avenir"/>
               <a:cs typeface="Avenir"/>
@@ -7943,7 +8152,7 @@
             </a:endParaRPr>
           </a:p>
           <a:p>
-            <a:pPr xmlns:a="http://schemas.openxmlformats.org/drawingml/2006/main" indent="0" lvl="0" marL="0" rtl="0" algn="l">
+            <a:pPr marL="0" lvl="0" indent="0" algn="l" rtl="0">
               <a:lnSpc>
                 <a:spcPct val="130000"/>
               </a:lnSpc>
@@ -7956,13 +8165,10 @@
               <a:buSzPts val="2000"/>
               <a:buNone/>
             </a:pPr>
-            <a:r xmlns:a="http://schemas.openxmlformats.org/drawingml/2006/main">
-              <a:t/>
-            </a:r>
-            <a:endParaRPr xmlns:a="http://schemas.openxmlformats.org/drawingml/2006/main"/>
+            <a:endParaRPr/>
           </a:p>
           <a:p>
-            <a:pPr xmlns:a="http://schemas.openxmlformats.org/drawingml/2006/main" indent="-101600" lvl="0" marL="228600" rtl="0" algn="l">
+            <a:pPr marL="228600" lvl="0" indent="-101600" algn="l" rtl="0">
               <a:lnSpc>
                 <a:spcPct val="130000"/>
               </a:lnSpc>
@@ -7975,17 +8181,16 @@
               <a:buSzPts val="2000"/>
               <a:buNone/>
             </a:pPr>
-            <a:r xmlns:a="http://schemas.openxmlformats.org/drawingml/2006/main">
-              <a:t/>
-            </a:r>
-            <a:endParaRPr xmlns:a="http://schemas.openxmlformats.org/drawingml/2006/main"/>
+            <a:endParaRPr/>
           </a:p>
         </p:txBody>
       </p:sp>
       <p:sp>
         <p:nvSpPr>
           <p:cNvPr id="101" name="Google Shape;101;p12"/>
-          <p:cNvSpPr txBox="1"/>
+          <p:cNvSpPr txBox="1">
+            <a:spLocks noGrp="1"/>
+          </p:cNvSpPr>
           <p:nvPr>
             <p:ph type="title"/>
           </p:nvPr>
@@ -8004,12 +8209,12 @@
           </a:ln>
         </p:spPr>
         <p:txBody>
-          <a:bodyPr anchorCtr="0" anchor="b" bIns="45700" lIns="91425" spcFirstLastPara="1" rIns="91425" wrap="square" tIns="45700">
+          <a:bodyPr spcFirstLastPara="1" wrap="square" lIns="91425" tIns="45700" rIns="91425" bIns="45700" anchor="b" anchorCtr="0">
             <a:noAutofit/>
           </a:bodyPr>
           <a:lstStyle/>
           <a:p>
-            <a:pPr xmlns:a="http://schemas.openxmlformats.org/drawingml/2006/main" indent="0" lvl="0" marL="0" rtl="0" algn="l">
+            <a:pPr marL="0" lvl="0" indent="0" algn="l" rtl="0">
               <a:spcBef>
                 <a:spcPts val="0"/>
               </a:spcBef>
@@ -8018,7 +8223,7 @@
               </a:spcAft>
               <a:buNone/>
             </a:pPr>
-            <a:r xmlns:a="http://schemas.openxmlformats.org/drawingml/2006/main">
+            <a:r>
               <a:rPr lang="en">
                 <a:latin typeface="Avenir"/>
                 <a:ea typeface="Avenir"/>
@@ -8027,7 +8232,7 @@
               </a:rPr>
               <a:t>How many codes does the padlock we studied support?</a:t>
             </a:r>
-            <a:endParaRPr xmlns:a="http://schemas.openxmlformats.org/drawingml/2006/main">
+            <a:endParaRPr>
               <a:latin typeface="Avenir"/>
               <a:ea typeface="Avenir"/>
               <a:cs typeface="Avenir"/>
@@ -8045,11 +8250,11 @@
 </file>
 
 <file path=ppt/slides/slide6.xml><?xml version="1.0" encoding="utf-8"?>
-<p:sld xmlns:a="http://schemas.openxmlformats.org/drawingml/2006/main" xmlns:r="http://schemas.openxmlformats.org/officeDocument/2006/relationships" xmlns:mc="http://schemas.openxmlformats.org/markup-compatibility/2006" xmlns:mv="urn:schemas-microsoft-com:mac:vml" xmlns:p="http://schemas.openxmlformats.org/presentationml/2006/main" xmlns:c="http://schemas.openxmlformats.org/drawingml/2006/chart" xmlns:dgm="http://schemas.openxmlformats.org/drawingml/2006/diagram" xmlns:o="urn:schemas-microsoft-com:office:office" xmlns:v="urn:schemas-microsoft-com:vml" xmlns:pvml="urn:schemas-microsoft-com:office:powerpoint" xmlns:com="http://schemas.openxmlformats.org/drawingml/2006/compatibility" xmlns:p14="http://schemas.microsoft.com/office/powerpoint/2010/main" xmlns:p15="http://schemas.microsoft.com/office/powerpoint/2012/main" xmlns:ahyp="http://schemas.microsoft.com/office/drawing/2018/hyperlinkcolor">
+<p:sld xmlns:a="http://schemas.openxmlformats.org/drawingml/2006/main" xmlns:r="http://schemas.openxmlformats.org/officeDocument/2006/relationships" xmlns:p="http://schemas.openxmlformats.org/presentationml/2006/main">
   <p:cSld>
     <p:spTree>
       <p:nvGrpSpPr>
-        <p:cNvPr id="105" name="Shape 105"/>
+        <p:cNvPr id="1" name="Shape 105"/>
         <p:cNvGrpSpPr/>
         <p:nvPr/>
       </p:nvGrpSpPr>
@@ -8064,9 +8269,11 @@
       <p:sp>
         <p:nvSpPr>
           <p:cNvPr id="106" name="Google Shape;106;p13"/>
-          <p:cNvSpPr txBox="1"/>
+          <p:cNvSpPr txBox="1">
+            <a:spLocks noGrp="1"/>
+          </p:cNvSpPr>
           <p:nvPr>
-            <p:ph idx="1" type="body"/>
+            <p:ph type="body" idx="1"/>
           </p:nvPr>
         </p:nvSpPr>
         <p:spPr>
@@ -8083,12 +8290,12 @@
           </a:ln>
         </p:spPr>
         <p:txBody>
-          <a:bodyPr anchorCtr="0" anchor="t" bIns="45700" lIns="91425" spcFirstLastPara="1" rIns="91425" wrap="square" tIns="45700">
+          <a:bodyPr spcFirstLastPara="1" wrap="square" lIns="91425" tIns="45700" rIns="91425" bIns="45700" anchor="t" anchorCtr="0">
             <a:noAutofit/>
           </a:bodyPr>
           <a:lstStyle/>
           <a:p>
-            <a:pPr xmlns:a="http://schemas.openxmlformats.org/drawingml/2006/main" indent="0" lvl="0" marL="0" rtl="0" algn="l">
+            <a:pPr marL="0" lvl="0" indent="0" algn="l" rtl="0">
               <a:lnSpc>
                 <a:spcPct val="130000"/>
               </a:lnSpc>
@@ -8101,8 +8308,8 @@
               <a:buSzPts val="2000"/>
               <a:buNone/>
             </a:pPr>
-            <a:r xmlns:a="http://schemas.openxmlformats.org/drawingml/2006/main">
-              <a:rPr b="1" lang="en">
+            <a:r>
+              <a:rPr lang="en" b="1">
                 <a:latin typeface="Avenir"/>
                 <a:ea typeface="Avenir"/>
                 <a:cs typeface="Avenir"/>
@@ -8110,8 +8317,8 @@
               </a:rPr>
               <a:t>Other padlock questions – </a:t>
             </a:r>
-            <a:r xmlns:a="http://schemas.openxmlformats.org/drawingml/2006/main">
-              <a:rPr b="1" lang="en">
+            <a:r>
+              <a:rPr lang="en" b="1">
                 <a:solidFill>
                   <a:srgbClr val="7030A0"/>
                 </a:solidFill>
@@ -8122,7 +8329,7 @@
               </a:rPr>
               <a:t>Padlock variations</a:t>
             </a:r>
-            <a:endParaRPr xmlns:a="http://schemas.openxmlformats.org/drawingml/2006/main">
+            <a:endParaRPr>
               <a:latin typeface="Avenir"/>
               <a:ea typeface="Avenir"/>
               <a:cs typeface="Avenir"/>
@@ -8130,7 +8337,7 @@
             </a:endParaRPr>
           </a:p>
           <a:p>
-            <a:pPr xmlns:a="http://schemas.openxmlformats.org/drawingml/2006/main" indent="-228600" lvl="0" marL="228600" rtl="0" algn="l">
+            <a:pPr marL="228600" lvl="0" indent="-228600" algn="l" rtl="0">
               <a:lnSpc>
                 <a:spcPct val="130000"/>
               </a:lnSpc>
@@ -8143,8 +8350,8 @@
               <a:buSzPts val="2000"/>
               <a:buChar char="◼"/>
             </a:pPr>
-            <a:r xmlns:a="http://schemas.openxmlformats.org/drawingml/2006/main">
-              <a:rPr b="1" lang="en">
+            <a:r>
+              <a:rPr lang="en" b="1">
                 <a:latin typeface="Avenir"/>
                 <a:ea typeface="Avenir"/>
                 <a:cs typeface="Avenir"/>
@@ -8152,7 +8359,7 @@
               </a:rPr>
               <a:t> </a:t>
             </a:r>
-            <a:r xmlns:a="http://schemas.openxmlformats.org/drawingml/2006/main">
+            <a:r>
               <a:rPr lang="en">
                 <a:latin typeface="Avenir"/>
                 <a:ea typeface="Avenir"/>
@@ -8161,7 +8368,7 @@
               </a:rPr>
               <a:t>If we have the same padlock with one more box, how would we find the total number of codes it supports?</a:t>
             </a:r>
-            <a:endParaRPr xmlns:a="http://schemas.openxmlformats.org/drawingml/2006/main">
+            <a:endParaRPr>
               <a:latin typeface="Avenir"/>
               <a:ea typeface="Avenir"/>
               <a:cs typeface="Avenir"/>
@@ -8169,7 +8376,7 @@
             </a:endParaRPr>
           </a:p>
           <a:p>
-            <a:pPr xmlns:a="http://schemas.openxmlformats.org/drawingml/2006/main" indent="-228600" lvl="0" marL="228600" rtl="0" algn="l">
+            <a:pPr marL="228600" lvl="0" indent="-228600" algn="l" rtl="0">
               <a:lnSpc>
                 <a:spcPct val="130000"/>
               </a:lnSpc>
@@ -8183,7 +8390,7 @@
               <a:buFont typeface="Avenir"/>
               <a:buChar char="◼"/>
             </a:pPr>
-            <a:r xmlns:a="http://schemas.openxmlformats.org/drawingml/2006/main">
+            <a:r>
               <a:rPr lang="en">
                 <a:latin typeface="Avenir"/>
                 <a:ea typeface="Avenir"/>
@@ -8192,7 +8399,7 @@
               </a:rPr>
               <a:t>What if we have one more element per box? What would happen then?</a:t>
             </a:r>
-            <a:endParaRPr xmlns:a="http://schemas.openxmlformats.org/drawingml/2006/main">
+            <a:endParaRPr>
               <a:latin typeface="Avenir"/>
               <a:ea typeface="Avenir"/>
               <a:cs typeface="Avenir"/>
@@ -8200,7 +8407,7 @@
             </a:endParaRPr>
           </a:p>
           <a:p>
-            <a:pPr xmlns:a="http://schemas.openxmlformats.org/drawingml/2006/main" indent="-228600" lvl="0" marL="228600" rtl="0" algn="l">
+            <a:pPr marL="228600" lvl="0" indent="-228600" algn="l" rtl="0">
               <a:lnSpc>
                 <a:spcPct val="130000"/>
               </a:lnSpc>
@@ -8214,7 +8421,7 @@
               <a:buFont typeface="Avenir"/>
               <a:buChar char="◼"/>
             </a:pPr>
-            <a:r xmlns:a="http://schemas.openxmlformats.org/drawingml/2006/main">
+            <a:r>
               <a:rPr lang="en">
                 <a:latin typeface="Avenir"/>
                 <a:ea typeface="Avenir"/>
@@ -8223,7 +8430,7 @@
               </a:rPr>
               <a:t>...</a:t>
             </a:r>
-            <a:endParaRPr xmlns:a="http://schemas.openxmlformats.org/drawingml/2006/main">
+            <a:endParaRPr>
               <a:latin typeface="Avenir"/>
               <a:ea typeface="Avenir"/>
               <a:cs typeface="Avenir"/>
@@ -8231,7 +8438,7 @@
             </a:endParaRPr>
           </a:p>
           <a:p>
-            <a:pPr xmlns:a="http://schemas.openxmlformats.org/drawingml/2006/main" indent="0" lvl="0" marL="0" rtl="0" algn="l">
+            <a:pPr marL="0" lvl="0" indent="0" algn="l" rtl="0">
               <a:lnSpc>
                 <a:spcPct val="130000"/>
               </a:lnSpc>
@@ -8244,13 +8451,10 @@
               <a:buSzPts val="2000"/>
               <a:buNone/>
             </a:pPr>
-            <a:r xmlns:a="http://schemas.openxmlformats.org/drawingml/2006/main">
-              <a:t/>
-            </a:r>
-            <a:endParaRPr xmlns:a="http://schemas.openxmlformats.org/drawingml/2006/main"/>
+            <a:endParaRPr/>
           </a:p>
           <a:p>
-            <a:pPr xmlns:a="http://schemas.openxmlformats.org/drawingml/2006/main" indent="-101600" lvl="0" marL="228600" rtl="0" algn="l">
+            <a:pPr marL="228600" lvl="0" indent="-101600" algn="l" rtl="0">
               <a:lnSpc>
                 <a:spcPct val="130000"/>
               </a:lnSpc>
@@ -8263,17 +8467,16 @@
               <a:buSzPts val="2000"/>
               <a:buNone/>
             </a:pPr>
-            <a:r xmlns:a="http://schemas.openxmlformats.org/drawingml/2006/main">
-              <a:t/>
-            </a:r>
-            <a:endParaRPr xmlns:a="http://schemas.openxmlformats.org/drawingml/2006/main"/>
+            <a:endParaRPr/>
           </a:p>
         </p:txBody>
       </p:sp>
       <p:sp>
         <p:nvSpPr>
           <p:cNvPr id="107" name="Google Shape;107;p13"/>
-          <p:cNvSpPr txBox="1"/>
+          <p:cNvSpPr txBox="1">
+            <a:spLocks noGrp="1"/>
+          </p:cNvSpPr>
           <p:nvPr>
             <p:ph type="title"/>
           </p:nvPr>
@@ -8292,12 +8495,12 @@
           </a:ln>
         </p:spPr>
         <p:txBody>
-          <a:bodyPr anchorCtr="0" anchor="b" bIns="45700" lIns="91425" spcFirstLastPara="1" rIns="91425" wrap="square" tIns="45700">
+          <a:bodyPr spcFirstLastPara="1" wrap="square" lIns="91425" tIns="45700" rIns="91425" bIns="45700" anchor="b" anchorCtr="0">
             <a:noAutofit/>
           </a:bodyPr>
           <a:lstStyle/>
           <a:p>
-            <a:pPr xmlns:a="http://schemas.openxmlformats.org/drawingml/2006/main" indent="0" lvl="0" marL="0" rtl="0" algn="l">
+            <a:pPr marL="0" lvl="0" indent="0" algn="l" rtl="0">
               <a:spcBef>
                 <a:spcPts val="0"/>
               </a:spcBef>
@@ -8306,7 +8509,7 @@
               </a:spcAft>
               <a:buNone/>
             </a:pPr>
-            <a:r xmlns:a="http://schemas.openxmlformats.org/drawingml/2006/main">
+            <a:r>
               <a:rPr lang="en">
                 <a:latin typeface="Avenir"/>
                 <a:ea typeface="Avenir"/>
@@ -8315,7 +8518,7 @@
               </a:rPr>
               <a:t>How many codes does the padlock we studied support?</a:t>
             </a:r>
-            <a:endParaRPr xmlns:a="http://schemas.openxmlformats.org/drawingml/2006/main">
+            <a:endParaRPr>
               <a:latin typeface="Avenir"/>
               <a:ea typeface="Avenir"/>
               <a:cs typeface="Avenir"/>
@@ -8333,7 +8536,288 @@
 </file>
 
 <file path=ppt/theme/theme1.xml><?xml version="1.0" encoding="utf-8"?>
-<a:theme xmlns:a="http://schemas.openxmlformats.org/drawingml/2006/main" xmlns:r="http://schemas.openxmlformats.org/officeDocument/2006/relationships" name="Office Theme">
+<a:theme xmlns:a="http://schemas.openxmlformats.org/drawingml/2006/main" name="Plaza">
+  <a:themeElements>
+    <a:clrScheme name="Plaza">
+      <a:dk1>
+        <a:srgbClr val="000000"/>
+      </a:dk1>
+      <a:lt1>
+        <a:srgbClr val="FFFFFF"/>
+      </a:lt1>
+      <a:dk2>
+        <a:srgbClr val="333333"/>
+      </a:dk2>
+      <a:lt2>
+        <a:srgbClr val="CCCCCC"/>
+      </a:lt2>
+      <a:accent1>
+        <a:srgbClr val="990000"/>
+      </a:accent1>
+      <a:accent2>
+        <a:srgbClr val="580101"/>
+      </a:accent2>
+      <a:accent3>
+        <a:srgbClr val="E94A00"/>
+      </a:accent3>
+      <a:accent4>
+        <a:srgbClr val="EB8F00"/>
+      </a:accent4>
+      <a:accent5>
+        <a:srgbClr val="A4A4A4"/>
+      </a:accent5>
+      <a:accent6>
+        <a:srgbClr val="666666"/>
+      </a:accent6>
+      <a:hlink>
+        <a:srgbClr val="D01010"/>
+      </a:hlink>
+      <a:folHlink>
+        <a:srgbClr val="E6682E"/>
+      </a:folHlink>
+    </a:clrScheme>
+    <a:fontScheme name="Office">
+      <a:majorFont>
+        <a:latin typeface="Arial"/>
+        <a:ea typeface=""/>
+        <a:cs typeface=""/>
+        <a:font script="Jpan" typeface="ＭＳ Ｐゴシック"/>
+        <a:font script="Hang" typeface="맑은 고딕"/>
+        <a:font script="Hans" typeface="宋体"/>
+        <a:font script="Hant" typeface="新細明體"/>
+        <a:font script="Arab" typeface="Times New Roman"/>
+        <a:font script="Hebr" typeface="Times New Roman"/>
+        <a:font script="Thai" typeface="Angsana New"/>
+        <a:font script="Ethi" typeface="Nyala"/>
+        <a:font script="Beng" typeface="Vrinda"/>
+        <a:font script="Gujr" typeface="Shruti"/>
+        <a:font script="Khmr" typeface="MoolBoran"/>
+        <a:font script="Knda" typeface="Tunga"/>
+        <a:font script="Guru" typeface="Raavi"/>
+        <a:font script="Cans" typeface="Euphemia"/>
+        <a:font script="Cher" typeface="Plantagenet Cherokee"/>
+        <a:font script="Yiii" typeface="Microsoft Yi Baiti"/>
+        <a:font script="Tibt" typeface="Microsoft Himalaya"/>
+        <a:font script="Thaa" typeface="MV Boli"/>
+        <a:font script="Deva" typeface="Mangal"/>
+        <a:font script="Telu" typeface="Gautami"/>
+        <a:font script="Taml" typeface="Latha"/>
+        <a:font script="Syrc" typeface="Estrangelo Edessa"/>
+        <a:font script="Orya" typeface="Kalinga"/>
+        <a:font script="Mlym" typeface="Kartika"/>
+        <a:font script="Laoo" typeface="DokChampa"/>
+        <a:font script="Sinh" typeface="Iskoola Pota"/>
+        <a:font script="Mong" typeface="Mongolian Baiti"/>
+        <a:font script="Viet" typeface="Times New Roman"/>
+        <a:font script="Uigh" typeface="Microsoft Uighur"/>
+        <a:font script="Geor" typeface="Sylfaen"/>
+      </a:majorFont>
+      <a:minorFont>
+        <a:latin typeface="Arial"/>
+        <a:ea typeface=""/>
+        <a:cs typeface=""/>
+        <a:font script="Jpan" typeface="ＭＳ Ｐゴシック"/>
+        <a:font script="Hang" typeface="맑은 고딕"/>
+        <a:font script="Hans" typeface="宋体"/>
+        <a:font script="Hant" typeface="新細明體"/>
+        <a:font script="Arab" typeface="Arial"/>
+        <a:font script="Hebr" typeface="Arial"/>
+        <a:font script="Thai" typeface="Cordia New"/>
+        <a:font script="Ethi" typeface="Nyala"/>
+        <a:font script="Beng" typeface="Vrinda"/>
+        <a:font script="Gujr" typeface="Shruti"/>
+        <a:font script="Khmr" typeface="DaunPenh"/>
+        <a:font script="Knda" typeface="Tunga"/>
+        <a:font script="Guru" typeface="Raavi"/>
+        <a:font script="Cans" typeface="Euphemia"/>
+        <a:font script="Cher" typeface="Plantagenet Cherokee"/>
+        <a:font script="Yiii" typeface="Microsoft Yi Baiti"/>
+        <a:font script="Tibt" typeface="Microsoft Himalaya"/>
+        <a:font script="Thaa" typeface="MV Boli"/>
+        <a:font script="Deva" typeface="Mangal"/>
+        <a:font script="Telu" typeface="Gautami"/>
+        <a:font script="Taml" typeface="Latha"/>
+        <a:font script="Syrc" typeface="Estrangelo Edessa"/>
+        <a:font script="Orya" typeface="Kalinga"/>
+        <a:font script="Mlym" typeface="Kartika"/>
+        <a:font script="Laoo" typeface="DokChampa"/>
+        <a:font script="Sinh" typeface="Iskoola Pota"/>
+        <a:font script="Mong" typeface="Mongolian Baiti"/>
+        <a:font script="Viet" typeface="Arial"/>
+        <a:font script="Uigh" typeface="Microsoft Uighur"/>
+        <a:font script="Geor" typeface="Sylfaen"/>
+      </a:minorFont>
+    </a:fontScheme>
+    <a:fmtScheme name="Office">
+      <a:fillStyleLst>
+        <a:solidFill>
+          <a:schemeClr val="phClr"/>
+        </a:solidFill>
+        <a:gradFill rotWithShape="1">
+          <a:gsLst>
+            <a:gs pos="0">
+              <a:schemeClr val="phClr">
+                <a:tint val="50000"/>
+                <a:satMod val="300000"/>
+              </a:schemeClr>
+            </a:gs>
+            <a:gs pos="35000">
+              <a:schemeClr val="phClr">
+                <a:tint val="37000"/>
+                <a:satMod val="300000"/>
+              </a:schemeClr>
+            </a:gs>
+            <a:gs pos="100000">
+              <a:schemeClr val="phClr">
+                <a:tint val="15000"/>
+                <a:satMod val="350000"/>
+              </a:schemeClr>
+            </a:gs>
+          </a:gsLst>
+          <a:lin ang="16200000" scaled="1"/>
+        </a:gradFill>
+        <a:gradFill rotWithShape="1">
+          <a:gsLst>
+            <a:gs pos="0">
+              <a:schemeClr val="phClr">
+                <a:tint val="100000"/>
+                <a:shade val="100000"/>
+                <a:satMod val="130000"/>
+              </a:schemeClr>
+            </a:gs>
+            <a:gs pos="100000">
+              <a:schemeClr val="phClr">
+                <a:tint val="50000"/>
+                <a:shade val="100000"/>
+                <a:satMod val="350000"/>
+              </a:schemeClr>
+            </a:gs>
+          </a:gsLst>
+          <a:lin ang="16200000" scaled="0"/>
+        </a:gradFill>
+      </a:fillStyleLst>
+      <a:lnStyleLst>
+        <a:ln w="9525" cap="flat" cmpd="sng" algn="ctr">
+          <a:solidFill>
+            <a:schemeClr val="phClr">
+              <a:shade val="95000"/>
+              <a:satMod val="105000"/>
+            </a:schemeClr>
+          </a:solidFill>
+          <a:prstDash val="solid"/>
+        </a:ln>
+        <a:ln w="25400" cap="flat" cmpd="sng" algn="ctr">
+          <a:solidFill>
+            <a:schemeClr val="phClr"/>
+          </a:solidFill>
+          <a:prstDash val="solid"/>
+        </a:ln>
+        <a:ln w="38100" cap="flat" cmpd="sng" algn="ctr">
+          <a:solidFill>
+            <a:schemeClr val="phClr"/>
+          </a:solidFill>
+          <a:prstDash val="solid"/>
+        </a:ln>
+      </a:lnStyleLst>
+      <a:effectStyleLst>
+        <a:effectStyle>
+          <a:effectLst>
+            <a:outerShdw blurRad="40000" dist="20000" dir="5400000" rotWithShape="0">
+              <a:srgbClr val="000000">
+                <a:alpha val="38000"/>
+              </a:srgbClr>
+            </a:outerShdw>
+          </a:effectLst>
+        </a:effectStyle>
+        <a:effectStyle>
+          <a:effectLst>
+            <a:outerShdw blurRad="40000" dist="23000" dir="5400000" rotWithShape="0">
+              <a:srgbClr val="000000">
+                <a:alpha val="35000"/>
+              </a:srgbClr>
+            </a:outerShdw>
+          </a:effectLst>
+        </a:effectStyle>
+        <a:effectStyle>
+          <a:effectLst>
+            <a:outerShdw blurRad="40000" dist="23000" dir="5400000" rotWithShape="0">
+              <a:srgbClr val="000000">
+                <a:alpha val="35000"/>
+              </a:srgbClr>
+            </a:outerShdw>
+          </a:effectLst>
+          <a:scene3d>
+            <a:camera prst="orthographicFront">
+              <a:rot lat="0" lon="0" rev="0"/>
+            </a:camera>
+            <a:lightRig rig="threePt" dir="t">
+              <a:rot lat="0" lon="0" rev="1200000"/>
+            </a:lightRig>
+          </a:scene3d>
+          <a:sp3d>
+            <a:bevelT w="63500" h="25400"/>
+          </a:sp3d>
+        </a:effectStyle>
+      </a:effectStyleLst>
+      <a:bgFillStyleLst>
+        <a:solidFill>
+          <a:schemeClr val="phClr"/>
+        </a:solidFill>
+        <a:gradFill rotWithShape="1">
+          <a:gsLst>
+            <a:gs pos="0">
+              <a:schemeClr val="phClr">
+                <a:tint val="40000"/>
+                <a:satMod val="350000"/>
+              </a:schemeClr>
+            </a:gs>
+            <a:gs pos="40000">
+              <a:schemeClr val="phClr">
+                <a:tint val="45000"/>
+                <a:shade val="99000"/>
+                <a:satMod val="350000"/>
+              </a:schemeClr>
+            </a:gs>
+            <a:gs pos="100000">
+              <a:schemeClr val="phClr">
+                <a:shade val="20000"/>
+                <a:satMod val="255000"/>
+              </a:schemeClr>
+            </a:gs>
+          </a:gsLst>
+          <a:path path="circle">
+            <a:fillToRect l="50000" t="-80000" r="50000" b="180000"/>
+          </a:path>
+        </a:gradFill>
+        <a:gradFill rotWithShape="1">
+          <a:gsLst>
+            <a:gs pos="0">
+              <a:schemeClr val="phClr">
+                <a:tint val="80000"/>
+                <a:satMod val="300000"/>
+              </a:schemeClr>
+            </a:gs>
+            <a:gs pos="100000">
+              <a:schemeClr val="phClr">
+                <a:shade val="30000"/>
+                <a:satMod val="200000"/>
+              </a:schemeClr>
+            </a:gs>
+          </a:gsLst>
+          <a:path path="circle">
+            <a:fillToRect l="50000" t="50000" r="50000" b="50000"/>
+          </a:path>
+        </a:gradFill>
+      </a:bgFillStyleLst>
+    </a:fmtScheme>
+  </a:themeElements>
+  <a:objectDefaults/>
+  <a:extraClrSchemeLst/>
+</a:theme>
+</file>
+
+<file path=ppt/theme/theme2.xml><?xml version="1.0" encoding="utf-8"?>
+<a:theme xmlns:a="http://schemas.openxmlformats.org/drawingml/2006/main" name="Office Theme">
   <a:themeElements>
     <a:clrScheme name="Office">
       <a:dk1>
@@ -8608,284 +9092,7 @@
       </a:bgFillStyleLst>
     </a:fmtScheme>
   </a:themeElements>
-</a:theme>
-</file>
-
-<file path=ppt/theme/theme2.xml><?xml version="1.0" encoding="utf-8"?>
-<a:theme xmlns:a="http://schemas.openxmlformats.org/drawingml/2006/main" xmlns:r="http://schemas.openxmlformats.org/officeDocument/2006/relationships" name="Plaza">
-  <a:themeElements>
-    <a:clrScheme name="Plaza">
-      <a:dk1>
-        <a:srgbClr val="000000"/>
-      </a:dk1>
-      <a:lt1>
-        <a:srgbClr val="FFFFFF"/>
-      </a:lt1>
-      <a:dk2>
-        <a:srgbClr val="333333"/>
-      </a:dk2>
-      <a:lt2>
-        <a:srgbClr val="CCCCCC"/>
-      </a:lt2>
-      <a:accent1>
-        <a:srgbClr val="990000"/>
-      </a:accent1>
-      <a:accent2>
-        <a:srgbClr val="580101"/>
-      </a:accent2>
-      <a:accent3>
-        <a:srgbClr val="E94A00"/>
-      </a:accent3>
-      <a:accent4>
-        <a:srgbClr val="EB8F00"/>
-      </a:accent4>
-      <a:accent5>
-        <a:srgbClr val="A4A4A4"/>
-      </a:accent5>
-      <a:accent6>
-        <a:srgbClr val="666666"/>
-      </a:accent6>
-      <a:hlink>
-        <a:srgbClr val="D01010"/>
-      </a:hlink>
-      <a:folHlink>
-        <a:srgbClr val="E6682E"/>
-      </a:folHlink>
-    </a:clrScheme>
-    <a:fontScheme name="Office">
-      <a:majorFont>
-        <a:latin typeface="Arial"/>
-        <a:ea typeface=""/>
-        <a:cs typeface=""/>
-        <a:font script="Jpan" typeface="ＭＳ Ｐゴシック"/>
-        <a:font script="Hang" typeface="맑은 고딕"/>
-        <a:font script="Hans" typeface="宋体"/>
-        <a:font script="Hant" typeface="新細明體"/>
-        <a:font script="Arab" typeface="Times New Roman"/>
-        <a:font script="Hebr" typeface="Times New Roman"/>
-        <a:font script="Thai" typeface="Angsana New"/>
-        <a:font script="Ethi" typeface="Nyala"/>
-        <a:font script="Beng" typeface="Vrinda"/>
-        <a:font script="Gujr" typeface="Shruti"/>
-        <a:font script="Khmr" typeface="MoolBoran"/>
-        <a:font script="Knda" typeface="Tunga"/>
-        <a:font script="Guru" typeface="Raavi"/>
-        <a:font script="Cans" typeface="Euphemia"/>
-        <a:font script="Cher" typeface="Plantagenet Cherokee"/>
-        <a:font script="Yiii" typeface="Microsoft Yi Baiti"/>
-        <a:font script="Tibt" typeface="Microsoft Himalaya"/>
-        <a:font script="Thaa" typeface="MV Boli"/>
-        <a:font script="Deva" typeface="Mangal"/>
-        <a:font script="Telu" typeface="Gautami"/>
-        <a:font script="Taml" typeface="Latha"/>
-        <a:font script="Syrc" typeface="Estrangelo Edessa"/>
-        <a:font script="Orya" typeface="Kalinga"/>
-        <a:font script="Mlym" typeface="Kartika"/>
-        <a:font script="Laoo" typeface="DokChampa"/>
-        <a:font script="Sinh" typeface="Iskoola Pota"/>
-        <a:font script="Mong" typeface="Mongolian Baiti"/>
-        <a:font script="Viet" typeface="Times New Roman"/>
-        <a:font script="Uigh" typeface="Microsoft Uighur"/>
-        <a:font script="Geor" typeface="Sylfaen"/>
-      </a:majorFont>
-      <a:minorFont>
-        <a:latin typeface="Arial"/>
-        <a:ea typeface=""/>
-        <a:cs typeface=""/>
-        <a:font script="Jpan" typeface="ＭＳ Ｐゴシック"/>
-        <a:font script="Hang" typeface="맑은 고딕"/>
-        <a:font script="Hans" typeface="宋体"/>
-        <a:font script="Hant" typeface="新細明體"/>
-        <a:font script="Arab" typeface="Arial"/>
-        <a:font script="Hebr" typeface="Arial"/>
-        <a:font script="Thai" typeface="Cordia New"/>
-        <a:font script="Ethi" typeface="Nyala"/>
-        <a:font script="Beng" typeface="Vrinda"/>
-        <a:font script="Gujr" typeface="Shruti"/>
-        <a:font script="Khmr" typeface="DaunPenh"/>
-        <a:font script="Knda" typeface="Tunga"/>
-        <a:font script="Guru" typeface="Raavi"/>
-        <a:font script="Cans" typeface="Euphemia"/>
-        <a:font script="Cher" typeface="Plantagenet Cherokee"/>
-        <a:font script="Yiii" typeface="Microsoft Yi Baiti"/>
-        <a:font script="Tibt" typeface="Microsoft Himalaya"/>
-        <a:font script="Thaa" typeface="MV Boli"/>
-        <a:font script="Deva" typeface="Mangal"/>
-        <a:font script="Telu" typeface="Gautami"/>
-        <a:font script="Taml" typeface="Latha"/>
-        <a:font script="Syrc" typeface="Estrangelo Edessa"/>
-        <a:font script="Orya" typeface="Kalinga"/>
-        <a:font script="Mlym" typeface="Kartika"/>
-        <a:font script="Laoo" typeface="DokChampa"/>
-        <a:font script="Sinh" typeface="Iskoola Pota"/>
-        <a:font script="Mong" typeface="Mongolian Baiti"/>
-        <a:font script="Viet" typeface="Arial"/>
-        <a:font script="Uigh" typeface="Microsoft Uighur"/>
-        <a:font script="Geor" typeface="Sylfaen"/>
-      </a:minorFont>
-    </a:fontScheme>
-    <a:fmtScheme name="Office">
-      <a:fillStyleLst>
-        <a:solidFill>
-          <a:schemeClr val="phClr"/>
-        </a:solidFill>
-        <a:gradFill rotWithShape="1">
-          <a:gsLst>
-            <a:gs pos="0">
-              <a:schemeClr val="phClr">
-                <a:tint val="50000"/>
-                <a:satMod val="300000"/>
-              </a:schemeClr>
-            </a:gs>
-            <a:gs pos="35000">
-              <a:schemeClr val="phClr">
-                <a:tint val="37000"/>
-                <a:satMod val="300000"/>
-              </a:schemeClr>
-            </a:gs>
-            <a:gs pos="100000">
-              <a:schemeClr val="phClr">
-                <a:tint val="15000"/>
-                <a:satMod val="350000"/>
-              </a:schemeClr>
-            </a:gs>
-          </a:gsLst>
-          <a:lin ang="16200000" scaled="1"/>
-        </a:gradFill>
-        <a:gradFill rotWithShape="1">
-          <a:gsLst>
-            <a:gs pos="0">
-              <a:schemeClr val="phClr">
-                <a:tint val="100000"/>
-                <a:shade val="100000"/>
-                <a:satMod val="130000"/>
-              </a:schemeClr>
-            </a:gs>
-            <a:gs pos="100000">
-              <a:schemeClr val="phClr">
-                <a:tint val="50000"/>
-                <a:shade val="100000"/>
-                <a:satMod val="350000"/>
-              </a:schemeClr>
-            </a:gs>
-          </a:gsLst>
-          <a:lin ang="16200000" scaled="0"/>
-        </a:gradFill>
-      </a:fillStyleLst>
-      <a:lnStyleLst>
-        <a:ln w="9525" cap="flat" cmpd="sng" algn="ctr">
-          <a:solidFill>
-            <a:schemeClr val="phClr">
-              <a:shade val="95000"/>
-              <a:satMod val="105000"/>
-            </a:schemeClr>
-          </a:solidFill>
-          <a:prstDash val="solid"/>
-        </a:ln>
-        <a:ln w="25400" cap="flat" cmpd="sng" algn="ctr">
-          <a:solidFill>
-            <a:schemeClr val="phClr"/>
-          </a:solidFill>
-          <a:prstDash val="solid"/>
-        </a:ln>
-        <a:ln w="38100" cap="flat" cmpd="sng" algn="ctr">
-          <a:solidFill>
-            <a:schemeClr val="phClr"/>
-          </a:solidFill>
-          <a:prstDash val="solid"/>
-        </a:ln>
-      </a:lnStyleLst>
-      <a:effectStyleLst>
-        <a:effectStyle>
-          <a:effectLst>
-            <a:outerShdw blurRad="40000" dist="20000" dir="5400000" rotWithShape="0">
-              <a:srgbClr val="000000">
-                <a:alpha val="38000"/>
-              </a:srgbClr>
-            </a:outerShdw>
-          </a:effectLst>
-        </a:effectStyle>
-        <a:effectStyle>
-          <a:effectLst>
-            <a:outerShdw blurRad="40000" dist="23000" dir="5400000" rotWithShape="0">
-              <a:srgbClr val="000000">
-                <a:alpha val="35000"/>
-              </a:srgbClr>
-            </a:outerShdw>
-          </a:effectLst>
-        </a:effectStyle>
-        <a:effectStyle>
-          <a:effectLst>
-            <a:outerShdw blurRad="40000" dist="23000" dir="5400000" rotWithShape="0">
-              <a:srgbClr val="000000">
-                <a:alpha val="35000"/>
-              </a:srgbClr>
-            </a:outerShdw>
-          </a:effectLst>
-          <a:scene3d>
-            <a:camera prst="orthographicFront">
-              <a:rot lat="0" lon="0" rev="0"/>
-            </a:camera>
-            <a:lightRig rig="threePt" dir="t">
-              <a:rot lat="0" lon="0" rev="1200000"/>
-            </a:lightRig>
-          </a:scene3d>
-          <a:sp3d>
-            <a:bevelT w="63500" h="25400"/>
-          </a:sp3d>
-        </a:effectStyle>
-      </a:effectStyleLst>
-      <a:bgFillStyleLst>
-        <a:solidFill>
-          <a:schemeClr val="phClr"/>
-        </a:solidFill>
-        <a:gradFill rotWithShape="1">
-          <a:gsLst>
-            <a:gs pos="0">
-              <a:schemeClr val="phClr">
-                <a:tint val="40000"/>
-                <a:satMod val="350000"/>
-              </a:schemeClr>
-            </a:gs>
-            <a:gs pos="40000">
-              <a:schemeClr val="phClr">
-                <a:tint val="45000"/>
-                <a:shade val="99000"/>
-                <a:satMod val="350000"/>
-              </a:schemeClr>
-            </a:gs>
-            <a:gs pos="100000">
-              <a:schemeClr val="phClr">
-                <a:shade val="20000"/>
-                <a:satMod val="255000"/>
-              </a:schemeClr>
-            </a:gs>
-          </a:gsLst>
-          <a:path path="circle">
-            <a:fillToRect l="50000" t="-80000" r="50000" b="180000"/>
-          </a:path>
-        </a:gradFill>
-        <a:gradFill rotWithShape="1">
-          <a:gsLst>
-            <a:gs pos="0">
-              <a:schemeClr val="phClr">
-                <a:tint val="80000"/>
-                <a:satMod val="300000"/>
-              </a:schemeClr>
-            </a:gs>
-            <a:gs pos="100000">
-              <a:schemeClr val="phClr">
-                <a:shade val="30000"/>
-                <a:satMod val="200000"/>
-              </a:schemeClr>
-            </a:gs>
-          </a:gsLst>
-          <a:path path="circle">
-            <a:fillToRect l="50000" t="50000" r="50000" b="50000"/>
-          </a:path>
-        </a:gradFill>
-      </a:bgFillStyleLst>
-    </a:fmtScheme>
-  </a:themeElements>
+  <a:objectDefaults/>
+  <a:extraClrSchemeLst/>
 </a:theme>
 </file>